--- a/Sudoku_AI_Coach_Presentation.pptx
+++ b/Sudoku_AI_Coach_Presentation.pptx
@@ -6,19 +6,19 @@
   </p:sldMasterIdLst>
   <p:sldIdLst>
     <p:sldId id="256" r:id="rId2"/>
+    <p:sldId id="271" r:id="rId22"/>
     <p:sldId id="257" r:id="rId3"/>
-    <p:sldId id="258" r:id="rId4"/>
+    <p:sldId id="265" r:id="rId11"/>
     <p:sldId id="259" r:id="rId5"/>
     <p:sldId id="260" r:id="rId6"/>
     <p:sldId id="261" r:id="rId7"/>
     <p:sldId id="262" r:id="rId8"/>
     <p:sldId id="263" r:id="rId9"/>
-    <p:sldId id="264" r:id="rId10"/>
-    <p:sldId id="265" r:id="rId11"/>
-    <p:sldId id="266" r:id="rId12"/>
     <p:sldId id="267" r:id="rId13"/>
     <p:sldId id="268" r:id="rId14"/>
+    <p:sldId id="272" r:id="rId23"/>
     <p:sldId id="269" r:id="rId15"/>
+    <p:sldId id="273" r:id="rId24"/>
     <p:sldId id="270" r:id="rId16"/>
   </p:sldIdLst>
   <p:notesMasterIdLst>
@@ -694,94 +694,6 @@
 </p:notes>
 </file>
 
-<file path=ppt/notesSlides/notesSlide11.xml><?xml version="1.0" encoding="utf-8"?>
-<p:notes xmlns:a="http://schemas.openxmlformats.org/drawingml/2006/main" xmlns:r="http://schemas.openxmlformats.org/officeDocument/2006/relationships" xmlns:p="http://schemas.openxmlformats.org/presentationml/2006/main">
-  <p:cSld>
-    <p:spTree>
-      <p:nvGrpSpPr>
-        <p:cNvPr id="1" name=""/>
-        <p:cNvGrpSpPr/>
-        <p:nvPr/>
-      </p:nvGrpSpPr>
-      <p:grpSpPr>
-        <a:xfrm>
-          <a:off x="0" y="0"/>
-          <a:ext cx="0" cy="0"/>
-          <a:chOff x="0" y="0"/>
-          <a:chExt cx="0" cy="0"/>
-        </a:xfrm>
-      </p:grpSpPr>
-      <p:sp>
-        <p:nvSpPr>
-          <p:cNvPr id="2" name="Slide Image Placeholder 1"/>
-          <p:cNvSpPr>
-            <a:spLocks noGrp="1" noRot="1" noChangeAspect="1"/>
-          </p:cNvSpPr>
-          <p:nvPr>
-            <p:ph type="sldImg"/>
-          </p:nvPr>
-        </p:nvSpPr>
-        <p:spPr/>
-      </p:sp>
-      <p:sp>
-        <p:nvSpPr>
-          <p:cNvPr id="3" name="Notes Placeholder 2"/>
-          <p:cNvSpPr>
-            <a:spLocks noGrp="1"/>
-          </p:cNvSpPr>
-          <p:nvPr>
-            <p:ph type="body" idx="1"/>
-          </p:nvPr>
-        </p:nvSpPr>
-        <p:spPr/>
-        <p:txBody>
-          <a:bodyPr/>
-          <a:lstStyle/>
-          <a:p>
-            <a:r>
-              <a:rPr lang="en-US" dirty="0"/>
-              <a:t>Real output from our engine on the medium demo puzzle. The same deduction escalates; we never jump to a different cell. In the app the reasoning cells light up on the board at each stage.</a:t>
-            </a:r>
-            <a:endParaRPr lang="en-US" dirty="0"/>
-          </a:p>
-        </p:txBody>
-      </p:sp>
-      <p:sp>
-        <p:nvSpPr>
-          <p:cNvPr id="4" name="Slide Number Placeholder 3"/>
-          <p:cNvSpPr>
-            <a:spLocks noGrp="1"/>
-          </p:cNvSpPr>
-          <p:nvPr>
-            <p:ph type="sldNum" sz="quarter" idx="10"/>
-          </p:nvPr>
-        </p:nvSpPr>
-        <p:spPr/>
-        <p:txBody>
-          <a:bodyPr/>
-          <a:lstStyle/>
-          <a:p>
-            <a:fld id="{F7021451-1387-4CA6-816F-3879F97B5CBC}" type="slidenum">
-              <a:rPr lang="en-US"/>
-              <a:t>11</a:t>
-            </a:fld>
-            <a:endParaRPr lang="en-US"/>
-          </a:p>
-        </p:txBody>
-      </p:sp>
-    </p:spTree>
-    <p:extLst>
-      <p:ext uri="{BB962C8B-B14F-4D97-AF65-F5344CB8AC3E}">
-        <p14:creationId xmlns:p14="http://schemas.microsoft.com/office/powerpoint/2010/main" val="1024086991"/>
-      </p:ext>
-    </p:extLst>
-  </p:cSld>
-  <p:clrMapOvr>
-    <a:masterClrMapping/>
-  </p:clrMapOvr>
-</p:notes>
-</file>
-
 <file path=ppt/notesSlides/notesSlide12.xml><?xml version="1.0" encoding="utf-8"?>
 <p:notes xmlns:a="http://schemas.openxmlformats.org/drawingml/2006/main" xmlns:r="http://schemas.openxmlformats.org/officeDocument/2006/relationships" xmlns:p="http://schemas.openxmlformats.org/presentationml/2006/main">
   <p:cSld>
@@ -1229,94 +1141,6 @@
 </p:notes>
 </file>
 
-<file path=ppt/notesSlides/notesSlide3.xml><?xml version="1.0" encoding="utf-8"?>
-<p:notes xmlns:a="http://schemas.openxmlformats.org/drawingml/2006/main" xmlns:r="http://schemas.openxmlformats.org/officeDocument/2006/relationships" xmlns:p="http://schemas.openxmlformats.org/presentationml/2006/main">
-  <p:cSld>
-    <p:spTree>
-      <p:nvGrpSpPr>
-        <p:cNvPr id="1" name=""/>
-        <p:cNvGrpSpPr/>
-        <p:nvPr/>
-      </p:nvGrpSpPr>
-      <p:grpSpPr>
-        <a:xfrm>
-          <a:off x="0" y="0"/>
-          <a:ext cx="0" cy="0"/>
-          <a:chOff x="0" y="0"/>
-          <a:chExt cx="0" cy="0"/>
-        </a:xfrm>
-      </p:grpSpPr>
-      <p:sp>
-        <p:nvSpPr>
-          <p:cNvPr id="2" name="Slide Image Placeholder 1"/>
-          <p:cNvSpPr>
-            <a:spLocks noGrp="1" noRot="1" noChangeAspect="1"/>
-          </p:cNvSpPr>
-          <p:nvPr>
-            <p:ph type="sldImg"/>
-          </p:nvPr>
-        </p:nvSpPr>
-        <p:spPr/>
-      </p:sp>
-      <p:sp>
-        <p:nvSpPr>
-          <p:cNvPr id="3" name="Notes Placeholder 2"/>
-          <p:cNvSpPr>
-            <a:spLocks noGrp="1"/>
-          </p:cNvSpPr>
-          <p:nvPr>
-            <p:ph type="body" idx="1"/>
-          </p:nvPr>
-        </p:nvSpPr>
-        <p:spPr/>
-        <p:txBody>
-          <a:bodyPr/>
-          <a:lstStyle/>
-          <a:p>
-            <a:r>
-              <a:rPr lang="en-US" dirty="0"/>
-              <a:t>THIS IS THE KEY SLIDE for 'is this really AI or just an API?'. Answer: the AI is layers 1 and 2, which we implemented ourselves. That's classical, symbolic AI from our syllabus: CSP formulation, search, constraint propagation, heuristics, and a rule-based knowledge base. Layer 3 is optional. An LLM only rephrases facts the engine already proved, and our verifier rejects any reply that states a wrong digit. Without an API key, everything still works.</a:t>
-            </a:r>
-            <a:endParaRPr lang="en-US" dirty="0"/>
-          </a:p>
-        </p:txBody>
-      </p:sp>
-      <p:sp>
-        <p:nvSpPr>
-          <p:cNvPr id="4" name="Slide Number Placeholder 3"/>
-          <p:cNvSpPr>
-            <a:spLocks noGrp="1"/>
-          </p:cNvSpPr>
-          <p:nvPr>
-            <p:ph type="sldNum" sz="quarter" idx="10"/>
-          </p:nvPr>
-        </p:nvSpPr>
-        <p:spPr/>
-        <p:txBody>
-          <a:bodyPr/>
-          <a:lstStyle/>
-          <a:p>
-            <a:fld id="{F7021451-1387-4CA6-816F-3879F97B5CBC}" type="slidenum">
-              <a:rPr lang="en-US"/>
-              <a:t>3</a:t>
-            </a:fld>
-            <a:endParaRPr lang="en-US"/>
-          </a:p>
-        </p:txBody>
-      </p:sp>
-    </p:spTree>
-    <p:extLst>
-      <p:ext uri="{BB962C8B-B14F-4D97-AF65-F5344CB8AC3E}">
-        <p14:creationId xmlns:p14="http://schemas.microsoft.com/office/powerpoint/2010/main" val="1024086991"/>
-      </p:ext>
-    </p:extLst>
-  </p:cSld>
-  <p:clrMapOvr>
-    <a:masterClrMapping/>
-  </p:clrMapOvr>
-</p:notes>
-</file>
-
 <file path=ppt/notesSlides/notesSlide4.xml><?xml version="1.0" encoding="utf-8"?>
 <p:notes xmlns:a="http://schemas.openxmlformats.org/drawingml/2006/main" xmlns:r="http://schemas.openxmlformats.org/officeDocument/2006/relationships" xmlns:p="http://schemas.openxmlformats.org/presentationml/2006/main">
   <p:cSld>
@@ -1739,94 +1563,6 @@
             <a:fld id="{F7021451-1387-4CA6-816F-3879F97B5CBC}" type="slidenum">
               <a:rPr lang="en-US"/>
               <a:t>8</a:t>
-            </a:fld>
-            <a:endParaRPr lang="en-US"/>
-          </a:p>
-        </p:txBody>
-      </p:sp>
-    </p:spTree>
-    <p:extLst>
-      <p:ext uri="{BB962C8B-B14F-4D97-AF65-F5344CB8AC3E}">
-        <p14:creationId xmlns:p14="http://schemas.microsoft.com/office/powerpoint/2010/main" val="1024086991"/>
-      </p:ext>
-    </p:extLst>
-  </p:cSld>
-  <p:clrMapOvr>
-    <a:masterClrMapping/>
-  </p:clrMapOvr>
-</p:notes>
-</file>
-
-<file path=ppt/notesSlides/notesSlide9.xml><?xml version="1.0" encoding="utf-8"?>
-<p:notes xmlns:a="http://schemas.openxmlformats.org/drawingml/2006/main" xmlns:r="http://schemas.openxmlformats.org/officeDocument/2006/relationships" xmlns:p="http://schemas.openxmlformats.org/presentationml/2006/main">
-  <p:cSld>
-    <p:spTree>
-      <p:nvGrpSpPr>
-        <p:cNvPr id="1" name=""/>
-        <p:cNvGrpSpPr/>
-        <p:nvPr/>
-      </p:nvGrpSpPr>
-      <p:grpSpPr>
-        <a:xfrm>
-          <a:off x="0" y="0"/>
-          <a:ext cx="0" cy="0"/>
-          <a:chOff x="0" y="0"/>
-          <a:chExt cx="0" cy="0"/>
-        </a:xfrm>
-      </p:grpSpPr>
-      <p:sp>
-        <p:nvSpPr>
-          <p:cNvPr id="2" name="Slide Image Placeholder 1"/>
-          <p:cNvSpPr>
-            <a:spLocks noGrp="1" noRot="1" noChangeAspect="1"/>
-          </p:cNvSpPr>
-          <p:nvPr>
-            <p:ph type="sldImg"/>
-          </p:nvPr>
-        </p:nvSpPr>
-        <p:spPr/>
-      </p:sp>
-      <p:sp>
-        <p:nvSpPr>
-          <p:cNvPr id="3" name="Notes Placeholder 2"/>
-          <p:cNvSpPr>
-            <a:spLocks noGrp="1"/>
-          </p:cNvSpPr>
-          <p:nvPr>
-            <p:ph type="body" idx="1"/>
-          </p:nvPr>
-        </p:nvSpPr>
-        <p:spPr/>
-        <p:txBody>
-          <a:bodyPr/>
-          <a:lstStyle/>
-          <a:p>
-            <a:r>
-              <a:rPr lang="en-US" dirty="0"/>
-              <a:t>If the professor asks 'why not just use ChatGPT?': LLMs are not reliable at constraint reasoning. They state wrong placements confidently. Pure solvers are correct but cannot hold a conversation. Combining them is the neuro-symbolic approach.</a:t>
-            </a:r>
-            <a:endParaRPr lang="en-US" dirty="0"/>
-          </a:p>
-        </p:txBody>
-      </p:sp>
-      <p:sp>
-        <p:nvSpPr>
-          <p:cNvPr id="4" name="Slide Number Placeholder 3"/>
-          <p:cNvSpPr>
-            <a:spLocks noGrp="1"/>
-          </p:cNvSpPr>
-          <p:nvPr>
-            <p:ph type="sldNum" sz="quarter" idx="10"/>
-          </p:nvPr>
-        </p:nvSpPr>
-        <p:spPr/>
-        <p:txBody>
-          <a:bodyPr/>
-          <a:lstStyle/>
-          <a:p>
-            <a:fld id="{F7021451-1387-4CA6-816F-3879F97B5CBC}" type="slidenum">
-              <a:rPr lang="en-US"/>
-              <a:t>9</a:t>
             </a:fld>
             <a:endParaRPr lang="en-US"/>
           </a:p>
@@ -3220,6 +2956,74 @@
           </a:p>
         </p:txBody>
       </p:sp>
+      <p:sp>
+        <p:nvSpPr>
+          <p:cNvPr id="24" name="TextBox 23"/>
+          <p:cNvSpPr txBox="1"/>
+          <p:nvPr/>
+        </p:nvSpPr>
+        <p:spPr>
+          <a:xfrm>
+            <a:off x="548640" y="3794760"/>
+            <a:ext cx="4846320" cy="274320"/>
+          </a:xfrm>
+          <a:prstGeom prst="rect">
+            <a:avLst/>
+          </a:prstGeom>
+          <a:noFill/>
+        </p:spPr>
+        <p:txBody>
+          <a:bodyPr wrap="square" lIns="0" rIns="0" tIns="0" bIns="0" anchor="t">
+            <a:spAutoFit/>
+          </a:bodyPr>
+          <a:lstStyle/>
+          <a:p>
+            <a:pPr algn="l"/>
+            <a:r>
+              <a:rPr sz="1300" b="1">
+                <a:solidFill>
+                  <a:srgbClr val="CBD5E1"/>
+                </a:solidFill>
+              </a:rPr>
+              <a:t>Sathwik Teja  ·  Sawan Rana  ·  Sunil  ·  Rishikesh</a:t>
+            </a:r>
+          </a:p>
+        </p:txBody>
+      </p:sp>
+      <p:sp>
+        <p:nvSpPr>
+          <p:cNvPr id="25" name="TextBox 24"/>
+          <p:cNvSpPr txBox="1"/>
+          <p:nvPr/>
+        </p:nvSpPr>
+        <p:spPr>
+          <a:xfrm>
+            <a:off x="4572000" y="4782312"/>
+            <a:ext cx="3474720" cy="228600"/>
+          </a:xfrm>
+          <a:prstGeom prst="rect">
+            <a:avLst/>
+          </a:prstGeom>
+          <a:noFill/>
+        </p:spPr>
+        <p:txBody>
+          <a:bodyPr wrap="square" lIns="0" rIns="0" tIns="0" bIns="0" anchor="ctr">
+            <a:spAutoFit/>
+          </a:bodyPr>
+          <a:lstStyle/>
+          <a:p>
+            <a:pPr algn="r"/>
+            <a:r>
+              <a:rPr sz="900" b="1">
+                <a:solidFill>
+                  <a:srgbClr val="94A3B8"/>
+                </a:solidFill>
+              </a:rPr>
+              <a:t>Presenter: Sathwik Teja</a:t>
+            </a:r>
+          </a:p>
+        </p:txBody>
+      </p:sp>
     </p:spTree>
   </p:cSld>
   <p:clrMapOvr>
@@ -3277,7 +3081,7 @@
                   <a:schemeClr val="tx1"/>
                 </a:solidFill>
               </a:rPr>
-              <a:t>What the coach can do</a:t>
+              <a:t>What we built</a:t>
             </a:r>
             <a:endParaRPr lang="en-US" sz="3000" dirty="0"/>
           </a:p>
@@ -4028,1248 +3832,37 @@
           </a:p>
         </p:txBody>
       </p:sp>
-    </p:spTree>
-  </p:cSld>
-  <p:clrMapOvr>
-    <a:masterClrMapping/>
-  </p:clrMapOvr>
-</p:sld>
-</file>
-
-<file path=ppt/slides/slide11.xml><?xml version="1.0" encoding="utf-8"?>
-<p:sld xmlns:a="http://schemas.openxmlformats.org/drawingml/2006/main" xmlns:r="http://schemas.openxmlformats.org/officeDocument/2006/relationships" xmlns:p="http://schemas.openxmlformats.org/presentationml/2006/main">
-  <p:cSld name="Slide 11">
-    <p:spTree>
-      <p:nvGrpSpPr>
-        <p:cNvPr id="1" name=""/>
-        <p:cNvGrpSpPr/>
-        <p:nvPr/>
-      </p:nvGrpSpPr>
-      <p:grpSpPr>
-        <a:xfrm>
-          <a:off x="0" y="0"/>
-          <a:ext cx="0" cy="0"/>
-          <a:chOff x="0" y="0"/>
-          <a:chExt cx="0" cy="0"/>
-        </a:xfrm>
-      </p:grpSpPr>
-      <p:sp>
-        <p:nvSpPr>
-          <p:cNvPr id="2" name="Text 0"/>
-          <p:cNvSpPr/>
-          <p:nvPr>
-            <p:ph idx="100" type="title" hasCustomPrompt="1"/>
-          </p:nvPr>
-        </p:nvSpPr>
-        <p:spPr>
-          <a:xfrm>
-            <a:off x="457200" y="274320"/>
-            <a:ext cx="8229600" cy="685800"/>
-          </a:xfrm>
-          <a:prstGeom prst="rect">
-            <a:avLst/>
-          </a:prstGeom>
-          <a:noFill/>
-          <a:ln/>
-        </p:spPr>
-        <p:txBody>
-          <a:bodyPr wrap="square" lIns="0" tIns="0" rIns="0" bIns="0" rtlCol="0" anchor="ctr"/>
-          <a:lstStyle/>
-          <a:p>
-            <a:pPr indent="0" marL="0">
-              <a:buNone/>
-            </a:pPr>
-            <a:r>
-              <a:rPr lang="en-US" sz="3000" b="1" dirty="0">
-                <a:solidFill>
-                  <a:schemeClr val="tx1"/>
-                </a:solidFill>
-              </a:rPr>
-              <a:t>One hint, three levels</a:t>
-            </a:r>
-            <a:endParaRPr lang="en-US" sz="3000" dirty="0"/>
-          </a:p>
-        </p:txBody>
-      </p:sp>
-      <p:sp>
-        <p:nvSpPr>
-          <p:cNvPr id="3" name="cell- "/>
-          <p:cNvSpPr/>
-          <p:nvPr/>
-        </p:nvSpPr>
-        <p:spPr>
-          <a:xfrm>
-            <a:off x="731520" y="1325880"/>
-            <a:ext cx="822960" cy="822960"/>
-          </a:xfrm>
-          <a:prstGeom prst="roundRect">
-            <a:avLst>
-              <a:gd name="adj" fmla="val 6667"/>
-            </a:avLst>
-          </a:prstGeom>
-          <a:solidFill>
-            <a:srgbClr val="EEF2F7"/>
-          </a:solidFill>
-          <a:ln w="12700">
-            <a:solidFill>
-              <a:srgbClr val="EEF2F7"/>
-            </a:solidFill>
-            <a:prstDash val="solid"/>
-          </a:ln>
-        </p:spPr>
-      </p:sp>
-      <p:sp>
-        <p:nvSpPr>
-          <p:cNvPr id="4" name="Text 2"/>
-          <p:cNvSpPr txBox="1"/>
-          <p:nvPr/>
-        </p:nvSpPr>
-        <p:spPr>
-          <a:xfrm>
-            <a:off x="731520" y="1325880"/>
-            <a:ext cx="822960" cy="822960"/>
-          </a:xfrm>
-          <a:prstGeom prst="rect">
-            <a:avLst/>
-          </a:prstGeom>
-          <a:noFill/>
-          <a:ln/>
-        </p:spPr>
-        <p:txBody>
-          <a:bodyPr wrap="square" lIns="0" tIns="0" rIns="0" bIns="0" rtlCol="0" anchor="ctr"/>
-          <a:lstStyle/>
-          <a:p>
-            <a:pPr algn="ctr" indent="0" marL="0">
-              <a:buNone/>
-            </a:pPr>
-            <a:r>
-              <a:rPr lang="en-US" sz="2600" b="1" dirty="0">
-                <a:solidFill>
-                  <a:srgbClr val="334155"/>
-                </a:solidFill>
-                <a:latin typeface="Cambria" pitchFamily="34" charset="0"/>
-                <a:ea typeface="Cambria" pitchFamily="34" charset="-122"/>
-                <a:cs typeface="Cambria" pitchFamily="34" charset="-120"/>
-              </a:rPr>
-              <a:t> </a:t>
-            </a:r>
-            <a:endParaRPr lang="en-US" sz="2600" dirty="0"/>
-          </a:p>
-        </p:txBody>
-      </p:sp>
-      <p:sp>
-        <p:nvSpPr>
-          <p:cNvPr id="5" name="cell-8"/>
-          <p:cNvSpPr/>
-          <p:nvPr/>
-        </p:nvSpPr>
-        <p:spPr>
-          <a:xfrm>
-            <a:off x="1618488" y="1325880"/>
-            <a:ext cx="822960" cy="822960"/>
-          </a:xfrm>
-          <a:prstGeom prst="roundRect">
-            <a:avLst>
-              <a:gd name="adj" fmla="val 6667"/>
-            </a:avLst>
-          </a:prstGeom>
-          <a:solidFill>
-            <a:srgbClr val="D97706"/>
-          </a:solidFill>
-          <a:ln w="12700">
-            <a:solidFill>
-              <a:srgbClr val="D97706"/>
-            </a:solidFill>
-            <a:prstDash val="solid"/>
-          </a:ln>
-        </p:spPr>
-      </p:sp>
-      <p:sp>
-        <p:nvSpPr>
-          <p:cNvPr id="6" name="Text 4"/>
-          <p:cNvSpPr txBox="1"/>
-          <p:nvPr/>
-        </p:nvSpPr>
-        <p:spPr>
-          <a:xfrm>
-            <a:off x="1618488" y="1325880"/>
-            <a:ext cx="822960" cy="822960"/>
-          </a:xfrm>
-          <a:prstGeom prst="rect">
-            <a:avLst/>
-          </a:prstGeom>
-          <a:noFill/>
-          <a:ln/>
-        </p:spPr>
-        <p:txBody>
-          <a:bodyPr wrap="square" lIns="0" tIns="0" rIns="0" bIns="0" rtlCol="0" anchor="ctr"/>
-          <a:lstStyle/>
-          <a:p>
-            <a:pPr algn="ctr" indent="0" marL="0">
-              <a:buNone/>
-            </a:pPr>
-            <a:r>
-              <a:rPr lang="en-US" sz="2600" b="1" dirty="0">
-                <a:solidFill>
-                  <a:srgbClr val="FFFFFF"/>
-                </a:solidFill>
-                <a:latin typeface="Cambria" pitchFamily="34" charset="0"/>
-                <a:ea typeface="Cambria" pitchFamily="34" charset="-122"/>
-                <a:cs typeface="Cambria" pitchFamily="34" charset="-120"/>
-              </a:rPr>
-              <a:t>8</a:t>
-            </a:r>
-            <a:endParaRPr lang="en-US" sz="2600" dirty="0"/>
-          </a:p>
-        </p:txBody>
-      </p:sp>
-      <p:sp>
-        <p:nvSpPr>
-          <p:cNvPr id="7" name="cell- "/>
-          <p:cNvSpPr/>
-          <p:nvPr/>
-        </p:nvSpPr>
-        <p:spPr>
-          <a:xfrm>
-            <a:off x="2505456" y="1325880"/>
-            <a:ext cx="822960" cy="822960"/>
-          </a:xfrm>
-          <a:prstGeom prst="roundRect">
-            <a:avLst>
-              <a:gd name="adj" fmla="val 6667"/>
-            </a:avLst>
-          </a:prstGeom>
-          <a:solidFill>
-            <a:srgbClr val="EEF2F7"/>
-          </a:solidFill>
-          <a:ln w="12700">
-            <a:solidFill>
-              <a:srgbClr val="EEF2F7"/>
-            </a:solidFill>
-            <a:prstDash val="solid"/>
-          </a:ln>
-        </p:spPr>
-      </p:sp>
-      <p:sp>
-        <p:nvSpPr>
-          <p:cNvPr id="8" name="Text 6"/>
-          <p:cNvSpPr txBox="1"/>
-          <p:nvPr/>
-        </p:nvSpPr>
-        <p:spPr>
-          <a:xfrm>
-            <a:off x="2505456" y="1325880"/>
-            <a:ext cx="822960" cy="822960"/>
-          </a:xfrm>
-          <a:prstGeom prst="rect">
-            <a:avLst/>
-          </a:prstGeom>
-          <a:noFill/>
-          <a:ln/>
-        </p:spPr>
-        <p:txBody>
-          <a:bodyPr wrap="square" lIns="0" tIns="0" rIns="0" bIns="0" rtlCol="0" anchor="ctr"/>
-          <a:lstStyle/>
-          <a:p>
-            <a:pPr algn="ctr" indent="0" marL="0">
-              <a:buNone/>
-            </a:pPr>
-            <a:r>
-              <a:rPr lang="en-US" sz="2600" b="1" dirty="0">
-                <a:solidFill>
-                  <a:srgbClr val="334155"/>
-                </a:solidFill>
-                <a:latin typeface="Cambria" pitchFamily="34" charset="0"/>
-                <a:ea typeface="Cambria" pitchFamily="34" charset="-122"/>
-                <a:cs typeface="Cambria" pitchFamily="34" charset="-120"/>
-              </a:rPr>
-              <a:t> </a:t>
-            </a:r>
-            <a:endParaRPr lang="en-US" sz="2600" dirty="0"/>
-          </a:p>
-        </p:txBody>
-      </p:sp>
-      <p:sp>
-        <p:nvSpPr>
-          <p:cNvPr id="9" name="cell- "/>
-          <p:cNvSpPr/>
-          <p:nvPr/>
-        </p:nvSpPr>
-        <p:spPr>
-          <a:xfrm>
-            <a:off x="731520" y="2212848"/>
-            <a:ext cx="822960" cy="822960"/>
-          </a:xfrm>
-          <a:prstGeom prst="roundRect">
-            <a:avLst>
-              <a:gd name="adj" fmla="val 6667"/>
-            </a:avLst>
-          </a:prstGeom>
-          <a:solidFill>
-            <a:srgbClr val="EEF2F7"/>
-          </a:solidFill>
-          <a:ln w="12700">
-            <a:solidFill>
-              <a:srgbClr val="EEF2F7"/>
-            </a:solidFill>
-            <a:prstDash val="solid"/>
-          </a:ln>
-        </p:spPr>
-      </p:sp>
-      <p:sp>
-        <p:nvSpPr>
-          <p:cNvPr id="10" name="Text 8"/>
-          <p:cNvSpPr txBox="1"/>
-          <p:nvPr/>
-        </p:nvSpPr>
-        <p:spPr>
-          <a:xfrm>
-            <a:off x="731520" y="2212848"/>
-            <a:ext cx="822960" cy="822960"/>
-          </a:xfrm>
-          <a:prstGeom prst="rect">
-            <a:avLst/>
-          </a:prstGeom>
-          <a:noFill/>
-          <a:ln/>
-        </p:spPr>
-        <p:txBody>
-          <a:bodyPr wrap="square" lIns="0" tIns="0" rIns="0" bIns="0" rtlCol="0" anchor="ctr"/>
-          <a:lstStyle/>
-          <a:p>
-            <a:pPr algn="ctr" indent="0" marL="0">
-              <a:buNone/>
-            </a:pPr>
-            <a:r>
-              <a:rPr lang="en-US" sz="2600" b="1" dirty="0">
-                <a:solidFill>
-                  <a:srgbClr val="334155"/>
-                </a:solidFill>
-                <a:latin typeface="Cambria" pitchFamily="34" charset="0"/>
-                <a:ea typeface="Cambria" pitchFamily="34" charset="-122"/>
-                <a:cs typeface="Cambria" pitchFamily="34" charset="-120"/>
-              </a:rPr>
-              <a:t> </a:t>
-            </a:r>
-            <a:endParaRPr lang="en-US" sz="2600" dirty="0"/>
-          </a:p>
-        </p:txBody>
-      </p:sp>
-      <p:sp>
-        <p:nvSpPr>
-          <p:cNvPr id="11" name="cell-7"/>
-          <p:cNvSpPr/>
-          <p:nvPr/>
-        </p:nvSpPr>
-        <p:spPr>
-          <a:xfrm>
-            <a:off x="1618488" y="2212848"/>
-            <a:ext cx="822960" cy="822960"/>
-          </a:xfrm>
-          <a:prstGeom prst="roundRect">
-            <a:avLst>
-              <a:gd name="adj" fmla="val 6667"/>
-            </a:avLst>
-          </a:prstGeom>
-          <a:solidFill>
-            <a:srgbClr val="D97706"/>
-          </a:solidFill>
-          <a:ln w="12700">
-            <a:solidFill>
-              <a:srgbClr val="D97706"/>
-            </a:solidFill>
-            <a:prstDash val="solid"/>
-          </a:ln>
-        </p:spPr>
-      </p:sp>
-      <p:sp>
-        <p:nvSpPr>
-          <p:cNvPr id="12" name="Text 10"/>
-          <p:cNvSpPr txBox="1"/>
-          <p:nvPr/>
-        </p:nvSpPr>
-        <p:spPr>
-          <a:xfrm>
-            <a:off x="1618488" y="2212848"/>
-            <a:ext cx="822960" cy="822960"/>
-          </a:xfrm>
-          <a:prstGeom prst="rect">
-            <a:avLst/>
-          </a:prstGeom>
-          <a:noFill/>
-          <a:ln/>
-        </p:spPr>
-        <p:txBody>
-          <a:bodyPr wrap="square" lIns="0" tIns="0" rIns="0" bIns="0" rtlCol="0" anchor="ctr"/>
-          <a:lstStyle/>
-          <a:p>
-            <a:pPr algn="ctr" indent="0" marL="0">
-              <a:buNone/>
-            </a:pPr>
-            <a:r>
-              <a:rPr lang="en-US" sz="2600" b="1" dirty="0">
-                <a:solidFill>
-                  <a:srgbClr val="FFFFFF"/>
-                </a:solidFill>
-                <a:latin typeface="Cambria" pitchFamily="34" charset="0"/>
-                <a:ea typeface="Cambria" pitchFamily="34" charset="-122"/>
-                <a:cs typeface="Cambria" pitchFamily="34" charset="-120"/>
-              </a:rPr>
-              <a:t>7</a:t>
-            </a:r>
-            <a:endParaRPr lang="en-US" sz="2600" dirty="0"/>
-          </a:p>
-        </p:txBody>
-      </p:sp>
-      <p:sp>
-        <p:nvSpPr>
-          <p:cNvPr id="13" name="cell- "/>
-          <p:cNvSpPr/>
-          <p:nvPr/>
-        </p:nvSpPr>
-        <p:spPr>
-          <a:xfrm>
-            <a:off x="2505456" y="2212848"/>
-            <a:ext cx="822960" cy="822960"/>
-          </a:xfrm>
-          <a:prstGeom prst="roundRect">
-            <a:avLst>
-              <a:gd name="adj" fmla="val 6667"/>
-            </a:avLst>
-          </a:prstGeom>
-          <a:solidFill>
-            <a:srgbClr val="EEF2F7"/>
-          </a:solidFill>
-          <a:ln w="12700">
-            <a:solidFill>
-              <a:srgbClr val="EEF2F7"/>
-            </a:solidFill>
-            <a:prstDash val="solid"/>
-          </a:ln>
-        </p:spPr>
-      </p:sp>
-      <p:sp>
-        <p:nvSpPr>
-          <p:cNvPr id="14" name="Text 12"/>
-          <p:cNvSpPr txBox="1"/>
-          <p:nvPr/>
-        </p:nvSpPr>
-        <p:spPr>
-          <a:xfrm>
-            <a:off x="2505456" y="2212848"/>
-            <a:ext cx="822960" cy="822960"/>
-          </a:xfrm>
-          <a:prstGeom prst="rect">
-            <a:avLst/>
-          </a:prstGeom>
-          <a:noFill/>
-          <a:ln/>
-        </p:spPr>
-        <p:txBody>
-          <a:bodyPr wrap="square" lIns="0" tIns="0" rIns="0" bIns="0" rtlCol="0" anchor="ctr"/>
-          <a:lstStyle/>
-          <a:p>
-            <a:pPr algn="ctr" indent="0" marL="0">
-              <a:buNone/>
-            </a:pPr>
-            <a:r>
-              <a:rPr lang="en-US" sz="2600" b="1" dirty="0">
-                <a:solidFill>
-                  <a:srgbClr val="334155"/>
-                </a:solidFill>
-                <a:latin typeface="Cambria" pitchFamily="34" charset="0"/>
-                <a:ea typeface="Cambria" pitchFamily="34" charset="-122"/>
-                <a:cs typeface="Cambria" pitchFamily="34" charset="-120"/>
-              </a:rPr>
-              <a:t> </a:t>
-            </a:r>
-            <a:endParaRPr lang="en-US" sz="2600" dirty="0"/>
-          </a:p>
-        </p:txBody>
-      </p:sp>
-      <p:sp>
-        <p:nvSpPr>
-          <p:cNvPr id="15" name="cell-5"/>
-          <p:cNvSpPr/>
-          <p:nvPr/>
-        </p:nvSpPr>
-        <p:spPr>
-          <a:xfrm>
-            <a:off x="731520" y="3099816"/>
-            <a:ext cx="822960" cy="822960"/>
-          </a:xfrm>
-          <a:prstGeom prst="roundRect">
-            <a:avLst>
-              <a:gd name="adj" fmla="val 6667"/>
-            </a:avLst>
-          </a:prstGeom>
-          <a:solidFill>
-            <a:srgbClr val="D97706"/>
-          </a:solidFill>
-          <a:ln w="12700">
-            <a:solidFill>
-              <a:srgbClr val="D97706"/>
-            </a:solidFill>
-            <a:prstDash val="solid"/>
-          </a:ln>
-        </p:spPr>
-      </p:sp>
-      <p:sp>
-        <p:nvSpPr>
-          <p:cNvPr id="16" name="Text 14"/>
-          <p:cNvSpPr txBox="1"/>
-          <p:nvPr/>
-        </p:nvSpPr>
-        <p:spPr>
-          <a:xfrm>
-            <a:off x="731520" y="3099816"/>
-            <a:ext cx="822960" cy="822960"/>
-          </a:xfrm>
-          <a:prstGeom prst="rect">
-            <a:avLst/>
-          </a:prstGeom>
-          <a:noFill/>
-          <a:ln/>
-        </p:spPr>
-        <p:txBody>
-          <a:bodyPr wrap="square" lIns="0" tIns="0" rIns="0" bIns="0" rtlCol="0" anchor="ctr"/>
-          <a:lstStyle/>
-          <a:p>
-            <a:pPr algn="ctr" indent="0" marL="0">
-              <a:buNone/>
-            </a:pPr>
-            <a:r>
-              <a:rPr lang="en-US" sz="2600" b="1" dirty="0">
-                <a:solidFill>
-                  <a:srgbClr val="FFFFFF"/>
-                </a:solidFill>
-                <a:latin typeface="Cambria" pitchFamily="34" charset="0"/>
-                <a:ea typeface="Cambria" pitchFamily="34" charset="-122"/>
-                <a:cs typeface="Cambria" pitchFamily="34" charset="-120"/>
-              </a:rPr>
-              <a:t>5</a:t>
-            </a:r>
-            <a:endParaRPr lang="en-US" sz="2600" dirty="0"/>
-          </a:p>
-        </p:txBody>
-      </p:sp>
-      <p:sp>
-        <p:nvSpPr>
-          <p:cNvPr id="17" name="cell-C5"/>
-          <p:cNvSpPr/>
-          <p:nvPr/>
-        </p:nvSpPr>
-        <p:spPr>
-          <a:xfrm>
-            <a:off x="1618488" y="3099816"/>
-            <a:ext cx="822960" cy="822960"/>
-          </a:xfrm>
-          <a:prstGeom prst="roundRect">
-            <a:avLst>
-              <a:gd name="adj" fmla="val 6667"/>
-            </a:avLst>
-          </a:prstGeom>
-          <a:solidFill>
-            <a:srgbClr val="0D9488"/>
-          </a:solidFill>
-          <a:ln w="12700">
-            <a:solidFill>
-              <a:srgbClr val="0D9488"/>
-            </a:solidFill>
-            <a:prstDash val="solid"/>
-          </a:ln>
-        </p:spPr>
-      </p:sp>
-      <p:sp>
-        <p:nvSpPr>
-          <p:cNvPr id="18" name="Text 16"/>
-          <p:cNvSpPr txBox="1"/>
-          <p:nvPr/>
-        </p:nvSpPr>
-        <p:spPr>
-          <a:xfrm>
-            <a:off x="1618488" y="3099816"/>
-            <a:ext cx="822960" cy="822960"/>
-          </a:xfrm>
-          <a:prstGeom prst="rect">
-            <a:avLst/>
-          </a:prstGeom>
-          <a:noFill/>
-          <a:ln/>
-        </p:spPr>
-        <p:txBody>
-          <a:bodyPr wrap="square" lIns="0" tIns="0" rIns="0" bIns="0" rtlCol="0" anchor="ctr"/>
-          <a:lstStyle/>
-          <a:p>
-            <a:pPr algn="ctr" indent="0" marL="0">
-              <a:buNone/>
-            </a:pPr>
-            <a:r>
-              <a:rPr lang="en-US" sz="1800" b="1" dirty="0">
-                <a:solidFill>
-                  <a:srgbClr val="FFFFFF"/>
-                </a:solidFill>
-                <a:latin typeface="Cambria" pitchFamily="34" charset="0"/>
-                <a:ea typeface="Cambria" pitchFamily="34" charset="-122"/>
-                <a:cs typeface="Cambria" pitchFamily="34" charset="-120"/>
-              </a:rPr>
-              <a:t>C5</a:t>
-            </a:r>
-            <a:endParaRPr lang="en-US" sz="1800" dirty="0"/>
-          </a:p>
-        </p:txBody>
-      </p:sp>
-      <p:sp>
-        <p:nvSpPr>
-          <p:cNvPr id="19" name="cell- "/>
-          <p:cNvSpPr/>
-          <p:nvPr/>
-        </p:nvSpPr>
-        <p:spPr>
-          <a:xfrm>
-            <a:off x="2505456" y="3099816"/>
-            <a:ext cx="822960" cy="822960"/>
-          </a:xfrm>
-          <a:prstGeom prst="roundRect">
-            <a:avLst>
-              <a:gd name="adj" fmla="val 6667"/>
-            </a:avLst>
-          </a:prstGeom>
-          <a:solidFill>
-            <a:srgbClr val="EEF2F7"/>
-          </a:solidFill>
-          <a:ln w="12700">
-            <a:solidFill>
-              <a:srgbClr val="EEF2F7"/>
-            </a:solidFill>
-            <a:prstDash val="solid"/>
-          </a:ln>
-        </p:spPr>
-      </p:sp>
-      <p:sp>
-        <p:nvSpPr>
-          <p:cNvPr id="20" name="Text 18"/>
-          <p:cNvSpPr txBox="1"/>
-          <p:nvPr/>
-        </p:nvSpPr>
-        <p:spPr>
-          <a:xfrm>
-            <a:off x="2505456" y="3099816"/>
-            <a:ext cx="822960" cy="822960"/>
-          </a:xfrm>
-          <a:prstGeom prst="rect">
-            <a:avLst/>
-          </a:prstGeom>
-          <a:noFill/>
-          <a:ln/>
-        </p:spPr>
-        <p:txBody>
-          <a:bodyPr wrap="square" lIns="0" tIns="0" rIns="0" bIns="0" rtlCol="0" anchor="ctr"/>
-          <a:lstStyle/>
-          <a:p>
-            <a:pPr algn="ctr" indent="0" marL="0">
-              <a:buNone/>
-            </a:pPr>
-            <a:r>
-              <a:rPr lang="en-US" sz="2600" b="1" dirty="0">
-                <a:solidFill>
-                  <a:srgbClr val="334155"/>
-                </a:solidFill>
-                <a:latin typeface="Cambria" pitchFamily="34" charset="0"/>
-                <a:ea typeface="Cambria" pitchFamily="34" charset="-122"/>
-                <a:cs typeface="Cambria" pitchFamily="34" charset="-120"/>
-              </a:rPr>
-              <a:t> </a:t>
-            </a:r>
-            <a:endParaRPr lang="en-US" sz="2600" dirty="0"/>
-          </a:p>
-        </p:txBody>
-      </p:sp>
-      <p:sp>
-        <p:nvSpPr>
-          <p:cNvPr id="21" name="Text 19"/>
-          <p:cNvSpPr txBox="1"/>
-          <p:nvPr/>
-        </p:nvSpPr>
-        <p:spPr>
-          <a:xfrm>
-            <a:off x="548640" y="4069080"/>
-            <a:ext cx="2926080" cy="548640"/>
-          </a:xfrm>
-          <a:prstGeom prst="rect">
-            <a:avLst/>
-          </a:prstGeom>
-          <a:noFill/>
-          <a:ln/>
-        </p:spPr>
-        <p:txBody>
-          <a:bodyPr wrap="square" lIns="0" tIns="0" rIns="0" bIns="0" rtlCol="0" anchor="t"/>
-          <a:lstStyle/>
-          <a:p>
-            <a:pPr indent="0" marL="0">
-              <a:buNone/>
-            </a:pPr>
-            <a:r>
-              <a:rPr lang="en-US" sz="1200" dirty="0">
-                <a:solidFill>
-                  <a:srgbClr val="64748B"/>
-                </a:solidFill>
-              </a:rPr>
-              <a:t>Box 2 of the demo puzzle. Teal is the target, amber the reasoning cells.</a:t>
-            </a:r>
-            <a:endParaRPr lang="en-US" sz="1200" dirty="0"/>
-          </a:p>
-        </p:txBody>
-      </p:sp>
-      <p:sp>
-        <p:nvSpPr>
-          <p:cNvPr id="22" name="user-bubble"/>
-          <p:cNvSpPr/>
-          <p:nvPr/>
-        </p:nvSpPr>
-        <p:spPr>
-          <a:xfrm>
-            <a:off x="6949440" y="1188720"/>
-            <a:ext cx="1737360" cy="329184"/>
-          </a:xfrm>
-          <a:prstGeom prst="roundRect">
-            <a:avLst>
-              <a:gd name="adj" fmla="val 22222"/>
-            </a:avLst>
-          </a:prstGeom>
-          <a:solidFill>
-            <a:srgbClr val="0F172A"/>
-          </a:solidFill>
-          <a:ln w="12700">
-            <a:solidFill>
-              <a:srgbClr val="0F172A"/>
-            </a:solidFill>
-            <a:prstDash val="solid"/>
-          </a:ln>
-        </p:spPr>
-      </p:sp>
-      <p:sp>
-        <p:nvSpPr>
-          <p:cNvPr id="23" name="Text 21"/>
-          <p:cNvSpPr txBox="1"/>
-          <p:nvPr/>
-        </p:nvSpPr>
-        <p:spPr>
-          <a:xfrm>
-            <a:off x="6949440" y="1188720"/>
-            <a:ext cx="1737360" cy="329184"/>
-          </a:xfrm>
-          <a:prstGeom prst="rect">
-            <a:avLst/>
-          </a:prstGeom>
-          <a:noFill/>
-          <a:ln/>
-        </p:spPr>
-        <p:txBody>
-          <a:bodyPr wrap="square" lIns="0" tIns="0" rIns="0" bIns="0" rtlCol="0" anchor="ctr"/>
-          <a:lstStyle/>
-          <a:p>
-            <a:pPr algn="ctr" indent="0" marL="0">
-              <a:buNone/>
-            </a:pPr>
-            <a:r>
-              <a:rPr lang="en-US" sz="1200" dirty="0">
-                <a:solidFill>
-                  <a:srgbClr val="FFFFFF"/>
-                </a:solidFill>
-              </a:rPr>
-              <a:t>Give me a hint</a:t>
-            </a:r>
-            <a:endParaRPr lang="en-US" sz="1200" dirty="0"/>
-          </a:p>
-        </p:txBody>
-      </p:sp>
-      <p:sp>
-        <p:nvSpPr>
-          <p:cNvPr id="24" name="card"/>
-          <p:cNvSpPr/>
-          <p:nvPr/>
-        </p:nvSpPr>
-        <p:spPr>
-          <a:xfrm>
-            <a:off x="3749040" y="1572768"/>
-            <a:ext cx="4937760" cy="658368"/>
-          </a:xfrm>
-          <a:prstGeom prst="roundRect">
-            <a:avLst>
-              <a:gd name="adj" fmla="val 11111"/>
-            </a:avLst>
-          </a:prstGeom>
-          <a:solidFill>
-            <a:srgbClr val="EEF2F7"/>
-          </a:solidFill>
-          <a:ln w="12700">
-            <a:solidFill>
-              <a:srgbClr val="EEF2F7"/>
-            </a:solidFill>
-            <a:prstDash val="solid"/>
-          </a:ln>
-          <a:effectLst>
-            <a:outerShdw sx="100000" sy="100000" kx="0" ky="0" algn="bl" rotWithShape="0" blurRad="76200" dist="19050" dir="5400000">
-              <a:srgbClr val="0F172A">
-                <a:alpha val="12000"/>
-              </a:srgbClr>
-            </a:outerShdw>
-          </a:effectLst>
-        </p:spPr>
-      </p:sp>
-      <p:sp>
-        <p:nvSpPr>
-          <p:cNvPr id="25" name="Text 23"/>
-          <p:cNvSpPr txBox="1"/>
-          <p:nvPr/>
-        </p:nvSpPr>
-        <p:spPr>
-          <a:xfrm>
-            <a:off x="3931920" y="1618488"/>
-            <a:ext cx="1828800" cy="228600"/>
-          </a:xfrm>
-          <a:prstGeom prst="rect">
-            <a:avLst/>
-          </a:prstGeom>
-          <a:noFill/>
-          <a:ln/>
-        </p:spPr>
-        <p:txBody>
-          <a:bodyPr wrap="square" lIns="0" tIns="0" rIns="0" bIns="0" rtlCol="0" anchor="t"/>
-          <a:lstStyle/>
-          <a:p>
-            <a:pPr indent="0" marL="0">
-              <a:buNone/>
-            </a:pPr>
-            <a:r>
-              <a:rPr lang="en-US" sz="1100" b="1" dirty="0">
-                <a:solidFill>
-                  <a:srgbClr val="0D9488"/>
-                </a:solidFill>
-              </a:rPr>
-              <a:t>Stage 1 · Nudge</a:t>
-            </a:r>
-            <a:endParaRPr lang="en-US" sz="1100" dirty="0"/>
-          </a:p>
-        </p:txBody>
-      </p:sp>
-      <p:sp>
-        <p:nvSpPr>
-          <p:cNvPr id="26" name="Text 24"/>
-          <p:cNvSpPr txBox="1"/>
-          <p:nvPr/>
-        </p:nvSpPr>
-        <p:spPr>
-          <a:xfrm>
-            <a:off x="3931920" y="1847088"/>
-            <a:ext cx="4572000" cy="347472"/>
-          </a:xfrm>
-          <a:prstGeom prst="rect">
-            <a:avLst/>
-          </a:prstGeom>
-          <a:noFill/>
-          <a:ln/>
-        </p:spPr>
-        <p:txBody>
-          <a:bodyPr wrap="square" lIns="0" tIns="0" rIns="0" bIns="0" rtlCol="0" anchor="t"/>
-          <a:lstStyle/>
-          <a:p>
-            <a:pPr indent="0" marL="0">
-              <a:buNone/>
-            </a:pPr>
-            <a:r>
-              <a:rPr lang="en-US" sz="1400" dirty="0">
-                <a:solidFill>
-                  <a:srgbClr val="0F172A"/>
-                </a:solidFill>
-              </a:rPr>
-              <a:t>Focus on cell C5 and look at its neighbours in Box 2.</a:t>
-            </a:r>
-            <a:endParaRPr lang="en-US" sz="1400" dirty="0"/>
-          </a:p>
-        </p:txBody>
-      </p:sp>
-      <p:sp>
-        <p:nvSpPr>
-          <p:cNvPr id="27" name="user-bubble"/>
-          <p:cNvSpPr/>
-          <p:nvPr/>
-        </p:nvSpPr>
-        <p:spPr>
-          <a:xfrm>
-            <a:off x="6949440" y="2331720"/>
-            <a:ext cx="1737360" cy="329184"/>
-          </a:xfrm>
-          <a:prstGeom prst="roundRect">
-            <a:avLst>
-              <a:gd name="adj" fmla="val 22222"/>
-            </a:avLst>
-          </a:prstGeom>
-          <a:solidFill>
-            <a:srgbClr val="0F172A"/>
-          </a:solidFill>
-          <a:ln w="12700">
-            <a:solidFill>
-              <a:srgbClr val="0F172A"/>
-            </a:solidFill>
-            <a:prstDash val="solid"/>
-          </a:ln>
-        </p:spPr>
-      </p:sp>
-      <p:sp>
-        <p:nvSpPr>
-          <p:cNvPr id="28" name="Text 26"/>
-          <p:cNvSpPr txBox="1"/>
-          <p:nvPr/>
-        </p:nvSpPr>
-        <p:spPr>
-          <a:xfrm>
-            <a:off x="6949440" y="2331720"/>
-            <a:ext cx="1737360" cy="329184"/>
-          </a:xfrm>
-          <a:prstGeom prst="rect">
-            <a:avLst/>
-          </a:prstGeom>
-          <a:noFill/>
-          <a:ln/>
-        </p:spPr>
-        <p:txBody>
-          <a:bodyPr wrap="square" lIns="0" tIns="0" rIns="0" bIns="0" rtlCol="0" anchor="ctr"/>
-          <a:lstStyle/>
-          <a:p>
-            <a:pPr algn="ctr" indent="0" marL="0">
-              <a:buNone/>
-            </a:pPr>
-            <a:r>
-              <a:rPr lang="en-US" sz="1200" dirty="0">
-                <a:solidFill>
-                  <a:srgbClr val="FFFFFF"/>
-                </a:solidFill>
-              </a:rPr>
-              <a:t>Why?</a:t>
-            </a:r>
-            <a:endParaRPr lang="en-US" sz="1200" dirty="0"/>
-          </a:p>
-        </p:txBody>
-      </p:sp>
-      <p:sp>
-        <p:nvSpPr>
-          <p:cNvPr id="29" name="card"/>
-          <p:cNvSpPr/>
-          <p:nvPr/>
-        </p:nvSpPr>
-        <p:spPr>
-          <a:xfrm>
-            <a:off x="3749040" y="2715768"/>
-            <a:ext cx="4937760" cy="658368"/>
-          </a:xfrm>
-          <a:prstGeom prst="roundRect">
-            <a:avLst>
-              <a:gd name="adj" fmla="val 11111"/>
-            </a:avLst>
-          </a:prstGeom>
-          <a:solidFill>
-            <a:srgbClr val="EEF2F7"/>
-          </a:solidFill>
-          <a:ln w="12700">
-            <a:solidFill>
-              <a:srgbClr val="EEF2F7"/>
-            </a:solidFill>
-            <a:prstDash val="solid"/>
-          </a:ln>
-          <a:effectLst>
-            <a:outerShdw sx="100000" sy="100000" kx="0" ky="0" algn="bl" rotWithShape="0" blurRad="76200" dist="19050" dir="5400000">
-              <a:srgbClr val="0F172A">
-                <a:alpha val="12000"/>
-              </a:srgbClr>
-            </a:outerShdw>
-          </a:effectLst>
-        </p:spPr>
-      </p:sp>
-      <p:sp>
-        <p:nvSpPr>
-          <p:cNvPr id="30" name="Text 28"/>
-          <p:cNvSpPr txBox="1"/>
-          <p:nvPr/>
-        </p:nvSpPr>
-        <p:spPr>
-          <a:xfrm>
-            <a:off x="3931920" y="2761488"/>
-            <a:ext cx="1828800" cy="228600"/>
-          </a:xfrm>
-          <a:prstGeom prst="rect">
-            <a:avLst/>
-          </a:prstGeom>
-          <a:noFill/>
-          <a:ln/>
-        </p:spPr>
-        <p:txBody>
-          <a:bodyPr wrap="square" lIns="0" tIns="0" rIns="0" bIns="0" rtlCol="0" anchor="t"/>
-          <a:lstStyle/>
-          <a:p>
-            <a:pPr indent="0" marL="0">
-              <a:buNone/>
-            </a:pPr>
-            <a:r>
-              <a:rPr lang="en-US" sz="1100" b="1" dirty="0">
-                <a:solidFill>
-                  <a:srgbClr val="D97706"/>
-                </a:solidFill>
-              </a:rPr>
-              <a:t>Stage 2 · Technique</a:t>
-            </a:r>
-            <a:endParaRPr lang="en-US" sz="1100" dirty="0"/>
-          </a:p>
-        </p:txBody>
-      </p:sp>
-      <p:sp>
-        <p:nvSpPr>
-          <p:cNvPr id="31" name="Text 29"/>
-          <p:cNvSpPr txBox="1"/>
-          <p:nvPr/>
-        </p:nvSpPr>
-        <p:spPr>
-          <a:xfrm>
-            <a:off x="3931920" y="2990088"/>
-            <a:ext cx="4572000" cy="347472"/>
-          </a:xfrm>
-          <a:prstGeom prst="rect">
-            <a:avLst/>
-          </a:prstGeom>
-          <a:noFill/>
-          <a:ln/>
-        </p:spPr>
-        <p:txBody>
-          <a:bodyPr wrap="square" lIns="0" tIns="0" rIns="0" bIns="0" rtlCol="0" anchor="t"/>
-          <a:lstStyle/>
-          <a:p>
-            <a:pPr indent="0" marL="0">
-              <a:buNone/>
-            </a:pPr>
-            <a:r>
-              <a:rPr lang="en-US" sz="1400" dirty="0">
-                <a:solidFill>
-                  <a:srgbClr val="0F172A"/>
-                </a:solidFill>
-              </a:rPr>
-              <a:t>Naked Single: C5 already sees the other 8 digits.</a:t>
-            </a:r>
-            <a:endParaRPr lang="en-US" sz="1400" dirty="0"/>
-          </a:p>
-        </p:txBody>
-      </p:sp>
-      <p:sp>
-        <p:nvSpPr>
-          <p:cNvPr id="32" name="user-bubble"/>
-          <p:cNvSpPr/>
-          <p:nvPr/>
-        </p:nvSpPr>
-        <p:spPr>
-          <a:xfrm>
-            <a:off x="6949440" y="3474720"/>
-            <a:ext cx="1737360" cy="329184"/>
-          </a:xfrm>
-          <a:prstGeom prst="roundRect">
-            <a:avLst>
-              <a:gd name="adj" fmla="val 22222"/>
-            </a:avLst>
-          </a:prstGeom>
-          <a:solidFill>
-            <a:srgbClr val="0F172A"/>
-          </a:solidFill>
-          <a:ln w="12700">
-            <a:solidFill>
-              <a:srgbClr val="0F172A"/>
-            </a:solidFill>
-            <a:prstDash val="solid"/>
-          </a:ln>
-        </p:spPr>
-      </p:sp>
-      <p:sp>
-        <p:nvSpPr>
-          <p:cNvPr id="33" name="Text 31"/>
-          <p:cNvSpPr txBox="1"/>
-          <p:nvPr/>
-        </p:nvSpPr>
-        <p:spPr>
-          <a:xfrm>
-            <a:off x="6949440" y="3474720"/>
-            <a:ext cx="1737360" cy="329184"/>
-          </a:xfrm>
-          <a:prstGeom prst="rect">
-            <a:avLst/>
-          </a:prstGeom>
-          <a:noFill/>
-          <a:ln/>
-        </p:spPr>
-        <p:txBody>
-          <a:bodyPr wrap="square" lIns="0" tIns="0" rIns="0" bIns="0" rtlCol="0" anchor="ctr"/>
-          <a:lstStyle/>
-          <a:p>
-            <a:pPr algn="ctr" indent="0" marL="0">
-              <a:buNone/>
-            </a:pPr>
-            <a:r>
-              <a:rPr lang="en-US" sz="1200" dirty="0">
-                <a:solidFill>
-                  <a:srgbClr val="FFFFFF"/>
-                </a:solidFill>
-              </a:rPr>
-              <a:t>Just tell me</a:t>
-            </a:r>
-            <a:endParaRPr lang="en-US" sz="1200" dirty="0"/>
-          </a:p>
-        </p:txBody>
-      </p:sp>
-      <p:sp>
-        <p:nvSpPr>
-          <p:cNvPr id="34" name="card"/>
-          <p:cNvSpPr/>
-          <p:nvPr/>
-        </p:nvSpPr>
-        <p:spPr>
-          <a:xfrm>
-            <a:off x="3749040" y="3858768"/>
-            <a:ext cx="4937760" cy="658368"/>
-          </a:xfrm>
-          <a:prstGeom prst="roundRect">
-            <a:avLst>
-              <a:gd name="adj" fmla="val 11111"/>
-            </a:avLst>
-          </a:prstGeom>
-          <a:solidFill>
-            <a:srgbClr val="EEF2F7"/>
-          </a:solidFill>
-          <a:ln w="12700">
-            <a:solidFill>
-              <a:srgbClr val="EEF2F7"/>
-            </a:solidFill>
-            <a:prstDash val="solid"/>
-          </a:ln>
-          <a:effectLst>
-            <a:outerShdw sx="100000" sy="100000" kx="0" ky="0" algn="bl" rotWithShape="0" blurRad="76200" dist="19050" dir="5400000">
-              <a:srgbClr val="0F172A">
-                <a:alpha val="12000"/>
-              </a:srgbClr>
-            </a:outerShdw>
-          </a:effectLst>
-        </p:spPr>
-      </p:sp>
-      <p:sp>
-        <p:nvSpPr>
-          <p:cNvPr id="35" name="Text 33"/>
-          <p:cNvSpPr txBox="1"/>
-          <p:nvPr/>
-        </p:nvSpPr>
-        <p:spPr>
-          <a:xfrm>
-            <a:off x="3931920" y="3904488"/>
-            <a:ext cx="1828800" cy="228600"/>
-          </a:xfrm>
-          <a:prstGeom prst="rect">
-            <a:avLst/>
-          </a:prstGeom>
-          <a:noFill/>
-          <a:ln/>
-        </p:spPr>
-        <p:txBody>
-          <a:bodyPr wrap="square" lIns="0" tIns="0" rIns="0" bIns="0" rtlCol="0" anchor="t"/>
-          <a:lstStyle/>
-          <a:p>
-            <a:pPr indent="0" marL="0">
-              <a:buNone/>
-            </a:pPr>
-            <a:r>
-              <a:rPr lang="en-US" sz="1100" b="1" dirty="0">
-                <a:solidFill>
-                  <a:srgbClr val="7C3AED"/>
-                </a:solidFill>
-              </a:rPr>
-              <a:t>Stage 3 · Reveal</a:t>
-            </a:r>
-            <a:endParaRPr lang="en-US" sz="1100" dirty="0"/>
-          </a:p>
-        </p:txBody>
-      </p:sp>
-      <p:sp>
-        <p:nvSpPr>
-          <p:cNvPr id="36" name="Text 34"/>
-          <p:cNvSpPr txBox="1"/>
-          <p:nvPr/>
-        </p:nvSpPr>
-        <p:spPr>
-          <a:xfrm>
-            <a:off x="3931920" y="4133088"/>
-            <a:ext cx="4572000" cy="347472"/>
-          </a:xfrm>
-          <a:prstGeom prst="rect">
-            <a:avLst/>
-          </a:prstGeom>
-          <a:noFill/>
-          <a:ln/>
-        </p:spPr>
-        <p:txBody>
-          <a:bodyPr wrap="square" lIns="0" tIns="0" rIns="0" bIns="0" rtlCol="0" anchor="t"/>
-          <a:lstStyle/>
-          <a:p>
-            <a:pPr indent="0" marL="0">
-              <a:buNone/>
-            </a:pPr>
-            <a:r>
-              <a:rPr lang="en-US" sz="1400" dirty="0">
-                <a:solidFill>
-                  <a:srgbClr val="0F172A"/>
-                </a:solidFill>
-              </a:rPr>
-              <a:t>C5 = 6. Every other digit is already seen by C5, so it must be 6.</a:t>
-            </a:r>
-            <a:endParaRPr lang="en-US" sz="1400" dirty="0"/>
-          </a:p>
-        </p:txBody>
-      </p:sp>
-      <p:sp>
-        <p:nvSpPr>
-          <p:cNvPr id="25" name="Slide Number Placeholder 0"/>
-          <p:cNvSpPr>
-            <a:spLocks noGrp="1"/>
-          </p:cNvSpPr>
-          <p:nvPr>
-            <p:ph type="sldNum" sz="quarter" idx="4294967295"/>
-          </p:nvPr>
-        </p:nvSpPr>
-        <p:spPr>
-          <a:xfrm>
-            <a:off x="8229600" y="4773168"/>
-            <a:ext cx="457200" cy="228600"/>
-          </a:xfrm>
-          <a:prstGeom prst="rect">
-            <a:avLst/>
-          </a:prstGeom>
-          <a:extLst>
-            <a:ext uri="{C572A759-6A51-4108-AA02-DFA0A04FC94B}">
-              <ma14:wrappingTextBoxFlag xmlns:ma14="http://schemas.microsoft.com/office/mac/drawingml/2011/main" val="0"/>
-            </a:ext>
-          </a:extLst>
-        </p:spPr>
-        <p:txBody>
-          <a:bodyPr/>
-          <a:lstStyle>
-            <a:lvl1pPr>
-              <a:defRPr sz="1000">
-                <a:solidFill>
-                  <a:srgbClr val="64748B"/>
-                </a:solidFill>
-              </a:defRPr>
-            </a:lvl1pPr>
-          </a:lstStyle>
+      <p:sp>
+        <p:nvSpPr>
+          <p:cNvPr id="26" name="TextBox 25"/>
+          <p:cNvSpPr txBox="1"/>
+          <p:nvPr/>
+        </p:nvSpPr>
+        <p:spPr>
+          <a:xfrm>
+            <a:off x="4572000" y="4782312"/>
+            <a:ext cx="3474720" cy="228600"/>
+          </a:xfrm>
+          <a:prstGeom prst="rect">
+            <a:avLst/>
+          </a:prstGeom>
+          <a:noFill/>
+        </p:spPr>
+        <p:txBody>
+          <a:bodyPr wrap="square" lIns="0" rIns="0" tIns="0" bIns="0" anchor="ctr">
+            <a:spAutoFit/>
+          </a:bodyPr>
+          <a:lstStyle/>
           <a:p>
             <a:pPr algn="r"/>
-            <a:fld id="{F7021451-1387-4CA6-816F-3879F97B5CBC}" type="slidenum">
-              <a:rPr b="0" lang="en-US"/>
-              <a:t>11</a:t>
-            </a:fld>
-            <a:endParaRPr lang="en-US"/>
+            <a:r>
+              <a:rPr sz="900" b="1">
+                <a:solidFill>
+                  <a:srgbClr val="2563EB"/>
+                </a:solidFill>
+              </a:rPr>
+              <a:t>Presenter: Rishikesh</a:t>
+            </a:r>
           </a:p>
         </p:txBody>
       </p:sp>
@@ -5330,7 +3923,7 @@
                   <a:schemeClr val="tx1"/>
                 </a:solidFill>
               </a:rPr>
-              <a:t>Tested, not just claimed</a:t>
+              <a:t>Testing and results</a:t>
             </a:r>
             <a:endParaRPr lang="en-US" sz="3000" dirty="0"/>
           </a:p>
@@ -5988,6 +4581,40 @@
               <a:t>12</a:t>
             </a:fld>
             <a:endParaRPr lang="en-US"/>
+          </a:p>
+        </p:txBody>
+      </p:sp>
+      <p:sp>
+        <p:nvSpPr>
+          <p:cNvPr id="26" name="TextBox 25"/>
+          <p:cNvSpPr txBox="1"/>
+          <p:nvPr/>
+        </p:nvSpPr>
+        <p:spPr>
+          <a:xfrm>
+            <a:off x="4572000" y="4782312"/>
+            <a:ext cx="3474720" cy="228600"/>
+          </a:xfrm>
+          <a:prstGeom prst="rect">
+            <a:avLst/>
+          </a:prstGeom>
+          <a:noFill/>
+        </p:spPr>
+        <p:txBody>
+          <a:bodyPr wrap="square" lIns="0" rIns="0" tIns="0" bIns="0" anchor="ctr">
+            <a:spAutoFit/>
+          </a:bodyPr>
+          <a:lstStyle/>
+          <a:p>
+            <a:pPr algn="r"/>
+            <a:r>
+              <a:rPr sz="900" b="1">
+                <a:solidFill>
+                  <a:srgbClr val="D97706"/>
+                </a:solidFill>
+              </a:rPr>
+              <a:t>Presenter: Sunil</a:t>
+            </a:r>
           </a:p>
         </p:txBody>
       </p:sp>
@@ -7203,6 +5830,40 @@
           </a:p>
         </p:txBody>
       </p:sp>
+      <p:sp>
+        <p:nvSpPr>
+          <p:cNvPr id="35" name="TextBox 34"/>
+          <p:cNvSpPr txBox="1"/>
+          <p:nvPr/>
+        </p:nvSpPr>
+        <p:spPr>
+          <a:xfrm>
+            <a:off x="4572000" y="4782312"/>
+            <a:ext cx="3474720" cy="228600"/>
+          </a:xfrm>
+          <a:prstGeom prst="rect">
+            <a:avLst/>
+          </a:prstGeom>
+          <a:noFill/>
+        </p:spPr>
+        <p:txBody>
+          <a:bodyPr wrap="square" lIns="0" rIns="0" tIns="0" bIns="0" anchor="ctr">
+            <a:spAutoFit/>
+          </a:bodyPr>
+          <a:lstStyle/>
+          <a:p>
+            <a:pPr algn="r"/>
+            <a:r>
+              <a:rPr sz="900" b="1">
+                <a:solidFill>
+                  <a:srgbClr val="2563EB"/>
+                </a:solidFill>
+              </a:rPr>
+              <a:t>Presenter: Rishikesh</a:t>
+            </a:r>
+          </a:p>
+        </p:txBody>
+      </p:sp>
     </p:spTree>
   </p:cSld>
   <p:clrMapOvr>
@@ -7777,6 +6438,40 @@
           </a:p>
         </p:txBody>
       </p:sp>
+      <p:sp>
+        <p:nvSpPr>
+          <p:cNvPr id="26" name="TextBox 25"/>
+          <p:cNvSpPr txBox="1"/>
+          <p:nvPr/>
+        </p:nvSpPr>
+        <p:spPr>
+          <a:xfrm>
+            <a:off x="4572000" y="4782312"/>
+            <a:ext cx="3474720" cy="228600"/>
+          </a:xfrm>
+          <a:prstGeom prst="rect">
+            <a:avLst/>
+          </a:prstGeom>
+          <a:noFill/>
+        </p:spPr>
+        <p:txBody>
+          <a:bodyPr wrap="square" lIns="0" rIns="0" tIns="0" bIns="0" anchor="ctr">
+            <a:spAutoFit/>
+          </a:bodyPr>
+          <a:lstStyle/>
+          <a:p>
+            <a:pPr algn="r"/>
+            <a:r>
+              <a:rPr sz="900" b="1">
+                <a:solidFill>
+                  <a:srgbClr val="0D9488"/>
+                </a:solidFill>
+              </a:rPr>
+              <a:t>Presenter: Sawan Rana</a:t>
+            </a:r>
+          </a:p>
+        </p:txBody>
+      </p:sp>
     </p:spTree>
   </p:cSld>
   <p:clrMapOvr>
@@ -8472,6 +7167,3645 @@
           </a:p>
         </p:txBody>
       </p:sp>
+      <p:sp>
+        <p:nvSpPr>
+          <p:cNvPr id="22" name="TextBox 21"/>
+          <p:cNvSpPr txBox="1"/>
+          <p:nvPr/>
+        </p:nvSpPr>
+        <p:spPr>
+          <a:xfrm>
+            <a:off x="4572000" y="4782312"/>
+            <a:ext cx="3474720" cy="228600"/>
+          </a:xfrm>
+          <a:prstGeom prst="rect">
+            <a:avLst/>
+          </a:prstGeom>
+          <a:noFill/>
+        </p:spPr>
+        <p:txBody>
+          <a:bodyPr wrap="square" lIns="0" rIns="0" tIns="0" bIns="0" anchor="ctr">
+            <a:spAutoFit/>
+          </a:bodyPr>
+          <a:lstStyle/>
+          <a:p>
+            <a:pPr algn="r"/>
+            <a:r>
+              <a:rPr sz="900" b="1">
+                <a:solidFill>
+                  <a:srgbClr val="94A3B8"/>
+                </a:solidFill>
+              </a:rPr>
+              <a:t>Presenter: Sathwik Teja</a:t>
+            </a:r>
+          </a:p>
+        </p:txBody>
+      </p:sp>
+    </p:spTree>
+  </p:cSld>
+  <p:clrMapOvr>
+    <a:masterClrMapping/>
+  </p:clrMapOvr>
+</p:sld>
+</file>
+
+<file path=ppt/slides/slide16.xml><?xml version="1.0" encoding="utf-8"?>
+<p:sld xmlns:a="http://schemas.openxmlformats.org/drawingml/2006/main" xmlns:p="http://schemas.openxmlformats.org/presentationml/2006/main" xmlns:r="http://schemas.openxmlformats.org/officeDocument/2006/relationships">
+  <p:cSld>
+    <p:spTree>
+      <p:nvGrpSpPr>
+        <p:cNvPr id="1" name=""/>
+        <p:cNvGrpSpPr/>
+        <p:nvPr/>
+      </p:nvGrpSpPr>
+      <p:grpSpPr/>
+      <p:sp>
+        <p:nvSpPr>
+          <p:cNvPr id="2" name="Text 0"/>
+          <p:cNvSpPr/>
+          <p:nvPr>
+            <p:ph idx="100" type="title" hasCustomPrompt="1"/>
+          </p:nvPr>
+        </p:nvSpPr>
+        <p:spPr>
+          <a:xfrm>
+            <a:off x="457200" y="274320"/>
+            <a:ext cx="8229600" cy="685800"/>
+          </a:xfrm>
+          <a:prstGeom prst="rect">
+            <a:avLst/>
+          </a:prstGeom>
+          <a:noFill/>
+          <a:ln/>
+        </p:spPr>
+        <p:txBody>
+          <a:bodyPr wrap="square" lIns="0" tIns="0" rIns="0" bIns="0" rtlCol="0" anchor="ctr"/>
+          <a:lstStyle/>
+          <a:p>
+            <a:pPr indent="0" marL="0">
+              <a:buNone/>
+            </a:pPr>
+            <a:r>
+              <a:rPr lang="en-US" sz="3000" b="1" dirty="0">
+                <a:solidFill>
+                  <a:schemeClr val="tx1"/>
+                </a:solidFill>
+              </a:rPr>
+              <a:t>Outline</a:t>
+            </a:r>
+            <a:endParaRPr lang="en-US" sz="3000" dirty="0"/>
+          </a:p>
+        </p:txBody>
+      </p:sp>
+      <p:sp>
+        <p:nvSpPr>
+          <p:cNvPr id="25" name="Slide Number Placeholder 0"/>
+          <p:cNvSpPr>
+            <a:spLocks noGrp="1"/>
+          </p:cNvSpPr>
+          <p:nvPr>
+            <p:ph type="sldNum" sz="quarter" idx="4294967295"/>
+          </p:nvPr>
+        </p:nvSpPr>
+        <p:spPr>
+          <a:xfrm>
+            <a:off x="8229600" y="4773168"/>
+            <a:ext cx="457200" cy="228600"/>
+          </a:xfrm>
+          <a:prstGeom prst="rect">
+            <a:avLst/>
+          </a:prstGeom>
+          <a:extLst>
+            <a:ext uri="{C572A759-6A51-4108-AA02-DFA0A04FC94B}">
+              <ma14:wrappingTextBoxFlag xmlns:ma14="http://schemas.microsoft.com/office/mac/drawingml/2011/main" val="0"/>
+            </a:ext>
+          </a:extLst>
+        </p:spPr>
+        <p:txBody>
+          <a:bodyPr/>
+          <a:lstStyle>
+            <a:lvl1pPr>
+              <a:defRPr sz="1000">
+                <a:solidFill>
+                  <a:srgbClr val="64748B"/>
+                </a:solidFill>
+              </a:defRPr>
+            </a:lvl1pPr>
+          </a:lstStyle>
+          <a:p>
+            <a:pPr algn="r"/>
+            <a:fld id="{F7021451-1387-4CA6-816F-3879F97B5CBC}" type="slidenum">
+              <a:rPr b="0" lang="en-US"/>
+              <a:t>2</a:t>
+            </a:fld>
+            <a:endParaRPr lang="en-US"/>
+          </a:p>
+        </p:txBody>
+      </p:sp>
+      <p:sp>
+        <p:nvSpPr>
+          <p:cNvPr id="26" name="Rounded Rectangle 25"/>
+          <p:cNvSpPr/>
+          <p:nvPr/>
+        </p:nvSpPr>
+        <p:spPr>
+          <a:xfrm>
+            <a:off x="457200" y="1097280"/>
+            <a:ext cx="8229600" cy="621792"/>
+          </a:xfrm>
+          <a:prstGeom prst="roundRect">
+            <a:avLst>
+              <a:gd name="adj" fmla="val 8000"/>
+            </a:avLst>
+          </a:prstGeom>
+          <a:solidFill>
+            <a:srgbClr val="EEF2F7"/>
+          </a:solidFill>
+          <a:ln>
+            <a:noFill/>
+          </a:ln>
+          <a:effectLst/>
+        </p:spPr>
+        <p:style>
+          <a:lnRef idx="1">
+            <a:schemeClr val="accent1"/>
+          </a:lnRef>
+          <a:fillRef idx="3">
+            <a:schemeClr val="accent1"/>
+          </a:fillRef>
+          <a:effectRef idx="2">
+            <a:schemeClr val="accent1"/>
+          </a:effectRef>
+          <a:fontRef idx="minor">
+            <a:schemeClr val="lt1"/>
+          </a:fontRef>
+        </p:style>
+        <p:txBody>
+          <a:bodyPr rtlCol="0" anchor="ctr"/>
+          <a:lstStyle/>
+          <a:p>
+            <a:pPr algn="ctr"/>
+          </a:p>
+        </p:txBody>
+      </p:sp>
+      <p:sp>
+        <p:nvSpPr>
+          <p:cNvPr id="27" name="Rounded Rectangle 26"/>
+          <p:cNvSpPr/>
+          <p:nvPr/>
+        </p:nvSpPr>
+        <p:spPr>
+          <a:xfrm>
+            <a:off x="585216" y="1179576"/>
+            <a:ext cx="457200" cy="457200"/>
+          </a:xfrm>
+          <a:prstGeom prst="roundRect">
+            <a:avLst>
+              <a:gd name="adj" fmla="val 12000"/>
+            </a:avLst>
+          </a:prstGeom>
+          <a:solidFill>
+            <a:srgbClr val="0D9488"/>
+          </a:solidFill>
+          <a:ln>
+            <a:noFill/>
+          </a:ln>
+          <a:effectLst/>
+        </p:spPr>
+        <p:style>
+          <a:lnRef idx="1">
+            <a:schemeClr val="accent1"/>
+          </a:lnRef>
+          <a:fillRef idx="3">
+            <a:schemeClr val="accent1"/>
+          </a:fillRef>
+          <a:effectRef idx="2">
+            <a:schemeClr val="accent1"/>
+          </a:effectRef>
+          <a:fontRef idx="minor">
+            <a:schemeClr val="lt1"/>
+          </a:fontRef>
+        </p:style>
+        <p:txBody>
+          <a:bodyPr rtlCol="0" anchor="ctr"/>
+          <a:lstStyle/>
+          <a:p>
+            <a:pPr algn="ctr"/>
+          </a:p>
+        </p:txBody>
+      </p:sp>
+      <p:sp>
+        <p:nvSpPr>
+          <p:cNvPr id="28" name="TextBox 27"/>
+          <p:cNvSpPr txBox="1"/>
+          <p:nvPr/>
+        </p:nvSpPr>
+        <p:spPr>
+          <a:xfrm>
+            <a:off x="585216" y="1179576"/>
+            <a:ext cx="457200" cy="457200"/>
+          </a:xfrm>
+          <a:prstGeom prst="rect">
+            <a:avLst/>
+          </a:prstGeom>
+          <a:noFill/>
+        </p:spPr>
+        <p:txBody>
+          <a:bodyPr wrap="square" lIns="0" rIns="0" tIns="0" bIns="0" anchor="ctr">
+            <a:spAutoFit/>
+          </a:bodyPr>
+          <a:lstStyle/>
+          <a:p>
+            <a:pPr algn="ctr"/>
+            <a:r>
+              <a:rPr sz="1600" b="1">
+                <a:solidFill>
+                  <a:srgbClr val="FFFFFF"/>
+                </a:solidFill>
+                <a:latin typeface="Cambria"/>
+              </a:rPr>
+              <a:t>1</a:t>
+            </a:r>
+          </a:p>
+        </p:txBody>
+      </p:sp>
+      <p:sp>
+        <p:nvSpPr>
+          <p:cNvPr id="29" name="TextBox 28"/>
+          <p:cNvSpPr txBox="1"/>
+          <p:nvPr/>
+        </p:nvSpPr>
+        <p:spPr>
+          <a:xfrm>
+            <a:off x="1188720" y="1161288"/>
+            <a:ext cx="5029200" cy="292608"/>
+          </a:xfrm>
+          <a:prstGeom prst="rect">
+            <a:avLst/>
+          </a:prstGeom>
+          <a:noFill/>
+        </p:spPr>
+        <p:txBody>
+          <a:bodyPr wrap="square" lIns="0" rIns="0" tIns="0" bIns="0" anchor="t">
+            <a:spAutoFit/>
+          </a:bodyPr>
+          <a:lstStyle/>
+          <a:p>
+            <a:pPr algn="l"/>
+            <a:r>
+              <a:rPr sz="1600" b="1">
+                <a:solidFill>
+                  <a:srgbClr val="0F172A"/>
+                </a:solidFill>
+                <a:latin typeface="Cambria"/>
+              </a:rPr>
+              <a:t>Introduction</a:t>
+            </a:r>
+          </a:p>
+        </p:txBody>
+      </p:sp>
+      <p:sp>
+        <p:nvSpPr>
+          <p:cNvPr id="30" name="TextBox 29"/>
+          <p:cNvSpPr txBox="1"/>
+          <p:nvPr/>
+        </p:nvSpPr>
+        <p:spPr>
+          <a:xfrm>
+            <a:off x="1188720" y="1453896"/>
+            <a:ext cx="5486400" cy="228600"/>
+          </a:xfrm>
+          <a:prstGeom prst="rect">
+            <a:avLst/>
+          </a:prstGeom>
+          <a:noFill/>
+        </p:spPr>
+        <p:txBody>
+          <a:bodyPr wrap="square" lIns="0" rIns="0" tIns="0" bIns="0" anchor="t">
+            <a:spAutoFit/>
+          </a:bodyPr>
+          <a:lstStyle/>
+          <a:p>
+            <a:pPr algn="l"/>
+            <a:r>
+              <a:rPr sz="1100" b="0">
+                <a:solidFill>
+                  <a:srgbClr val="64748B"/>
+                </a:solidFill>
+              </a:rPr>
+              <a:t>The problem and what we built</a:t>
+            </a:r>
+          </a:p>
+        </p:txBody>
+      </p:sp>
+      <p:sp>
+        <p:nvSpPr>
+          <p:cNvPr id="31" name="TextBox 30"/>
+          <p:cNvSpPr txBox="1"/>
+          <p:nvPr/>
+        </p:nvSpPr>
+        <p:spPr>
+          <a:xfrm>
+            <a:off x="6949440" y="1097280"/>
+            <a:ext cx="1554480" cy="621792"/>
+          </a:xfrm>
+          <a:prstGeom prst="rect">
+            <a:avLst/>
+          </a:prstGeom>
+          <a:noFill/>
+        </p:spPr>
+        <p:txBody>
+          <a:bodyPr wrap="square" lIns="0" rIns="0" tIns="0" bIns="0" anchor="ctr">
+            <a:spAutoFit/>
+          </a:bodyPr>
+          <a:lstStyle/>
+          <a:p>
+            <a:pPr algn="r"/>
+            <a:r>
+              <a:rPr sz="1100" b="1">
+                <a:solidFill>
+                  <a:srgbClr val="0D9488"/>
+                </a:solidFill>
+              </a:rPr>
+              <a:t>Slides 3–4</a:t>
+            </a:r>
+          </a:p>
+        </p:txBody>
+      </p:sp>
+      <p:sp>
+        <p:nvSpPr>
+          <p:cNvPr id="32" name="Rounded Rectangle 31"/>
+          <p:cNvSpPr/>
+          <p:nvPr/>
+        </p:nvSpPr>
+        <p:spPr>
+          <a:xfrm>
+            <a:off x="457200" y="1783080"/>
+            <a:ext cx="8229600" cy="621792"/>
+          </a:xfrm>
+          <a:prstGeom prst="roundRect">
+            <a:avLst>
+              <a:gd name="adj" fmla="val 8000"/>
+            </a:avLst>
+          </a:prstGeom>
+          <a:solidFill>
+            <a:srgbClr val="EEF2F7"/>
+          </a:solidFill>
+          <a:ln>
+            <a:noFill/>
+          </a:ln>
+          <a:effectLst/>
+        </p:spPr>
+        <p:style>
+          <a:lnRef idx="1">
+            <a:schemeClr val="accent1"/>
+          </a:lnRef>
+          <a:fillRef idx="3">
+            <a:schemeClr val="accent1"/>
+          </a:fillRef>
+          <a:effectRef idx="2">
+            <a:schemeClr val="accent1"/>
+          </a:effectRef>
+          <a:fontRef idx="minor">
+            <a:schemeClr val="lt1"/>
+          </a:fontRef>
+        </p:style>
+        <p:txBody>
+          <a:bodyPr rtlCol="0" anchor="ctr"/>
+          <a:lstStyle/>
+          <a:p>
+            <a:pPr algn="ctr"/>
+          </a:p>
+        </p:txBody>
+      </p:sp>
+      <p:sp>
+        <p:nvSpPr>
+          <p:cNvPr id="33" name="Rounded Rectangle 32"/>
+          <p:cNvSpPr/>
+          <p:nvPr/>
+        </p:nvSpPr>
+        <p:spPr>
+          <a:xfrm>
+            <a:off x="585216" y="1865376"/>
+            <a:ext cx="457200" cy="457200"/>
+          </a:xfrm>
+          <a:prstGeom prst="roundRect">
+            <a:avLst>
+              <a:gd name="adj" fmla="val 12000"/>
+            </a:avLst>
+          </a:prstGeom>
+          <a:solidFill>
+            <a:srgbClr val="D97706"/>
+          </a:solidFill>
+          <a:ln>
+            <a:noFill/>
+          </a:ln>
+          <a:effectLst/>
+        </p:spPr>
+        <p:style>
+          <a:lnRef idx="1">
+            <a:schemeClr val="accent1"/>
+          </a:lnRef>
+          <a:fillRef idx="3">
+            <a:schemeClr val="accent1"/>
+          </a:fillRef>
+          <a:effectRef idx="2">
+            <a:schemeClr val="accent1"/>
+          </a:effectRef>
+          <a:fontRef idx="minor">
+            <a:schemeClr val="lt1"/>
+          </a:fontRef>
+        </p:style>
+        <p:txBody>
+          <a:bodyPr rtlCol="0" anchor="ctr"/>
+          <a:lstStyle/>
+          <a:p>
+            <a:pPr algn="ctr"/>
+          </a:p>
+        </p:txBody>
+      </p:sp>
+      <p:sp>
+        <p:nvSpPr>
+          <p:cNvPr id="34" name="TextBox 33"/>
+          <p:cNvSpPr txBox="1"/>
+          <p:nvPr/>
+        </p:nvSpPr>
+        <p:spPr>
+          <a:xfrm>
+            <a:off x="585216" y="1865376"/>
+            <a:ext cx="457200" cy="457200"/>
+          </a:xfrm>
+          <a:prstGeom prst="rect">
+            <a:avLst/>
+          </a:prstGeom>
+          <a:noFill/>
+        </p:spPr>
+        <p:txBody>
+          <a:bodyPr wrap="square" lIns="0" rIns="0" tIns="0" bIns="0" anchor="ctr">
+            <a:spAutoFit/>
+          </a:bodyPr>
+          <a:lstStyle/>
+          <a:p>
+            <a:pPr algn="ctr"/>
+            <a:r>
+              <a:rPr sz="1600" b="1">
+                <a:solidFill>
+                  <a:srgbClr val="FFFFFF"/>
+                </a:solidFill>
+                <a:latin typeface="Cambria"/>
+              </a:rPr>
+              <a:t>2</a:t>
+            </a:r>
+          </a:p>
+        </p:txBody>
+      </p:sp>
+      <p:sp>
+        <p:nvSpPr>
+          <p:cNvPr id="35" name="TextBox 34"/>
+          <p:cNvSpPr txBox="1"/>
+          <p:nvPr/>
+        </p:nvSpPr>
+        <p:spPr>
+          <a:xfrm>
+            <a:off x="1188720" y="1847088"/>
+            <a:ext cx="5029200" cy="292608"/>
+          </a:xfrm>
+          <a:prstGeom prst="rect">
+            <a:avLst/>
+          </a:prstGeom>
+          <a:noFill/>
+        </p:spPr>
+        <p:txBody>
+          <a:bodyPr wrap="square" lIns="0" rIns="0" tIns="0" bIns="0" anchor="t">
+            <a:spAutoFit/>
+          </a:bodyPr>
+          <a:lstStyle/>
+          <a:p>
+            <a:pPr algn="l"/>
+            <a:r>
+              <a:rPr sz="1600" b="1">
+                <a:solidFill>
+                  <a:srgbClr val="0F172A"/>
+                </a:solidFill>
+                <a:latin typeface="Cambria"/>
+              </a:rPr>
+              <a:t>How it works</a:t>
+            </a:r>
+          </a:p>
+        </p:txBody>
+      </p:sp>
+      <p:sp>
+        <p:nvSpPr>
+          <p:cNvPr id="36" name="TextBox 35"/>
+          <p:cNvSpPr txBox="1"/>
+          <p:nvPr/>
+        </p:nvSpPr>
+        <p:spPr>
+          <a:xfrm>
+            <a:off x="1188720" y="2139696"/>
+            <a:ext cx="5486400" cy="228600"/>
+          </a:xfrm>
+          <a:prstGeom prst="rect">
+            <a:avLst/>
+          </a:prstGeom>
+          <a:noFill/>
+        </p:spPr>
+        <p:txBody>
+          <a:bodyPr wrap="square" lIns="0" rIns="0" tIns="0" bIns="0" anchor="t">
+            <a:spAutoFit/>
+          </a:bodyPr>
+          <a:lstStyle/>
+          <a:p>
+            <a:pPr algn="l"/>
+            <a:r>
+              <a:rPr sz="1100" b="0">
+                <a:solidFill>
+                  <a:srgbClr val="64748B"/>
+                </a:solidFill>
+              </a:rPr>
+              <a:t>CSP model, search, human techniques, architecture, AI Teacher</a:t>
+            </a:r>
+          </a:p>
+        </p:txBody>
+      </p:sp>
+      <p:sp>
+        <p:nvSpPr>
+          <p:cNvPr id="37" name="TextBox 36"/>
+          <p:cNvSpPr txBox="1"/>
+          <p:nvPr/>
+        </p:nvSpPr>
+        <p:spPr>
+          <a:xfrm>
+            <a:off x="6949440" y="1783080"/>
+            <a:ext cx="1554480" cy="621792"/>
+          </a:xfrm>
+          <a:prstGeom prst="rect">
+            <a:avLst/>
+          </a:prstGeom>
+          <a:noFill/>
+        </p:spPr>
+        <p:txBody>
+          <a:bodyPr wrap="square" lIns="0" rIns="0" tIns="0" bIns="0" anchor="ctr">
+            <a:spAutoFit/>
+          </a:bodyPr>
+          <a:lstStyle/>
+          <a:p>
+            <a:pPr algn="r"/>
+            <a:r>
+              <a:rPr sz="1100" b="1">
+                <a:solidFill>
+                  <a:srgbClr val="D97706"/>
+                </a:solidFill>
+              </a:rPr>
+              <a:t>Slides 5–9</a:t>
+            </a:r>
+          </a:p>
+        </p:txBody>
+      </p:sp>
+      <p:sp>
+        <p:nvSpPr>
+          <p:cNvPr id="38" name="Rounded Rectangle 37"/>
+          <p:cNvSpPr/>
+          <p:nvPr/>
+        </p:nvSpPr>
+        <p:spPr>
+          <a:xfrm>
+            <a:off x="457200" y="2468880"/>
+            <a:ext cx="8229600" cy="621792"/>
+          </a:xfrm>
+          <a:prstGeom prst="roundRect">
+            <a:avLst>
+              <a:gd name="adj" fmla="val 8000"/>
+            </a:avLst>
+          </a:prstGeom>
+          <a:solidFill>
+            <a:srgbClr val="EEF2F7"/>
+          </a:solidFill>
+          <a:ln>
+            <a:noFill/>
+          </a:ln>
+          <a:effectLst/>
+        </p:spPr>
+        <p:style>
+          <a:lnRef idx="1">
+            <a:schemeClr val="accent1"/>
+          </a:lnRef>
+          <a:fillRef idx="3">
+            <a:schemeClr val="accent1"/>
+          </a:fillRef>
+          <a:effectRef idx="2">
+            <a:schemeClr val="accent1"/>
+          </a:effectRef>
+          <a:fontRef idx="minor">
+            <a:schemeClr val="lt1"/>
+          </a:fontRef>
+        </p:style>
+        <p:txBody>
+          <a:bodyPr rtlCol="0" anchor="ctr"/>
+          <a:lstStyle/>
+          <a:p>
+            <a:pPr algn="ctr"/>
+          </a:p>
+        </p:txBody>
+      </p:sp>
+      <p:sp>
+        <p:nvSpPr>
+          <p:cNvPr id="39" name="Rounded Rectangle 38"/>
+          <p:cNvSpPr/>
+          <p:nvPr/>
+        </p:nvSpPr>
+        <p:spPr>
+          <a:xfrm>
+            <a:off x="585216" y="2551176"/>
+            <a:ext cx="457200" cy="457200"/>
+          </a:xfrm>
+          <a:prstGeom prst="roundRect">
+            <a:avLst>
+              <a:gd name="adj" fmla="val 12000"/>
+            </a:avLst>
+          </a:prstGeom>
+          <a:solidFill>
+            <a:srgbClr val="7C3AED"/>
+          </a:solidFill>
+          <a:ln>
+            <a:noFill/>
+          </a:ln>
+          <a:effectLst/>
+        </p:spPr>
+        <p:style>
+          <a:lnRef idx="1">
+            <a:schemeClr val="accent1"/>
+          </a:lnRef>
+          <a:fillRef idx="3">
+            <a:schemeClr val="accent1"/>
+          </a:fillRef>
+          <a:effectRef idx="2">
+            <a:schemeClr val="accent1"/>
+          </a:effectRef>
+          <a:fontRef idx="minor">
+            <a:schemeClr val="lt1"/>
+          </a:fontRef>
+        </p:style>
+        <p:txBody>
+          <a:bodyPr rtlCol="0" anchor="ctr"/>
+          <a:lstStyle/>
+          <a:p>
+            <a:pPr algn="ctr"/>
+          </a:p>
+        </p:txBody>
+      </p:sp>
+      <p:sp>
+        <p:nvSpPr>
+          <p:cNvPr id="40" name="TextBox 39"/>
+          <p:cNvSpPr txBox="1"/>
+          <p:nvPr/>
+        </p:nvSpPr>
+        <p:spPr>
+          <a:xfrm>
+            <a:off x="585216" y="2551176"/>
+            <a:ext cx="457200" cy="457200"/>
+          </a:xfrm>
+          <a:prstGeom prst="rect">
+            <a:avLst/>
+          </a:prstGeom>
+          <a:noFill/>
+        </p:spPr>
+        <p:txBody>
+          <a:bodyPr wrap="square" lIns="0" rIns="0" tIns="0" bIns="0" anchor="ctr">
+            <a:spAutoFit/>
+          </a:bodyPr>
+          <a:lstStyle/>
+          <a:p>
+            <a:pPr algn="ctr"/>
+            <a:r>
+              <a:rPr sz="1600" b="1">
+                <a:solidFill>
+                  <a:srgbClr val="FFFFFF"/>
+                </a:solidFill>
+                <a:latin typeface="Cambria"/>
+              </a:rPr>
+              <a:t>3</a:t>
+            </a:r>
+          </a:p>
+        </p:txBody>
+      </p:sp>
+      <p:sp>
+        <p:nvSpPr>
+          <p:cNvPr id="41" name="TextBox 40"/>
+          <p:cNvSpPr txBox="1"/>
+          <p:nvPr/>
+        </p:nvSpPr>
+        <p:spPr>
+          <a:xfrm>
+            <a:off x="1188720" y="2532888"/>
+            <a:ext cx="5029200" cy="292608"/>
+          </a:xfrm>
+          <a:prstGeom prst="rect">
+            <a:avLst/>
+          </a:prstGeom>
+          <a:noFill/>
+        </p:spPr>
+        <p:txBody>
+          <a:bodyPr wrap="square" lIns="0" rIns="0" tIns="0" bIns="0" anchor="t">
+            <a:spAutoFit/>
+          </a:bodyPr>
+          <a:lstStyle/>
+          <a:p>
+            <a:pPr algn="l"/>
+            <a:r>
+              <a:rPr sz="1600" b="1">
+                <a:solidFill>
+                  <a:srgbClr val="0F172A"/>
+                </a:solidFill>
+                <a:latin typeface="Cambria"/>
+              </a:rPr>
+              <a:t>Results</a:t>
+            </a:r>
+          </a:p>
+        </p:txBody>
+      </p:sp>
+      <p:sp>
+        <p:nvSpPr>
+          <p:cNvPr id="42" name="TextBox 41"/>
+          <p:cNvSpPr txBox="1"/>
+          <p:nvPr/>
+        </p:nvSpPr>
+        <p:spPr>
+          <a:xfrm>
+            <a:off x="1188720" y="2825496"/>
+            <a:ext cx="5486400" cy="228600"/>
+          </a:xfrm>
+          <a:prstGeom prst="rect">
+            <a:avLst/>
+          </a:prstGeom>
+          <a:noFill/>
+        </p:spPr>
+        <p:txBody>
+          <a:bodyPr wrap="square" lIns="0" rIns="0" tIns="0" bIns="0" anchor="t">
+            <a:spAutoFit/>
+          </a:bodyPr>
+          <a:lstStyle/>
+          <a:p>
+            <a:pPr algn="l"/>
+            <a:r>
+              <a:rPr sz="1100" b="0">
+                <a:solidFill>
+                  <a:srgbClr val="64748B"/>
+                </a:solidFill>
+              </a:rPr>
+              <a:t>Testing and a live demo</a:t>
+            </a:r>
+          </a:p>
+        </p:txBody>
+      </p:sp>
+      <p:sp>
+        <p:nvSpPr>
+          <p:cNvPr id="43" name="TextBox 42"/>
+          <p:cNvSpPr txBox="1"/>
+          <p:nvPr/>
+        </p:nvSpPr>
+        <p:spPr>
+          <a:xfrm>
+            <a:off x="6949440" y="2468880"/>
+            <a:ext cx="1554480" cy="621792"/>
+          </a:xfrm>
+          <a:prstGeom prst="rect">
+            <a:avLst/>
+          </a:prstGeom>
+          <a:noFill/>
+        </p:spPr>
+        <p:txBody>
+          <a:bodyPr wrap="square" lIns="0" rIns="0" tIns="0" bIns="0" anchor="ctr">
+            <a:spAutoFit/>
+          </a:bodyPr>
+          <a:lstStyle/>
+          <a:p>
+            <a:pPr algn="r"/>
+            <a:r>
+              <a:rPr sz="1100" b="1">
+                <a:solidFill>
+                  <a:srgbClr val="7C3AED"/>
+                </a:solidFill>
+              </a:rPr>
+              <a:t>Slides 10–11</a:t>
+            </a:r>
+          </a:p>
+        </p:txBody>
+      </p:sp>
+      <p:sp>
+        <p:nvSpPr>
+          <p:cNvPr id="44" name="Rounded Rectangle 43"/>
+          <p:cNvSpPr/>
+          <p:nvPr/>
+        </p:nvSpPr>
+        <p:spPr>
+          <a:xfrm>
+            <a:off x="457200" y="3154680"/>
+            <a:ext cx="8229600" cy="621792"/>
+          </a:xfrm>
+          <a:prstGeom prst="roundRect">
+            <a:avLst>
+              <a:gd name="adj" fmla="val 8000"/>
+            </a:avLst>
+          </a:prstGeom>
+          <a:solidFill>
+            <a:srgbClr val="EEF2F7"/>
+          </a:solidFill>
+          <a:ln>
+            <a:noFill/>
+          </a:ln>
+          <a:effectLst/>
+        </p:spPr>
+        <p:style>
+          <a:lnRef idx="1">
+            <a:schemeClr val="accent1"/>
+          </a:lnRef>
+          <a:fillRef idx="3">
+            <a:schemeClr val="accent1"/>
+          </a:fillRef>
+          <a:effectRef idx="2">
+            <a:schemeClr val="accent1"/>
+          </a:effectRef>
+          <a:fontRef idx="minor">
+            <a:schemeClr val="lt1"/>
+          </a:fontRef>
+        </p:style>
+        <p:txBody>
+          <a:bodyPr rtlCol="0" anchor="ctr"/>
+          <a:lstStyle/>
+          <a:p>
+            <a:pPr algn="ctr"/>
+          </a:p>
+        </p:txBody>
+      </p:sp>
+      <p:sp>
+        <p:nvSpPr>
+          <p:cNvPr id="45" name="Rounded Rectangle 44"/>
+          <p:cNvSpPr/>
+          <p:nvPr/>
+        </p:nvSpPr>
+        <p:spPr>
+          <a:xfrm>
+            <a:off x="585216" y="3236976"/>
+            <a:ext cx="457200" cy="457200"/>
+          </a:xfrm>
+          <a:prstGeom prst="roundRect">
+            <a:avLst>
+              <a:gd name="adj" fmla="val 12000"/>
+            </a:avLst>
+          </a:prstGeom>
+          <a:solidFill>
+            <a:srgbClr val="2563EB"/>
+          </a:solidFill>
+          <a:ln>
+            <a:noFill/>
+          </a:ln>
+          <a:effectLst/>
+        </p:spPr>
+        <p:style>
+          <a:lnRef idx="1">
+            <a:schemeClr val="accent1"/>
+          </a:lnRef>
+          <a:fillRef idx="3">
+            <a:schemeClr val="accent1"/>
+          </a:fillRef>
+          <a:effectRef idx="2">
+            <a:schemeClr val="accent1"/>
+          </a:effectRef>
+          <a:fontRef idx="minor">
+            <a:schemeClr val="lt1"/>
+          </a:fontRef>
+        </p:style>
+        <p:txBody>
+          <a:bodyPr rtlCol="0" anchor="ctr"/>
+          <a:lstStyle/>
+          <a:p>
+            <a:pPr algn="ctr"/>
+          </a:p>
+        </p:txBody>
+      </p:sp>
+      <p:sp>
+        <p:nvSpPr>
+          <p:cNvPr id="46" name="TextBox 45"/>
+          <p:cNvSpPr txBox="1"/>
+          <p:nvPr/>
+        </p:nvSpPr>
+        <p:spPr>
+          <a:xfrm>
+            <a:off x="585216" y="3236976"/>
+            <a:ext cx="457200" cy="457200"/>
+          </a:xfrm>
+          <a:prstGeom prst="rect">
+            <a:avLst/>
+          </a:prstGeom>
+          <a:noFill/>
+        </p:spPr>
+        <p:txBody>
+          <a:bodyPr wrap="square" lIns="0" rIns="0" tIns="0" bIns="0" anchor="ctr">
+            <a:spAutoFit/>
+          </a:bodyPr>
+          <a:lstStyle/>
+          <a:p>
+            <a:pPr algn="ctr"/>
+            <a:r>
+              <a:rPr sz="1600" b="1">
+                <a:solidFill>
+                  <a:srgbClr val="FFFFFF"/>
+                </a:solidFill>
+                <a:latin typeface="Cambria"/>
+              </a:rPr>
+              <a:t>4</a:t>
+            </a:r>
+          </a:p>
+        </p:txBody>
+      </p:sp>
+      <p:sp>
+        <p:nvSpPr>
+          <p:cNvPr id="47" name="TextBox 46"/>
+          <p:cNvSpPr txBox="1"/>
+          <p:nvPr/>
+        </p:nvSpPr>
+        <p:spPr>
+          <a:xfrm>
+            <a:off x="1188720" y="3218688"/>
+            <a:ext cx="5029200" cy="292608"/>
+          </a:xfrm>
+          <a:prstGeom prst="rect">
+            <a:avLst/>
+          </a:prstGeom>
+          <a:noFill/>
+        </p:spPr>
+        <p:txBody>
+          <a:bodyPr wrap="square" lIns="0" rIns="0" tIns="0" bIns="0" anchor="t">
+            <a:spAutoFit/>
+          </a:bodyPr>
+          <a:lstStyle/>
+          <a:p>
+            <a:pPr algn="l"/>
+            <a:r>
+              <a:rPr sz="1600" b="1">
+                <a:solidFill>
+                  <a:srgbClr val="0F172A"/>
+                </a:solidFill>
+                <a:latin typeface="Cambria"/>
+              </a:rPr>
+              <a:t>Team contributions</a:t>
+            </a:r>
+          </a:p>
+        </p:txBody>
+      </p:sp>
+      <p:sp>
+        <p:nvSpPr>
+          <p:cNvPr id="48" name="TextBox 47"/>
+          <p:cNvSpPr txBox="1"/>
+          <p:nvPr/>
+        </p:nvSpPr>
+        <p:spPr>
+          <a:xfrm>
+            <a:off x="1188720" y="3511296"/>
+            <a:ext cx="5486400" cy="228600"/>
+          </a:xfrm>
+          <a:prstGeom prst="rect">
+            <a:avLst/>
+          </a:prstGeom>
+          <a:noFill/>
+        </p:spPr>
+        <p:txBody>
+          <a:bodyPr wrap="square" lIns="0" rIns="0" tIns="0" bIns="0" anchor="t">
+            <a:spAutoFit/>
+          </a:bodyPr>
+          <a:lstStyle/>
+          <a:p>
+            <a:pPr algn="l"/>
+            <a:r>
+              <a:rPr sz="1100" b="0">
+                <a:solidFill>
+                  <a:srgbClr val="64748B"/>
+                </a:solidFill>
+              </a:rPr>
+              <a:t>Who built and presents each part</a:t>
+            </a:r>
+          </a:p>
+        </p:txBody>
+      </p:sp>
+      <p:sp>
+        <p:nvSpPr>
+          <p:cNvPr id="49" name="TextBox 48"/>
+          <p:cNvSpPr txBox="1"/>
+          <p:nvPr/>
+        </p:nvSpPr>
+        <p:spPr>
+          <a:xfrm>
+            <a:off x="6949440" y="3154680"/>
+            <a:ext cx="1554480" cy="621792"/>
+          </a:xfrm>
+          <a:prstGeom prst="rect">
+            <a:avLst/>
+          </a:prstGeom>
+          <a:noFill/>
+        </p:spPr>
+        <p:txBody>
+          <a:bodyPr wrap="square" lIns="0" rIns="0" tIns="0" bIns="0" anchor="ctr">
+            <a:spAutoFit/>
+          </a:bodyPr>
+          <a:lstStyle/>
+          <a:p>
+            <a:pPr algn="r"/>
+            <a:r>
+              <a:rPr sz="1100" b="1">
+                <a:solidFill>
+                  <a:srgbClr val="2563EB"/>
+                </a:solidFill>
+              </a:rPr>
+              <a:t>Slide 12</a:t>
+            </a:r>
+          </a:p>
+        </p:txBody>
+      </p:sp>
+      <p:sp>
+        <p:nvSpPr>
+          <p:cNvPr id="50" name="Rounded Rectangle 49"/>
+          <p:cNvSpPr/>
+          <p:nvPr/>
+        </p:nvSpPr>
+        <p:spPr>
+          <a:xfrm>
+            <a:off x="457200" y="3840480"/>
+            <a:ext cx="8229600" cy="621792"/>
+          </a:xfrm>
+          <a:prstGeom prst="roundRect">
+            <a:avLst>
+              <a:gd name="adj" fmla="val 8000"/>
+            </a:avLst>
+          </a:prstGeom>
+          <a:solidFill>
+            <a:srgbClr val="EEF2F7"/>
+          </a:solidFill>
+          <a:ln>
+            <a:noFill/>
+          </a:ln>
+          <a:effectLst/>
+        </p:spPr>
+        <p:style>
+          <a:lnRef idx="1">
+            <a:schemeClr val="accent1"/>
+          </a:lnRef>
+          <a:fillRef idx="3">
+            <a:schemeClr val="accent1"/>
+          </a:fillRef>
+          <a:effectRef idx="2">
+            <a:schemeClr val="accent1"/>
+          </a:effectRef>
+          <a:fontRef idx="minor">
+            <a:schemeClr val="lt1"/>
+          </a:fontRef>
+        </p:style>
+        <p:txBody>
+          <a:bodyPr rtlCol="0" anchor="ctr"/>
+          <a:lstStyle/>
+          <a:p>
+            <a:pPr algn="ctr"/>
+          </a:p>
+        </p:txBody>
+      </p:sp>
+      <p:sp>
+        <p:nvSpPr>
+          <p:cNvPr id="51" name="Rounded Rectangle 50"/>
+          <p:cNvSpPr/>
+          <p:nvPr/>
+        </p:nvSpPr>
+        <p:spPr>
+          <a:xfrm>
+            <a:off x="585216" y="3922776"/>
+            <a:ext cx="457200" cy="457200"/>
+          </a:xfrm>
+          <a:prstGeom prst="roundRect">
+            <a:avLst>
+              <a:gd name="adj" fmla="val 12000"/>
+            </a:avLst>
+          </a:prstGeom>
+          <a:solidFill>
+            <a:srgbClr val="E11D48"/>
+          </a:solidFill>
+          <a:ln>
+            <a:noFill/>
+          </a:ln>
+          <a:effectLst/>
+        </p:spPr>
+        <p:style>
+          <a:lnRef idx="1">
+            <a:schemeClr val="accent1"/>
+          </a:lnRef>
+          <a:fillRef idx="3">
+            <a:schemeClr val="accent1"/>
+          </a:fillRef>
+          <a:effectRef idx="2">
+            <a:schemeClr val="accent1"/>
+          </a:effectRef>
+          <a:fontRef idx="minor">
+            <a:schemeClr val="lt1"/>
+          </a:fontRef>
+        </p:style>
+        <p:txBody>
+          <a:bodyPr rtlCol="0" anchor="ctr"/>
+          <a:lstStyle/>
+          <a:p>
+            <a:pPr algn="ctr"/>
+          </a:p>
+        </p:txBody>
+      </p:sp>
+      <p:sp>
+        <p:nvSpPr>
+          <p:cNvPr id="52" name="TextBox 51"/>
+          <p:cNvSpPr txBox="1"/>
+          <p:nvPr/>
+        </p:nvSpPr>
+        <p:spPr>
+          <a:xfrm>
+            <a:off x="585216" y="3922776"/>
+            <a:ext cx="457200" cy="457200"/>
+          </a:xfrm>
+          <a:prstGeom prst="rect">
+            <a:avLst/>
+          </a:prstGeom>
+          <a:noFill/>
+        </p:spPr>
+        <p:txBody>
+          <a:bodyPr wrap="square" lIns="0" rIns="0" tIns="0" bIns="0" anchor="ctr">
+            <a:spAutoFit/>
+          </a:bodyPr>
+          <a:lstStyle/>
+          <a:p>
+            <a:pPr algn="ctr"/>
+            <a:r>
+              <a:rPr sz="1600" b="1">
+                <a:solidFill>
+                  <a:srgbClr val="FFFFFF"/>
+                </a:solidFill>
+                <a:latin typeface="Cambria"/>
+              </a:rPr>
+              <a:t>5</a:t>
+            </a:r>
+          </a:p>
+        </p:txBody>
+      </p:sp>
+      <p:sp>
+        <p:nvSpPr>
+          <p:cNvPr id="53" name="TextBox 52"/>
+          <p:cNvSpPr txBox="1"/>
+          <p:nvPr/>
+        </p:nvSpPr>
+        <p:spPr>
+          <a:xfrm>
+            <a:off x="1188720" y="3904488"/>
+            <a:ext cx="5029200" cy="292608"/>
+          </a:xfrm>
+          <a:prstGeom prst="rect">
+            <a:avLst/>
+          </a:prstGeom>
+          <a:noFill/>
+        </p:spPr>
+        <p:txBody>
+          <a:bodyPr wrap="square" lIns="0" rIns="0" tIns="0" bIns="0" anchor="t">
+            <a:spAutoFit/>
+          </a:bodyPr>
+          <a:lstStyle/>
+          <a:p>
+            <a:pPr algn="l"/>
+            <a:r>
+              <a:rPr sz="1600" b="1">
+                <a:solidFill>
+                  <a:srgbClr val="0F172A"/>
+                </a:solidFill>
+                <a:latin typeface="Cambria"/>
+              </a:rPr>
+              <a:t>Limitations and conclusion</a:t>
+            </a:r>
+          </a:p>
+        </p:txBody>
+      </p:sp>
+      <p:sp>
+        <p:nvSpPr>
+          <p:cNvPr id="54" name="TextBox 53"/>
+          <p:cNvSpPr txBox="1"/>
+          <p:nvPr/>
+        </p:nvSpPr>
+        <p:spPr>
+          <a:xfrm>
+            <a:off x="1188720" y="4197096"/>
+            <a:ext cx="5486400" cy="228600"/>
+          </a:xfrm>
+          <a:prstGeom prst="rect">
+            <a:avLst/>
+          </a:prstGeom>
+          <a:noFill/>
+        </p:spPr>
+        <p:txBody>
+          <a:bodyPr wrap="square" lIns="0" rIns="0" tIns="0" bIns="0" anchor="t">
+            <a:spAutoFit/>
+          </a:bodyPr>
+          <a:lstStyle/>
+          <a:p>
+            <a:pPr algn="l"/>
+            <a:r>
+              <a:rPr sz="1100" b="0">
+                <a:solidFill>
+                  <a:srgbClr val="64748B"/>
+                </a:solidFill>
+              </a:rPr>
+              <a:t>What is missing, what we learned</a:t>
+            </a:r>
+          </a:p>
+        </p:txBody>
+      </p:sp>
+      <p:sp>
+        <p:nvSpPr>
+          <p:cNvPr id="55" name="TextBox 54"/>
+          <p:cNvSpPr txBox="1"/>
+          <p:nvPr/>
+        </p:nvSpPr>
+        <p:spPr>
+          <a:xfrm>
+            <a:off x="6949440" y="3840480"/>
+            <a:ext cx="1554480" cy="621792"/>
+          </a:xfrm>
+          <a:prstGeom prst="rect">
+            <a:avLst/>
+          </a:prstGeom>
+          <a:noFill/>
+        </p:spPr>
+        <p:txBody>
+          <a:bodyPr wrap="square" lIns="0" rIns="0" tIns="0" bIns="0" anchor="ctr">
+            <a:spAutoFit/>
+          </a:bodyPr>
+          <a:lstStyle/>
+          <a:p>
+            <a:pPr algn="r"/>
+            <a:r>
+              <a:rPr sz="1100" b="1">
+                <a:solidFill>
+                  <a:srgbClr val="E11D48"/>
+                </a:solidFill>
+              </a:rPr>
+              <a:t>Slides 13–14</a:t>
+            </a:r>
+          </a:p>
+        </p:txBody>
+      </p:sp>
+      <p:sp>
+        <p:nvSpPr>
+          <p:cNvPr id="56" name="TextBox 55"/>
+          <p:cNvSpPr txBox="1"/>
+          <p:nvPr/>
+        </p:nvSpPr>
+        <p:spPr>
+          <a:xfrm>
+            <a:off x="4572000" y="4782312"/>
+            <a:ext cx="3474720" cy="228600"/>
+          </a:xfrm>
+          <a:prstGeom prst="rect">
+            <a:avLst/>
+          </a:prstGeom>
+          <a:noFill/>
+        </p:spPr>
+        <p:txBody>
+          <a:bodyPr wrap="square" lIns="0" rIns="0" tIns="0" bIns="0" anchor="ctr">
+            <a:spAutoFit/>
+          </a:bodyPr>
+          <a:lstStyle/>
+          <a:p>
+            <a:pPr algn="r"/>
+            <a:r>
+              <a:rPr sz="900" b="1">
+                <a:solidFill>
+                  <a:srgbClr val="7C3AED"/>
+                </a:solidFill>
+              </a:rPr>
+              <a:t>Presenter: Sathwik Teja</a:t>
+            </a:r>
+          </a:p>
+        </p:txBody>
+      </p:sp>
+    </p:spTree>
+  </p:cSld>
+  <p:clrMapOvr>
+    <a:masterClrMapping/>
+  </p:clrMapOvr>
+</p:sld>
+</file>
+
+<file path=ppt/slides/slide17.xml><?xml version="1.0" encoding="utf-8"?>
+<p:sld xmlns:a="http://schemas.openxmlformats.org/drawingml/2006/main" xmlns:p="http://schemas.openxmlformats.org/presentationml/2006/main" xmlns:r="http://schemas.openxmlformats.org/officeDocument/2006/relationships">
+  <p:cSld>
+    <p:spTree>
+      <p:nvGrpSpPr>
+        <p:cNvPr id="1" name=""/>
+        <p:cNvGrpSpPr/>
+        <p:nvPr/>
+      </p:nvGrpSpPr>
+      <p:grpSpPr/>
+      <p:sp>
+        <p:nvSpPr>
+          <p:cNvPr id="2" name="Text 0"/>
+          <p:cNvSpPr/>
+          <p:nvPr>
+            <p:ph idx="100" type="title" hasCustomPrompt="1"/>
+          </p:nvPr>
+        </p:nvSpPr>
+        <p:spPr>
+          <a:xfrm>
+            <a:off x="457200" y="274320"/>
+            <a:ext cx="8229600" cy="685800"/>
+          </a:xfrm>
+          <a:prstGeom prst="rect">
+            <a:avLst/>
+          </a:prstGeom>
+          <a:noFill/>
+          <a:ln/>
+        </p:spPr>
+        <p:txBody>
+          <a:bodyPr wrap="square" lIns="0" tIns="0" rIns="0" bIns="0" rtlCol="0" anchor="ctr"/>
+          <a:lstStyle/>
+          <a:p>
+            <a:pPr indent="0" marL="0">
+              <a:buNone/>
+            </a:pPr>
+            <a:r>
+              <a:rPr lang="en-US" sz="3000" b="1" dirty="0">
+                <a:solidFill>
+                  <a:schemeClr val="tx1"/>
+                </a:solidFill>
+              </a:rPr>
+              <a:t>Team contributions</a:t>
+            </a:r>
+            <a:endParaRPr lang="en-US" sz="3000" dirty="0"/>
+          </a:p>
+        </p:txBody>
+      </p:sp>
+      <p:sp>
+        <p:nvSpPr>
+          <p:cNvPr id="25" name="Slide Number Placeholder 0"/>
+          <p:cNvSpPr>
+            <a:spLocks noGrp="1"/>
+          </p:cNvSpPr>
+          <p:nvPr>
+            <p:ph type="sldNum" sz="quarter" idx="4294967295"/>
+          </p:nvPr>
+        </p:nvSpPr>
+        <p:spPr>
+          <a:xfrm>
+            <a:off x="8229600" y="4773168"/>
+            <a:ext cx="457200" cy="228600"/>
+          </a:xfrm>
+          <a:prstGeom prst="rect">
+            <a:avLst/>
+          </a:prstGeom>
+          <a:extLst>
+            <a:ext uri="{C572A759-6A51-4108-AA02-DFA0A04FC94B}">
+              <ma14:wrappingTextBoxFlag xmlns:ma14="http://schemas.microsoft.com/office/mac/drawingml/2011/main" val="0"/>
+            </a:ext>
+          </a:extLst>
+        </p:spPr>
+        <p:txBody>
+          <a:bodyPr/>
+          <a:lstStyle>
+            <a:lvl1pPr>
+              <a:defRPr sz="1000">
+                <a:solidFill>
+                  <a:srgbClr val="64748B"/>
+                </a:solidFill>
+              </a:defRPr>
+            </a:lvl1pPr>
+          </a:lstStyle>
+          <a:p>
+            <a:pPr algn="r"/>
+            <a:fld id="{F7021451-1387-4CA6-816F-3879F97B5CBC}" type="slidenum">
+              <a:rPr b="0" lang="en-US"/>
+              <a:t>2</a:t>
+            </a:fld>
+            <a:endParaRPr lang="en-US"/>
+          </a:p>
+        </p:txBody>
+      </p:sp>
+      <p:sp>
+        <p:nvSpPr>
+          <p:cNvPr id="26" name="Rounded Rectangle 25"/>
+          <p:cNvSpPr/>
+          <p:nvPr/>
+        </p:nvSpPr>
+        <p:spPr>
+          <a:xfrm>
+            <a:off x="457200" y="1051560"/>
+            <a:ext cx="1954530" cy="3337560"/>
+          </a:xfrm>
+          <a:prstGeom prst="roundRect">
+            <a:avLst>
+              <a:gd name="adj" fmla="val 3000"/>
+            </a:avLst>
+          </a:prstGeom>
+          <a:solidFill>
+            <a:srgbClr val="EEF2F7"/>
+          </a:solidFill>
+          <a:ln>
+            <a:noFill/>
+          </a:ln>
+          <a:effectLst/>
+        </p:spPr>
+        <p:style>
+          <a:lnRef idx="1">
+            <a:schemeClr val="accent1"/>
+          </a:lnRef>
+          <a:fillRef idx="3">
+            <a:schemeClr val="accent1"/>
+          </a:fillRef>
+          <a:effectRef idx="2">
+            <a:schemeClr val="accent1"/>
+          </a:effectRef>
+          <a:fontRef idx="minor">
+            <a:schemeClr val="lt1"/>
+          </a:fontRef>
+        </p:style>
+        <p:txBody>
+          <a:bodyPr rtlCol="0" anchor="ctr"/>
+          <a:lstStyle/>
+          <a:p>
+            <a:pPr algn="ctr"/>
+          </a:p>
+        </p:txBody>
+      </p:sp>
+      <p:sp>
+        <p:nvSpPr>
+          <p:cNvPr id="27" name="Rounded Rectangle 26"/>
+          <p:cNvSpPr/>
+          <p:nvPr/>
+        </p:nvSpPr>
+        <p:spPr>
+          <a:xfrm>
+            <a:off x="612648" y="1207008"/>
+            <a:ext cx="457200" cy="457200"/>
+          </a:xfrm>
+          <a:prstGeom prst="roundRect">
+            <a:avLst>
+              <a:gd name="adj" fmla="val 12000"/>
+            </a:avLst>
+          </a:prstGeom>
+          <a:solidFill>
+            <a:srgbClr val="7C3AED"/>
+          </a:solidFill>
+          <a:ln>
+            <a:noFill/>
+          </a:ln>
+          <a:effectLst/>
+        </p:spPr>
+        <p:style>
+          <a:lnRef idx="1">
+            <a:schemeClr val="accent1"/>
+          </a:lnRef>
+          <a:fillRef idx="3">
+            <a:schemeClr val="accent1"/>
+          </a:fillRef>
+          <a:effectRef idx="2">
+            <a:schemeClr val="accent1"/>
+          </a:effectRef>
+          <a:fontRef idx="minor">
+            <a:schemeClr val="lt1"/>
+          </a:fontRef>
+        </p:style>
+        <p:txBody>
+          <a:bodyPr rtlCol="0" anchor="ctr"/>
+          <a:lstStyle/>
+          <a:p>
+            <a:pPr algn="ctr"/>
+          </a:p>
+        </p:txBody>
+      </p:sp>
+      <p:sp>
+        <p:nvSpPr>
+          <p:cNvPr id="28" name="TextBox 27"/>
+          <p:cNvSpPr txBox="1"/>
+          <p:nvPr/>
+        </p:nvSpPr>
+        <p:spPr>
+          <a:xfrm>
+            <a:off x="612648" y="1207008"/>
+            <a:ext cx="457200" cy="457200"/>
+          </a:xfrm>
+          <a:prstGeom prst="rect">
+            <a:avLst/>
+          </a:prstGeom>
+          <a:noFill/>
+        </p:spPr>
+        <p:txBody>
+          <a:bodyPr wrap="square" lIns="0" rIns="0" tIns="0" bIns="0" anchor="ctr">
+            <a:spAutoFit/>
+          </a:bodyPr>
+          <a:lstStyle/>
+          <a:p>
+            <a:pPr algn="ctr"/>
+            <a:r>
+              <a:rPr sz="1500" b="1">
+                <a:solidFill>
+                  <a:srgbClr val="FFFFFF"/>
+                </a:solidFill>
+                <a:latin typeface="Cambria"/>
+              </a:rPr>
+              <a:t>ST</a:t>
+            </a:r>
+          </a:p>
+        </p:txBody>
+      </p:sp>
+      <p:sp>
+        <p:nvSpPr>
+          <p:cNvPr id="29" name="TextBox 28"/>
+          <p:cNvSpPr txBox="1"/>
+          <p:nvPr/>
+        </p:nvSpPr>
+        <p:spPr>
+          <a:xfrm>
+            <a:off x="612648" y="1746504"/>
+            <a:ext cx="1643634" cy="292608"/>
+          </a:xfrm>
+          <a:prstGeom prst="rect">
+            <a:avLst/>
+          </a:prstGeom>
+          <a:noFill/>
+        </p:spPr>
+        <p:txBody>
+          <a:bodyPr wrap="square" lIns="0" rIns="0" tIns="0" bIns="0" anchor="t">
+            <a:spAutoFit/>
+          </a:bodyPr>
+          <a:lstStyle/>
+          <a:p>
+            <a:pPr algn="l"/>
+            <a:r>
+              <a:rPr sz="1700" b="1">
+                <a:solidFill>
+                  <a:srgbClr val="0F172A"/>
+                </a:solidFill>
+                <a:latin typeface="Cambria"/>
+              </a:rPr>
+              <a:t>Sathwik Teja</a:t>
+            </a:r>
+          </a:p>
+        </p:txBody>
+      </p:sp>
+      <p:sp>
+        <p:nvSpPr>
+          <p:cNvPr id="30" name="TextBox 29"/>
+          <p:cNvSpPr txBox="1"/>
+          <p:nvPr/>
+        </p:nvSpPr>
+        <p:spPr>
+          <a:xfrm>
+            <a:off x="612648" y="2039112"/>
+            <a:ext cx="1643634" cy="228600"/>
+          </a:xfrm>
+          <a:prstGeom prst="rect">
+            <a:avLst/>
+          </a:prstGeom>
+          <a:noFill/>
+        </p:spPr>
+        <p:txBody>
+          <a:bodyPr wrap="square" lIns="0" rIns="0" tIns="0" bIns="0" anchor="t">
+            <a:spAutoFit/>
+          </a:bodyPr>
+          <a:lstStyle/>
+          <a:p>
+            <a:pPr algn="l"/>
+            <a:r>
+              <a:rPr sz="1100" b="0">
+                <a:solidFill>
+                  <a:srgbClr val="64748B"/>
+                </a:solidFill>
+              </a:rPr>
+              <a:t>2024BCD0040</a:t>
+            </a:r>
+          </a:p>
+        </p:txBody>
+      </p:sp>
+      <p:sp>
+        <p:nvSpPr>
+          <p:cNvPr id="31" name="TextBox 30"/>
+          <p:cNvSpPr txBox="1"/>
+          <p:nvPr/>
+        </p:nvSpPr>
+        <p:spPr>
+          <a:xfrm>
+            <a:off x="612648" y="2313432"/>
+            <a:ext cx="1643634" cy="256032"/>
+          </a:xfrm>
+          <a:prstGeom prst="rect">
+            <a:avLst/>
+          </a:prstGeom>
+          <a:noFill/>
+        </p:spPr>
+        <p:txBody>
+          <a:bodyPr wrap="square" lIns="0" rIns="0" tIns="0" bIns="0" anchor="t">
+            <a:spAutoFit/>
+          </a:bodyPr>
+          <a:lstStyle/>
+          <a:p>
+            <a:pPr algn="l"/>
+            <a:r>
+              <a:rPr sz="1200" b="1">
+                <a:solidFill>
+                  <a:srgbClr val="7C3AED"/>
+                </a:solidFill>
+              </a:rPr>
+              <a:t>Lead · AI Teacher</a:t>
+            </a:r>
+          </a:p>
+        </p:txBody>
+      </p:sp>
+      <p:sp>
+        <p:nvSpPr>
+          <p:cNvPr id="32" name="TextBox 31"/>
+          <p:cNvSpPr txBox="1"/>
+          <p:nvPr/>
+        </p:nvSpPr>
+        <p:spPr>
+          <a:xfrm>
+            <a:off x="612648" y="2624328"/>
+            <a:ext cx="1643634" cy="1316736"/>
+          </a:xfrm>
+          <a:prstGeom prst="rect">
+            <a:avLst/>
+          </a:prstGeom>
+          <a:noFill/>
+        </p:spPr>
+        <p:txBody>
+          <a:bodyPr wrap="square" lIns="0" rIns="0" tIns="0" bIns="0" anchor="t">
+            <a:spAutoFit/>
+          </a:bodyPr>
+          <a:lstStyle/>
+          <a:p>
+            <a:pPr algn="l" marL="171450" indent="-171450">
+              <a:spcAft>
+                <a:spcPts val="500"/>
+              </a:spcAft>
+              <a:buChar char="•"/>
+            </a:pPr>
+            <a:r>
+              <a:rPr sz="1050" b="0">
+                <a:solidFill>
+                  <a:srgbClr val="334155"/>
+                </a:solidFill>
+              </a:rPr>
+              <a:t>Neuro-symbolic AI Teacher: LLM, claim verification, fallback</a:t>
+            </a:r>
+          </a:p>
+          <a:p>
+            <a:pPr marL="171450" indent="-171450">
+              <a:spcAft>
+                <a:spcPts val="500"/>
+              </a:spcAft>
+              <a:buChar char="•"/>
+            </a:pPr>
+            <a:r>
+              <a:rPr sz="1050">
+                <a:solidFill>
+                  <a:srgbClr val="334155"/>
+                </a:solidFill>
+              </a:rPr>
+              <a:t>System architecture and FastAPI backend</a:t>
+            </a:r>
+          </a:p>
+          <a:p>
+            <a:pPr marL="171450" indent="-171450">
+              <a:spcAft>
+                <a:spcPts val="500"/>
+              </a:spcAft>
+              <a:buChar char="•"/>
+            </a:pPr>
+            <a:r>
+              <a:rPr sz="1050">
+                <a:solidFill>
+                  <a:srgbClr val="334155"/>
+                </a:solidFill>
+              </a:rPr>
+              <a:t>Leads the Q&amp;A</a:t>
+            </a:r>
+          </a:p>
+        </p:txBody>
+      </p:sp>
+      <p:sp>
+        <p:nvSpPr>
+          <p:cNvPr id="33" name="TextBox 32"/>
+          <p:cNvSpPr txBox="1"/>
+          <p:nvPr/>
+        </p:nvSpPr>
+        <p:spPr>
+          <a:xfrm>
+            <a:off x="612648" y="4005072"/>
+            <a:ext cx="1643634" cy="228600"/>
+          </a:xfrm>
+          <a:prstGeom prst="rect">
+            <a:avLst/>
+          </a:prstGeom>
+          <a:noFill/>
+        </p:spPr>
+        <p:txBody>
+          <a:bodyPr wrap="square" lIns="0" rIns="0" tIns="0" bIns="0" anchor="t">
+            <a:spAutoFit/>
+          </a:bodyPr>
+          <a:lstStyle/>
+          <a:p>
+            <a:pPr algn="l"/>
+            <a:r>
+              <a:rPr sz="1050" b="1">
+                <a:solidFill>
+                  <a:srgbClr val="7C3AED"/>
+                </a:solidFill>
+              </a:rPr>
+              <a:t>Slides 1–2, 8–9, 14–15</a:t>
+            </a:r>
+          </a:p>
+        </p:txBody>
+      </p:sp>
+      <p:sp>
+        <p:nvSpPr>
+          <p:cNvPr id="34" name="Rounded Rectangle 33"/>
+          <p:cNvSpPr/>
+          <p:nvPr/>
+        </p:nvSpPr>
+        <p:spPr>
+          <a:xfrm>
+            <a:off x="2548890" y="1051560"/>
+            <a:ext cx="1954530" cy="3337560"/>
+          </a:xfrm>
+          <a:prstGeom prst="roundRect">
+            <a:avLst>
+              <a:gd name="adj" fmla="val 3000"/>
+            </a:avLst>
+          </a:prstGeom>
+          <a:solidFill>
+            <a:srgbClr val="EEF2F7"/>
+          </a:solidFill>
+          <a:ln>
+            <a:noFill/>
+          </a:ln>
+          <a:effectLst/>
+        </p:spPr>
+        <p:style>
+          <a:lnRef idx="1">
+            <a:schemeClr val="accent1"/>
+          </a:lnRef>
+          <a:fillRef idx="3">
+            <a:schemeClr val="accent1"/>
+          </a:fillRef>
+          <a:effectRef idx="2">
+            <a:schemeClr val="accent1"/>
+          </a:effectRef>
+          <a:fontRef idx="minor">
+            <a:schemeClr val="lt1"/>
+          </a:fontRef>
+        </p:style>
+        <p:txBody>
+          <a:bodyPr rtlCol="0" anchor="ctr"/>
+          <a:lstStyle/>
+          <a:p>
+            <a:pPr algn="ctr"/>
+          </a:p>
+        </p:txBody>
+      </p:sp>
+      <p:sp>
+        <p:nvSpPr>
+          <p:cNvPr id="35" name="Rounded Rectangle 34"/>
+          <p:cNvSpPr/>
+          <p:nvPr/>
+        </p:nvSpPr>
+        <p:spPr>
+          <a:xfrm>
+            <a:off x="2704338" y="1207008"/>
+            <a:ext cx="457200" cy="457200"/>
+          </a:xfrm>
+          <a:prstGeom prst="roundRect">
+            <a:avLst>
+              <a:gd name="adj" fmla="val 12000"/>
+            </a:avLst>
+          </a:prstGeom>
+          <a:solidFill>
+            <a:srgbClr val="0D9488"/>
+          </a:solidFill>
+          <a:ln>
+            <a:noFill/>
+          </a:ln>
+          <a:effectLst/>
+        </p:spPr>
+        <p:style>
+          <a:lnRef idx="1">
+            <a:schemeClr val="accent1"/>
+          </a:lnRef>
+          <a:fillRef idx="3">
+            <a:schemeClr val="accent1"/>
+          </a:fillRef>
+          <a:effectRef idx="2">
+            <a:schemeClr val="accent1"/>
+          </a:effectRef>
+          <a:fontRef idx="minor">
+            <a:schemeClr val="lt1"/>
+          </a:fontRef>
+        </p:style>
+        <p:txBody>
+          <a:bodyPr rtlCol="0" anchor="ctr"/>
+          <a:lstStyle/>
+          <a:p>
+            <a:pPr algn="ctr"/>
+          </a:p>
+        </p:txBody>
+      </p:sp>
+      <p:sp>
+        <p:nvSpPr>
+          <p:cNvPr id="36" name="TextBox 35"/>
+          <p:cNvSpPr txBox="1"/>
+          <p:nvPr/>
+        </p:nvSpPr>
+        <p:spPr>
+          <a:xfrm>
+            <a:off x="2704338" y="1207008"/>
+            <a:ext cx="457200" cy="457200"/>
+          </a:xfrm>
+          <a:prstGeom prst="rect">
+            <a:avLst/>
+          </a:prstGeom>
+          <a:noFill/>
+        </p:spPr>
+        <p:txBody>
+          <a:bodyPr wrap="square" lIns="0" rIns="0" tIns="0" bIns="0" anchor="ctr">
+            <a:spAutoFit/>
+          </a:bodyPr>
+          <a:lstStyle/>
+          <a:p>
+            <a:pPr algn="ctr"/>
+            <a:r>
+              <a:rPr sz="1500" b="1">
+                <a:solidFill>
+                  <a:srgbClr val="FFFFFF"/>
+                </a:solidFill>
+                <a:latin typeface="Cambria"/>
+              </a:rPr>
+              <a:t>SR</a:t>
+            </a:r>
+          </a:p>
+        </p:txBody>
+      </p:sp>
+      <p:sp>
+        <p:nvSpPr>
+          <p:cNvPr id="37" name="TextBox 36"/>
+          <p:cNvSpPr txBox="1"/>
+          <p:nvPr/>
+        </p:nvSpPr>
+        <p:spPr>
+          <a:xfrm>
+            <a:off x="2704338" y="1746504"/>
+            <a:ext cx="1643634" cy="292608"/>
+          </a:xfrm>
+          <a:prstGeom prst="rect">
+            <a:avLst/>
+          </a:prstGeom>
+          <a:noFill/>
+        </p:spPr>
+        <p:txBody>
+          <a:bodyPr wrap="square" lIns="0" rIns="0" tIns="0" bIns="0" anchor="t">
+            <a:spAutoFit/>
+          </a:bodyPr>
+          <a:lstStyle/>
+          <a:p>
+            <a:pPr algn="l"/>
+            <a:r>
+              <a:rPr sz="1700" b="1">
+                <a:solidFill>
+                  <a:srgbClr val="0F172A"/>
+                </a:solidFill>
+                <a:latin typeface="Cambria"/>
+              </a:rPr>
+              <a:t>Sawan Rana</a:t>
+            </a:r>
+          </a:p>
+        </p:txBody>
+      </p:sp>
+      <p:sp>
+        <p:nvSpPr>
+          <p:cNvPr id="38" name="TextBox 37"/>
+          <p:cNvSpPr txBox="1"/>
+          <p:nvPr/>
+        </p:nvSpPr>
+        <p:spPr>
+          <a:xfrm>
+            <a:off x="2704338" y="2039112"/>
+            <a:ext cx="1643634" cy="228600"/>
+          </a:xfrm>
+          <a:prstGeom prst="rect">
+            <a:avLst/>
+          </a:prstGeom>
+          <a:noFill/>
+        </p:spPr>
+        <p:txBody>
+          <a:bodyPr wrap="square" lIns="0" rIns="0" tIns="0" bIns="0" anchor="t">
+            <a:spAutoFit/>
+          </a:bodyPr>
+          <a:lstStyle/>
+          <a:p>
+            <a:pPr algn="l"/>
+            <a:r>
+              <a:rPr sz="1100" b="0">
+                <a:solidFill>
+                  <a:srgbClr val="64748B"/>
+                </a:solidFill>
+              </a:rPr>
+              <a:t>2024BCD0040</a:t>
+            </a:r>
+          </a:p>
+        </p:txBody>
+      </p:sp>
+      <p:sp>
+        <p:nvSpPr>
+          <p:cNvPr id="39" name="TextBox 38"/>
+          <p:cNvSpPr txBox="1"/>
+          <p:nvPr/>
+        </p:nvSpPr>
+        <p:spPr>
+          <a:xfrm>
+            <a:off x="2704338" y="2313432"/>
+            <a:ext cx="1643634" cy="256032"/>
+          </a:xfrm>
+          <a:prstGeom prst="rect">
+            <a:avLst/>
+          </a:prstGeom>
+          <a:noFill/>
+        </p:spPr>
+        <p:txBody>
+          <a:bodyPr wrap="square" lIns="0" rIns="0" tIns="0" bIns="0" anchor="t">
+            <a:spAutoFit/>
+          </a:bodyPr>
+          <a:lstStyle/>
+          <a:p>
+            <a:pPr algn="l"/>
+            <a:r>
+              <a:rPr sz="1200" b="1">
+                <a:solidFill>
+                  <a:srgbClr val="0D9488"/>
+                </a:solidFill>
+              </a:rPr>
+              <a:t>CSP search engine</a:t>
+            </a:r>
+          </a:p>
+        </p:txBody>
+      </p:sp>
+      <p:sp>
+        <p:nvSpPr>
+          <p:cNvPr id="40" name="TextBox 39"/>
+          <p:cNvSpPr txBox="1"/>
+          <p:nvPr/>
+        </p:nvSpPr>
+        <p:spPr>
+          <a:xfrm>
+            <a:off x="2704338" y="2624328"/>
+            <a:ext cx="1643634" cy="1316736"/>
+          </a:xfrm>
+          <a:prstGeom prst="rect">
+            <a:avLst/>
+          </a:prstGeom>
+          <a:noFill/>
+        </p:spPr>
+        <p:txBody>
+          <a:bodyPr wrap="square" lIns="0" rIns="0" tIns="0" bIns="0" anchor="t">
+            <a:spAutoFit/>
+          </a:bodyPr>
+          <a:lstStyle/>
+          <a:p>
+            <a:pPr algn="l" marL="171450" indent="-171450">
+              <a:spcAft>
+                <a:spcPts val="500"/>
+              </a:spcAft>
+              <a:buChar char="•"/>
+            </a:pPr>
+            <a:r>
+              <a:rPr sz="1050" b="0">
+                <a:solidFill>
+                  <a:srgbClr val="334155"/>
+                </a:solidFill>
+              </a:rPr>
+              <a:t>Sudoku as a CSP: variables, domains, constraints</a:t>
+            </a:r>
+          </a:p>
+          <a:p>
+            <a:pPr marL="171450" indent="-171450">
+              <a:spcAft>
+                <a:spcPts val="500"/>
+              </a:spcAft>
+              <a:buChar char="•"/>
+            </a:pPr>
+            <a:r>
+              <a:rPr sz="1050">
+                <a:solidFill>
+                  <a:srgbClr val="334155"/>
+                </a:solidFill>
+              </a:rPr>
+              <a:t>Backtracking, forward checking, AC-3, MRV, LCV</a:t>
+            </a:r>
+          </a:p>
+          <a:p>
+            <a:pPr marL="171450" indent="-171450">
+              <a:spcAft>
+                <a:spcPts val="500"/>
+              </a:spcAft>
+              <a:buChar char="•"/>
+            </a:pPr>
+            <a:r>
+              <a:rPr sz="1050">
+                <a:solidFill>
+                  <a:srgbClr val="334155"/>
+                </a:solidFill>
+              </a:rPr>
+              <a:t>Unique-solution puzzle generator</a:t>
+            </a:r>
+          </a:p>
+        </p:txBody>
+      </p:sp>
+      <p:sp>
+        <p:nvSpPr>
+          <p:cNvPr id="41" name="TextBox 40"/>
+          <p:cNvSpPr txBox="1"/>
+          <p:nvPr/>
+        </p:nvSpPr>
+        <p:spPr>
+          <a:xfrm>
+            <a:off x="2704338" y="4005072"/>
+            <a:ext cx="1643634" cy="228600"/>
+          </a:xfrm>
+          <a:prstGeom prst="rect">
+            <a:avLst/>
+          </a:prstGeom>
+          <a:noFill/>
+        </p:spPr>
+        <p:txBody>
+          <a:bodyPr wrap="square" lIns="0" rIns="0" tIns="0" bIns="0" anchor="t">
+            <a:spAutoFit/>
+          </a:bodyPr>
+          <a:lstStyle/>
+          <a:p>
+            <a:pPr algn="l"/>
+            <a:r>
+              <a:rPr sz="1050" b="1">
+                <a:solidFill>
+                  <a:srgbClr val="0D9488"/>
+                </a:solidFill>
+              </a:rPr>
+              <a:t>Slides 5–6, 13</a:t>
+            </a:r>
+          </a:p>
+        </p:txBody>
+      </p:sp>
+      <p:sp>
+        <p:nvSpPr>
+          <p:cNvPr id="42" name="Rounded Rectangle 41"/>
+          <p:cNvSpPr/>
+          <p:nvPr/>
+        </p:nvSpPr>
+        <p:spPr>
+          <a:xfrm>
+            <a:off x="4640580" y="1051560"/>
+            <a:ext cx="1954530" cy="3337560"/>
+          </a:xfrm>
+          <a:prstGeom prst="roundRect">
+            <a:avLst>
+              <a:gd name="adj" fmla="val 3000"/>
+            </a:avLst>
+          </a:prstGeom>
+          <a:solidFill>
+            <a:srgbClr val="EEF2F7"/>
+          </a:solidFill>
+          <a:ln>
+            <a:noFill/>
+          </a:ln>
+          <a:effectLst/>
+        </p:spPr>
+        <p:style>
+          <a:lnRef idx="1">
+            <a:schemeClr val="accent1"/>
+          </a:lnRef>
+          <a:fillRef idx="3">
+            <a:schemeClr val="accent1"/>
+          </a:fillRef>
+          <a:effectRef idx="2">
+            <a:schemeClr val="accent1"/>
+          </a:effectRef>
+          <a:fontRef idx="minor">
+            <a:schemeClr val="lt1"/>
+          </a:fontRef>
+        </p:style>
+        <p:txBody>
+          <a:bodyPr rtlCol="0" anchor="ctr"/>
+          <a:lstStyle/>
+          <a:p>
+            <a:pPr algn="ctr"/>
+          </a:p>
+        </p:txBody>
+      </p:sp>
+      <p:sp>
+        <p:nvSpPr>
+          <p:cNvPr id="43" name="Rounded Rectangle 42"/>
+          <p:cNvSpPr/>
+          <p:nvPr/>
+        </p:nvSpPr>
+        <p:spPr>
+          <a:xfrm>
+            <a:off x="4796028" y="1207008"/>
+            <a:ext cx="457200" cy="457200"/>
+          </a:xfrm>
+          <a:prstGeom prst="roundRect">
+            <a:avLst>
+              <a:gd name="adj" fmla="val 12000"/>
+            </a:avLst>
+          </a:prstGeom>
+          <a:solidFill>
+            <a:srgbClr val="D97706"/>
+          </a:solidFill>
+          <a:ln>
+            <a:noFill/>
+          </a:ln>
+          <a:effectLst/>
+        </p:spPr>
+        <p:style>
+          <a:lnRef idx="1">
+            <a:schemeClr val="accent1"/>
+          </a:lnRef>
+          <a:fillRef idx="3">
+            <a:schemeClr val="accent1"/>
+          </a:fillRef>
+          <a:effectRef idx="2">
+            <a:schemeClr val="accent1"/>
+          </a:effectRef>
+          <a:fontRef idx="minor">
+            <a:schemeClr val="lt1"/>
+          </a:fontRef>
+        </p:style>
+        <p:txBody>
+          <a:bodyPr rtlCol="0" anchor="ctr"/>
+          <a:lstStyle/>
+          <a:p>
+            <a:pPr algn="ctr"/>
+          </a:p>
+        </p:txBody>
+      </p:sp>
+      <p:sp>
+        <p:nvSpPr>
+          <p:cNvPr id="44" name="TextBox 43"/>
+          <p:cNvSpPr txBox="1"/>
+          <p:nvPr/>
+        </p:nvSpPr>
+        <p:spPr>
+          <a:xfrm>
+            <a:off x="4796028" y="1207008"/>
+            <a:ext cx="457200" cy="457200"/>
+          </a:xfrm>
+          <a:prstGeom prst="rect">
+            <a:avLst/>
+          </a:prstGeom>
+          <a:noFill/>
+        </p:spPr>
+        <p:txBody>
+          <a:bodyPr wrap="square" lIns="0" rIns="0" tIns="0" bIns="0" anchor="ctr">
+            <a:spAutoFit/>
+          </a:bodyPr>
+          <a:lstStyle/>
+          <a:p>
+            <a:pPr algn="ctr"/>
+            <a:r>
+              <a:rPr sz="1500" b="1">
+                <a:solidFill>
+                  <a:srgbClr val="FFFFFF"/>
+                </a:solidFill>
+                <a:latin typeface="Cambria"/>
+              </a:rPr>
+              <a:t>SU</a:t>
+            </a:r>
+          </a:p>
+        </p:txBody>
+      </p:sp>
+      <p:sp>
+        <p:nvSpPr>
+          <p:cNvPr id="45" name="TextBox 44"/>
+          <p:cNvSpPr txBox="1"/>
+          <p:nvPr/>
+        </p:nvSpPr>
+        <p:spPr>
+          <a:xfrm>
+            <a:off x="4796028" y="1746504"/>
+            <a:ext cx="1643634" cy="292608"/>
+          </a:xfrm>
+          <a:prstGeom prst="rect">
+            <a:avLst/>
+          </a:prstGeom>
+          <a:noFill/>
+        </p:spPr>
+        <p:txBody>
+          <a:bodyPr wrap="square" lIns="0" rIns="0" tIns="0" bIns="0" anchor="t">
+            <a:spAutoFit/>
+          </a:bodyPr>
+          <a:lstStyle/>
+          <a:p>
+            <a:pPr algn="l"/>
+            <a:r>
+              <a:rPr sz="1700" b="1">
+                <a:solidFill>
+                  <a:srgbClr val="0F172A"/>
+                </a:solidFill>
+                <a:latin typeface="Cambria"/>
+              </a:rPr>
+              <a:t>Sunil</a:t>
+            </a:r>
+          </a:p>
+        </p:txBody>
+      </p:sp>
+      <p:sp>
+        <p:nvSpPr>
+          <p:cNvPr id="46" name="TextBox 45"/>
+          <p:cNvSpPr txBox="1"/>
+          <p:nvPr/>
+        </p:nvSpPr>
+        <p:spPr>
+          <a:xfrm>
+            <a:off x="4796028" y="2039112"/>
+            <a:ext cx="1643634" cy="228600"/>
+          </a:xfrm>
+          <a:prstGeom prst="rect">
+            <a:avLst/>
+          </a:prstGeom>
+          <a:noFill/>
+        </p:spPr>
+        <p:txBody>
+          <a:bodyPr wrap="square" lIns="0" rIns="0" tIns="0" bIns="0" anchor="t">
+            <a:spAutoFit/>
+          </a:bodyPr>
+          <a:lstStyle/>
+          <a:p>
+            <a:pPr algn="l"/>
+            <a:r>
+              <a:rPr sz="1100" b="0">
+                <a:solidFill>
+                  <a:srgbClr val="64748B"/>
+                </a:solidFill>
+              </a:rPr>
+              <a:t>2024BCS0340</a:t>
+            </a:r>
+          </a:p>
+        </p:txBody>
+      </p:sp>
+      <p:sp>
+        <p:nvSpPr>
+          <p:cNvPr id="47" name="TextBox 46"/>
+          <p:cNvSpPr txBox="1"/>
+          <p:nvPr/>
+        </p:nvSpPr>
+        <p:spPr>
+          <a:xfrm>
+            <a:off x="4796028" y="2313432"/>
+            <a:ext cx="1643634" cy="256032"/>
+          </a:xfrm>
+          <a:prstGeom prst="rect">
+            <a:avLst/>
+          </a:prstGeom>
+          <a:noFill/>
+        </p:spPr>
+        <p:txBody>
+          <a:bodyPr wrap="square" lIns="0" rIns="0" tIns="0" bIns="0" anchor="t">
+            <a:spAutoFit/>
+          </a:bodyPr>
+          <a:lstStyle/>
+          <a:p>
+            <a:pPr algn="l"/>
+            <a:r>
+              <a:rPr sz="1200" b="1">
+                <a:solidFill>
+                  <a:srgbClr val="D97706"/>
+                </a:solidFill>
+              </a:rPr>
+              <a:t>Techniques &amp; testing</a:t>
+            </a:r>
+          </a:p>
+        </p:txBody>
+      </p:sp>
+      <p:sp>
+        <p:nvSpPr>
+          <p:cNvPr id="48" name="TextBox 47"/>
+          <p:cNvSpPr txBox="1"/>
+          <p:nvPr/>
+        </p:nvSpPr>
+        <p:spPr>
+          <a:xfrm>
+            <a:off x="4796028" y="2624328"/>
+            <a:ext cx="1643634" cy="1316736"/>
+          </a:xfrm>
+          <a:prstGeom prst="rect">
+            <a:avLst/>
+          </a:prstGeom>
+          <a:noFill/>
+        </p:spPr>
+        <p:txBody>
+          <a:bodyPr wrap="square" lIns="0" rIns="0" tIns="0" bIns="0" anchor="t">
+            <a:spAutoFit/>
+          </a:bodyPr>
+          <a:lstStyle/>
+          <a:p>
+            <a:pPr algn="l" marL="171450" indent="-171450">
+              <a:spcAft>
+                <a:spcPts val="500"/>
+              </a:spcAft>
+              <a:buChar char="•"/>
+            </a:pPr>
+            <a:r>
+              <a:rPr sz="1050" b="0">
+                <a:solidFill>
+                  <a:srgbClr val="334155"/>
+                </a:solidFill>
+              </a:rPr>
+              <a:t>Rule base of 9 human techniques</a:t>
+            </a:r>
+          </a:p>
+          <a:p>
+            <a:pPr marL="171450" indent="-171450">
+              <a:spcAft>
+                <a:spcPts val="500"/>
+              </a:spcAft>
+              <a:buChar char="•"/>
+            </a:pPr>
+            <a:r>
+              <a:rPr sz="1050">
+                <a:solidFill>
+                  <a:srgbClr val="334155"/>
+                </a:solidFill>
+              </a:rPr>
+              <a:t>Hint ladder, move checker, What-If</a:t>
+            </a:r>
+          </a:p>
+          <a:p>
+            <a:pPr marL="171450" indent="-171450">
+              <a:spcAft>
+                <a:spcPts val="500"/>
+              </a:spcAft>
+              <a:buChar char="•"/>
+            </a:pPr>
+            <a:r>
+              <a:rPr sz="1050">
+                <a:solidFill>
+                  <a:srgbClr val="334155"/>
+                </a:solidFill>
+              </a:rPr>
+              <a:t>Test suite (48 tests)</a:t>
+            </a:r>
+          </a:p>
+        </p:txBody>
+      </p:sp>
+      <p:sp>
+        <p:nvSpPr>
+          <p:cNvPr id="49" name="TextBox 48"/>
+          <p:cNvSpPr txBox="1"/>
+          <p:nvPr/>
+        </p:nvSpPr>
+        <p:spPr>
+          <a:xfrm>
+            <a:off x="4796028" y="4005072"/>
+            <a:ext cx="1643634" cy="228600"/>
+          </a:xfrm>
+          <a:prstGeom prst="rect">
+            <a:avLst/>
+          </a:prstGeom>
+          <a:noFill/>
+        </p:spPr>
+        <p:txBody>
+          <a:bodyPr wrap="square" lIns="0" rIns="0" tIns="0" bIns="0" anchor="t">
+            <a:spAutoFit/>
+          </a:bodyPr>
+          <a:lstStyle/>
+          <a:p>
+            <a:pPr algn="l"/>
+            <a:r>
+              <a:rPr sz="1050" b="1">
+                <a:solidFill>
+                  <a:srgbClr val="D97706"/>
+                </a:solidFill>
+              </a:rPr>
+              <a:t>Slides 7, 10</a:t>
+            </a:r>
+          </a:p>
+        </p:txBody>
+      </p:sp>
+      <p:sp>
+        <p:nvSpPr>
+          <p:cNvPr id="50" name="Rounded Rectangle 49"/>
+          <p:cNvSpPr/>
+          <p:nvPr/>
+        </p:nvSpPr>
+        <p:spPr>
+          <a:xfrm>
+            <a:off x="6732270" y="1051560"/>
+            <a:ext cx="1954530" cy="3337560"/>
+          </a:xfrm>
+          <a:prstGeom prst="roundRect">
+            <a:avLst>
+              <a:gd name="adj" fmla="val 3000"/>
+            </a:avLst>
+          </a:prstGeom>
+          <a:solidFill>
+            <a:srgbClr val="EEF2F7"/>
+          </a:solidFill>
+          <a:ln>
+            <a:noFill/>
+          </a:ln>
+          <a:effectLst/>
+        </p:spPr>
+        <p:style>
+          <a:lnRef idx="1">
+            <a:schemeClr val="accent1"/>
+          </a:lnRef>
+          <a:fillRef idx="3">
+            <a:schemeClr val="accent1"/>
+          </a:fillRef>
+          <a:effectRef idx="2">
+            <a:schemeClr val="accent1"/>
+          </a:effectRef>
+          <a:fontRef idx="minor">
+            <a:schemeClr val="lt1"/>
+          </a:fontRef>
+        </p:style>
+        <p:txBody>
+          <a:bodyPr rtlCol="0" anchor="ctr"/>
+          <a:lstStyle/>
+          <a:p>
+            <a:pPr algn="ctr"/>
+          </a:p>
+        </p:txBody>
+      </p:sp>
+      <p:sp>
+        <p:nvSpPr>
+          <p:cNvPr id="51" name="Rounded Rectangle 50"/>
+          <p:cNvSpPr/>
+          <p:nvPr/>
+        </p:nvSpPr>
+        <p:spPr>
+          <a:xfrm>
+            <a:off x="6887718" y="1207008"/>
+            <a:ext cx="457200" cy="457200"/>
+          </a:xfrm>
+          <a:prstGeom prst="roundRect">
+            <a:avLst>
+              <a:gd name="adj" fmla="val 12000"/>
+            </a:avLst>
+          </a:prstGeom>
+          <a:solidFill>
+            <a:srgbClr val="2563EB"/>
+          </a:solidFill>
+          <a:ln>
+            <a:noFill/>
+          </a:ln>
+          <a:effectLst/>
+        </p:spPr>
+        <p:style>
+          <a:lnRef idx="1">
+            <a:schemeClr val="accent1"/>
+          </a:lnRef>
+          <a:fillRef idx="3">
+            <a:schemeClr val="accent1"/>
+          </a:fillRef>
+          <a:effectRef idx="2">
+            <a:schemeClr val="accent1"/>
+          </a:effectRef>
+          <a:fontRef idx="minor">
+            <a:schemeClr val="lt1"/>
+          </a:fontRef>
+        </p:style>
+        <p:txBody>
+          <a:bodyPr rtlCol="0" anchor="ctr"/>
+          <a:lstStyle/>
+          <a:p>
+            <a:pPr algn="ctr"/>
+          </a:p>
+        </p:txBody>
+      </p:sp>
+      <p:sp>
+        <p:nvSpPr>
+          <p:cNvPr id="52" name="TextBox 51"/>
+          <p:cNvSpPr txBox="1"/>
+          <p:nvPr/>
+        </p:nvSpPr>
+        <p:spPr>
+          <a:xfrm>
+            <a:off x="6887718" y="1207008"/>
+            <a:ext cx="457200" cy="457200"/>
+          </a:xfrm>
+          <a:prstGeom prst="rect">
+            <a:avLst/>
+          </a:prstGeom>
+          <a:noFill/>
+        </p:spPr>
+        <p:txBody>
+          <a:bodyPr wrap="square" lIns="0" rIns="0" tIns="0" bIns="0" anchor="ctr">
+            <a:spAutoFit/>
+          </a:bodyPr>
+          <a:lstStyle/>
+          <a:p>
+            <a:pPr algn="ctr"/>
+            <a:r>
+              <a:rPr sz="1500" b="1">
+                <a:solidFill>
+                  <a:srgbClr val="FFFFFF"/>
+                </a:solidFill>
+                <a:latin typeface="Cambria"/>
+              </a:rPr>
+              <a:t>RI</a:t>
+            </a:r>
+          </a:p>
+        </p:txBody>
+      </p:sp>
+      <p:sp>
+        <p:nvSpPr>
+          <p:cNvPr id="53" name="TextBox 52"/>
+          <p:cNvSpPr txBox="1"/>
+          <p:nvPr/>
+        </p:nvSpPr>
+        <p:spPr>
+          <a:xfrm>
+            <a:off x="6887718" y="1746504"/>
+            <a:ext cx="1643634" cy="292608"/>
+          </a:xfrm>
+          <a:prstGeom prst="rect">
+            <a:avLst/>
+          </a:prstGeom>
+          <a:noFill/>
+        </p:spPr>
+        <p:txBody>
+          <a:bodyPr wrap="square" lIns="0" rIns="0" tIns="0" bIns="0" anchor="t">
+            <a:spAutoFit/>
+          </a:bodyPr>
+          <a:lstStyle/>
+          <a:p>
+            <a:pPr algn="l"/>
+            <a:r>
+              <a:rPr sz="1700" b="1">
+                <a:solidFill>
+                  <a:srgbClr val="0F172A"/>
+                </a:solidFill>
+                <a:latin typeface="Cambria"/>
+              </a:rPr>
+              <a:t>Rishikesh</a:t>
+            </a:r>
+          </a:p>
+        </p:txBody>
+      </p:sp>
+      <p:sp>
+        <p:nvSpPr>
+          <p:cNvPr id="54" name="TextBox 53"/>
+          <p:cNvSpPr txBox="1"/>
+          <p:nvPr/>
+        </p:nvSpPr>
+        <p:spPr>
+          <a:xfrm>
+            <a:off x="6887718" y="2039112"/>
+            <a:ext cx="1643634" cy="228600"/>
+          </a:xfrm>
+          <a:prstGeom prst="rect">
+            <a:avLst/>
+          </a:prstGeom>
+          <a:noFill/>
+        </p:spPr>
+        <p:txBody>
+          <a:bodyPr wrap="square" lIns="0" rIns="0" tIns="0" bIns="0" anchor="t">
+            <a:spAutoFit/>
+          </a:bodyPr>
+          <a:lstStyle/>
+          <a:p>
+            <a:pPr algn="l"/>
+            <a:r>
+              <a:rPr sz="1100" b="0">
+                <a:solidFill>
+                  <a:srgbClr val="64748B"/>
+                </a:solidFill>
+              </a:rPr>
+              <a:t>2024BCD0076</a:t>
+            </a:r>
+          </a:p>
+        </p:txBody>
+      </p:sp>
+      <p:sp>
+        <p:nvSpPr>
+          <p:cNvPr id="55" name="TextBox 54"/>
+          <p:cNvSpPr txBox="1"/>
+          <p:nvPr/>
+        </p:nvSpPr>
+        <p:spPr>
+          <a:xfrm>
+            <a:off x="6887718" y="2313432"/>
+            <a:ext cx="1643634" cy="256032"/>
+          </a:xfrm>
+          <a:prstGeom prst="rect">
+            <a:avLst/>
+          </a:prstGeom>
+          <a:noFill/>
+        </p:spPr>
+        <p:txBody>
+          <a:bodyPr wrap="square" lIns="0" rIns="0" tIns="0" bIns="0" anchor="t">
+            <a:spAutoFit/>
+          </a:bodyPr>
+          <a:lstStyle/>
+          <a:p>
+            <a:pPr algn="l"/>
+            <a:r>
+              <a:rPr sz="1200" b="1">
+                <a:solidFill>
+                  <a:srgbClr val="2563EB"/>
+                </a:solidFill>
+              </a:rPr>
+              <a:t>Web UI &amp; demo</a:t>
+            </a:r>
+          </a:p>
+        </p:txBody>
+      </p:sp>
+      <p:sp>
+        <p:nvSpPr>
+          <p:cNvPr id="56" name="TextBox 55"/>
+          <p:cNvSpPr txBox="1"/>
+          <p:nvPr/>
+        </p:nvSpPr>
+        <p:spPr>
+          <a:xfrm>
+            <a:off x="6887718" y="2624328"/>
+            <a:ext cx="1643634" cy="1316736"/>
+          </a:xfrm>
+          <a:prstGeom prst="rect">
+            <a:avLst/>
+          </a:prstGeom>
+          <a:noFill/>
+        </p:spPr>
+        <p:txBody>
+          <a:bodyPr wrap="square" lIns="0" rIns="0" tIns="0" bIns="0" anchor="t">
+            <a:spAutoFit/>
+          </a:bodyPr>
+          <a:lstStyle/>
+          <a:p>
+            <a:pPr algn="l" marL="171450" indent="-171450">
+              <a:spcAft>
+                <a:spcPts val="500"/>
+              </a:spcAft>
+              <a:buChar char="•"/>
+            </a:pPr>
+            <a:r>
+              <a:rPr sz="1050" b="0">
+                <a:solidFill>
+                  <a:srgbClr val="334155"/>
+                </a:solidFill>
+              </a:rPr>
+              <a:t>Web interface: grid, numpad, chat panel</a:t>
+            </a:r>
+          </a:p>
+          <a:p>
+            <a:pPr marL="171450" indent="-171450">
+              <a:spcAft>
+                <a:spcPts val="500"/>
+              </a:spcAft>
+              <a:buChar char="•"/>
+            </a:pPr>
+            <a:r>
+              <a:rPr sz="1050">
+                <a:solidFill>
+                  <a:srgbClr val="334155"/>
+                </a:solidFill>
+              </a:rPr>
+              <a:t>Lessons and skill check</a:t>
+            </a:r>
+          </a:p>
+          <a:p>
+            <a:pPr marL="171450" indent="-171450">
+              <a:spcAft>
+                <a:spcPts val="500"/>
+              </a:spcAft>
+              <a:buChar char="•"/>
+            </a:pPr>
+            <a:r>
+              <a:rPr sz="1050">
+                <a:solidFill>
+                  <a:srgbClr val="334155"/>
+                </a:solidFill>
+              </a:rPr>
+              <a:t>Runs the live demo</a:t>
+            </a:r>
+          </a:p>
+        </p:txBody>
+      </p:sp>
+      <p:sp>
+        <p:nvSpPr>
+          <p:cNvPr id="57" name="TextBox 56"/>
+          <p:cNvSpPr txBox="1"/>
+          <p:nvPr/>
+        </p:nvSpPr>
+        <p:spPr>
+          <a:xfrm>
+            <a:off x="6887718" y="4005072"/>
+            <a:ext cx="1643634" cy="228600"/>
+          </a:xfrm>
+          <a:prstGeom prst="rect">
+            <a:avLst/>
+          </a:prstGeom>
+          <a:noFill/>
+        </p:spPr>
+        <p:txBody>
+          <a:bodyPr wrap="square" lIns="0" rIns="0" tIns="0" bIns="0" anchor="t">
+            <a:spAutoFit/>
+          </a:bodyPr>
+          <a:lstStyle/>
+          <a:p>
+            <a:pPr algn="l"/>
+            <a:r>
+              <a:rPr sz="1050" b="1">
+                <a:solidFill>
+                  <a:srgbClr val="2563EB"/>
+                </a:solidFill>
+              </a:rPr>
+              <a:t>Slides 3–4, 11–12</a:t>
+            </a:r>
+          </a:p>
+        </p:txBody>
+      </p:sp>
+      <p:sp>
+        <p:nvSpPr>
+          <p:cNvPr id="58" name="TextBox 57"/>
+          <p:cNvSpPr txBox="1"/>
+          <p:nvPr/>
+        </p:nvSpPr>
+        <p:spPr>
+          <a:xfrm>
+            <a:off x="457200" y="4507992"/>
+            <a:ext cx="8229600" cy="228600"/>
+          </a:xfrm>
+          <a:prstGeom prst="rect">
+            <a:avLst/>
+          </a:prstGeom>
+          <a:noFill/>
+        </p:spPr>
+        <p:txBody>
+          <a:bodyPr wrap="square" lIns="0" rIns="0" tIns="0" bIns="0" anchor="t">
+            <a:spAutoFit/>
+          </a:bodyPr>
+          <a:lstStyle/>
+          <a:p>
+            <a:pPr algn="l"/>
+            <a:r>
+              <a:rPr sz="1100" b="0">
+                <a:solidFill>
+                  <a:srgbClr val="64748B"/>
+                </a:solidFill>
+              </a:rPr>
+              <a:t>Q&amp;A (slide 15): Sathwik leads, and each member answers questions about their own part.</a:t>
+            </a:r>
+          </a:p>
+        </p:txBody>
+      </p:sp>
+      <p:sp>
+        <p:nvSpPr>
+          <p:cNvPr id="59" name="TextBox 58"/>
+          <p:cNvSpPr txBox="1"/>
+          <p:nvPr/>
+        </p:nvSpPr>
+        <p:spPr>
+          <a:xfrm>
+            <a:off x="4572000" y="4782312"/>
+            <a:ext cx="3474720" cy="228600"/>
+          </a:xfrm>
+          <a:prstGeom prst="rect">
+            <a:avLst/>
+          </a:prstGeom>
+          <a:noFill/>
+        </p:spPr>
+        <p:txBody>
+          <a:bodyPr wrap="square" lIns="0" rIns="0" tIns="0" bIns="0" anchor="ctr">
+            <a:spAutoFit/>
+          </a:bodyPr>
+          <a:lstStyle/>
+          <a:p>
+            <a:pPr algn="r"/>
+            <a:r>
+              <a:rPr sz="900" b="1">
+                <a:solidFill>
+                  <a:srgbClr val="2563EB"/>
+                </a:solidFill>
+              </a:rPr>
+              <a:t>Presenter: Rishikesh</a:t>
+            </a:r>
+          </a:p>
+        </p:txBody>
+      </p:sp>
+    </p:spTree>
+  </p:cSld>
+  <p:clrMapOvr>
+    <a:masterClrMapping/>
+  </p:clrMapOvr>
+</p:sld>
+</file>
+
+<file path=ppt/slides/slide18.xml><?xml version="1.0" encoding="utf-8"?>
+<p:sld xmlns:a="http://schemas.openxmlformats.org/drawingml/2006/main" xmlns:p="http://schemas.openxmlformats.org/presentationml/2006/main" xmlns:r="http://schemas.openxmlformats.org/officeDocument/2006/relationships">
+  <p:cSld>
+    <p:spTree>
+      <p:nvGrpSpPr>
+        <p:cNvPr id="1" name=""/>
+        <p:cNvGrpSpPr/>
+        <p:nvPr/>
+      </p:nvGrpSpPr>
+      <p:grpSpPr/>
+      <p:sp>
+        <p:nvSpPr>
+          <p:cNvPr id="2" name="Text 0"/>
+          <p:cNvSpPr/>
+          <p:nvPr>
+            <p:ph idx="100" type="title" hasCustomPrompt="1"/>
+          </p:nvPr>
+        </p:nvSpPr>
+        <p:spPr>
+          <a:xfrm>
+            <a:off x="457200" y="274320"/>
+            <a:ext cx="8229600" cy="685800"/>
+          </a:xfrm>
+          <a:prstGeom prst="rect">
+            <a:avLst/>
+          </a:prstGeom>
+          <a:noFill/>
+          <a:ln/>
+        </p:spPr>
+        <p:txBody>
+          <a:bodyPr wrap="square" lIns="0" tIns="0" rIns="0" bIns="0" rtlCol="0" anchor="ctr"/>
+          <a:lstStyle/>
+          <a:p>
+            <a:pPr indent="0" marL="0">
+              <a:buNone/>
+            </a:pPr>
+            <a:r>
+              <a:rPr lang="en-US" sz="3000" b="1" dirty="0">
+                <a:solidFill>
+                  <a:schemeClr val="tx1"/>
+                </a:solidFill>
+              </a:rPr>
+              <a:t>Conclusion</a:t>
+            </a:r>
+            <a:endParaRPr lang="en-US" sz="3000" dirty="0"/>
+          </a:p>
+        </p:txBody>
+      </p:sp>
+      <p:sp>
+        <p:nvSpPr>
+          <p:cNvPr id="25" name="Slide Number Placeholder 0"/>
+          <p:cNvSpPr>
+            <a:spLocks noGrp="1"/>
+          </p:cNvSpPr>
+          <p:nvPr>
+            <p:ph type="sldNum" sz="quarter" idx="4294967295"/>
+          </p:nvPr>
+        </p:nvSpPr>
+        <p:spPr>
+          <a:xfrm>
+            <a:off x="8229600" y="4773168"/>
+            <a:ext cx="457200" cy="228600"/>
+          </a:xfrm>
+          <a:prstGeom prst="rect">
+            <a:avLst/>
+          </a:prstGeom>
+          <a:extLst>
+            <a:ext uri="{C572A759-6A51-4108-AA02-DFA0A04FC94B}">
+              <ma14:wrappingTextBoxFlag xmlns:ma14="http://schemas.microsoft.com/office/mac/drawingml/2011/main" val="0"/>
+            </a:ext>
+          </a:extLst>
+        </p:spPr>
+        <p:txBody>
+          <a:bodyPr/>
+          <a:lstStyle>
+            <a:lvl1pPr>
+              <a:defRPr sz="1000">
+                <a:solidFill>
+                  <a:srgbClr val="64748B"/>
+                </a:solidFill>
+              </a:defRPr>
+            </a:lvl1pPr>
+          </a:lstStyle>
+          <a:p>
+            <a:pPr algn="r"/>
+            <a:fld id="{F7021451-1387-4CA6-816F-3879F97B5CBC}" type="slidenum">
+              <a:rPr b="0" lang="en-US"/>
+              <a:t>2</a:t>
+            </a:fld>
+            <a:endParaRPr lang="en-US"/>
+          </a:p>
+        </p:txBody>
+      </p:sp>
+      <p:sp>
+        <p:nvSpPr>
+          <p:cNvPr id="26" name="Rounded Rectangle 25"/>
+          <p:cNvSpPr/>
+          <p:nvPr/>
+        </p:nvSpPr>
+        <p:spPr>
+          <a:xfrm>
+            <a:off x="457200" y="1143000"/>
+            <a:ext cx="2651760" cy="1965960"/>
+          </a:xfrm>
+          <a:prstGeom prst="roundRect">
+            <a:avLst>
+              <a:gd name="adj" fmla="val 3000"/>
+            </a:avLst>
+          </a:prstGeom>
+          <a:solidFill>
+            <a:srgbClr val="EEF2F7"/>
+          </a:solidFill>
+          <a:ln>
+            <a:noFill/>
+          </a:ln>
+          <a:effectLst/>
+        </p:spPr>
+        <p:style>
+          <a:lnRef idx="1">
+            <a:schemeClr val="accent1"/>
+          </a:lnRef>
+          <a:fillRef idx="3">
+            <a:schemeClr val="accent1"/>
+          </a:fillRef>
+          <a:effectRef idx="2">
+            <a:schemeClr val="accent1"/>
+          </a:effectRef>
+          <a:fontRef idx="minor">
+            <a:schemeClr val="lt1"/>
+          </a:fontRef>
+        </p:style>
+        <p:txBody>
+          <a:bodyPr rtlCol="0" anchor="ctr"/>
+          <a:lstStyle/>
+          <a:p>
+            <a:pPr algn="ctr"/>
+          </a:p>
+        </p:txBody>
+      </p:sp>
+      <p:sp>
+        <p:nvSpPr>
+          <p:cNvPr id="27" name="Rounded Rectangle 26"/>
+          <p:cNvSpPr/>
+          <p:nvPr/>
+        </p:nvSpPr>
+        <p:spPr>
+          <a:xfrm>
+            <a:off x="685800" y="1371600"/>
+            <a:ext cx="457200" cy="457200"/>
+          </a:xfrm>
+          <a:prstGeom prst="roundRect">
+            <a:avLst>
+              <a:gd name="adj" fmla="val 12000"/>
+            </a:avLst>
+          </a:prstGeom>
+          <a:solidFill>
+            <a:srgbClr val="0D9488"/>
+          </a:solidFill>
+          <a:ln>
+            <a:noFill/>
+          </a:ln>
+          <a:effectLst/>
+        </p:spPr>
+        <p:style>
+          <a:lnRef idx="1">
+            <a:schemeClr val="accent1"/>
+          </a:lnRef>
+          <a:fillRef idx="3">
+            <a:schemeClr val="accent1"/>
+          </a:fillRef>
+          <a:effectRef idx="2">
+            <a:schemeClr val="accent1"/>
+          </a:effectRef>
+          <a:fontRef idx="minor">
+            <a:schemeClr val="lt1"/>
+          </a:fontRef>
+        </p:style>
+        <p:txBody>
+          <a:bodyPr rtlCol="0" anchor="ctr"/>
+          <a:lstStyle/>
+          <a:p>
+            <a:pPr algn="ctr"/>
+          </a:p>
+        </p:txBody>
+      </p:sp>
+      <p:sp>
+        <p:nvSpPr>
+          <p:cNvPr id="28" name="TextBox 27"/>
+          <p:cNvSpPr txBox="1"/>
+          <p:nvPr/>
+        </p:nvSpPr>
+        <p:spPr>
+          <a:xfrm>
+            <a:off x="685800" y="1371600"/>
+            <a:ext cx="457200" cy="457200"/>
+          </a:xfrm>
+          <a:prstGeom prst="rect">
+            <a:avLst/>
+          </a:prstGeom>
+          <a:noFill/>
+        </p:spPr>
+        <p:txBody>
+          <a:bodyPr wrap="square" lIns="0" rIns="0" tIns="0" bIns="0" anchor="ctr">
+            <a:spAutoFit/>
+          </a:bodyPr>
+          <a:lstStyle/>
+          <a:p>
+            <a:pPr algn="ctr"/>
+            <a:r>
+              <a:rPr sz="1600" b="1">
+                <a:solidFill>
+                  <a:srgbClr val="FFFFFF"/>
+                </a:solidFill>
+                <a:latin typeface="Cambria"/>
+              </a:rPr>
+              <a:t>1</a:t>
+            </a:r>
+          </a:p>
+        </p:txBody>
+      </p:sp>
+      <p:sp>
+        <p:nvSpPr>
+          <p:cNvPr id="29" name="TextBox 28"/>
+          <p:cNvSpPr txBox="1"/>
+          <p:nvPr/>
+        </p:nvSpPr>
+        <p:spPr>
+          <a:xfrm>
+            <a:off x="685800" y="1965960"/>
+            <a:ext cx="2194560" cy="320040"/>
+          </a:xfrm>
+          <a:prstGeom prst="rect">
+            <a:avLst/>
+          </a:prstGeom>
+          <a:noFill/>
+        </p:spPr>
+        <p:txBody>
+          <a:bodyPr wrap="square" lIns="0" rIns="0" tIns="0" bIns="0" anchor="t">
+            <a:spAutoFit/>
+          </a:bodyPr>
+          <a:lstStyle/>
+          <a:p>
+            <a:pPr algn="l"/>
+            <a:r>
+              <a:rPr sz="1800" b="1">
+                <a:solidFill>
+                  <a:srgbClr val="0F172A"/>
+                </a:solidFill>
+                <a:latin typeface="Cambria"/>
+              </a:rPr>
+              <a:t>Correct</a:t>
+            </a:r>
+          </a:p>
+        </p:txBody>
+      </p:sp>
+      <p:sp>
+        <p:nvSpPr>
+          <p:cNvPr id="30" name="TextBox 29"/>
+          <p:cNvSpPr txBox="1"/>
+          <p:nvPr/>
+        </p:nvSpPr>
+        <p:spPr>
+          <a:xfrm>
+            <a:off x="685800" y="2331720"/>
+            <a:ext cx="2194560" cy="685800"/>
+          </a:xfrm>
+          <a:prstGeom prst="rect">
+            <a:avLst/>
+          </a:prstGeom>
+          <a:noFill/>
+        </p:spPr>
+        <p:txBody>
+          <a:bodyPr wrap="square" lIns="0" rIns="0" tIns="0" bIns="0" anchor="t">
+            <a:spAutoFit/>
+          </a:bodyPr>
+          <a:lstStyle/>
+          <a:p>
+            <a:pPr algn="l"/>
+            <a:r>
+              <a:rPr sz="1200" b="0">
+                <a:solidFill>
+                  <a:srgbClr val="334155"/>
+                </a:solidFill>
+              </a:rPr>
+              <a:t>Every answer is proven by the CSP engine, never guessed.</a:t>
+            </a:r>
+          </a:p>
+        </p:txBody>
+      </p:sp>
+      <p:sp>
+        <p:nvSpPr>
+          <p:cNvPr id="31" name="Rounded Rectangle 30"/>
+          <p:cNvSpPr/>
+          <p:nvPr/>
+        </p:nvSpPr>
+        <p:spPr>
+          <a:xfrm>
+            <a:off x="3246120" y="1143000"/>
+            <a:ext cx="2651760" cy="1965960"/>
+          </a:xfrm>
+          <a:prstGeom prst="roundRect">
+            <a:avLst>
+              <a:gd name="adj" fmla="val 3000"/>
+            </a:avLst>
+          </a:prstGeom>
+          <a:solidFill>
+            <a:srgbClr val="EEF2F7"/>
+          </a:solidFill>
+          <a:ln>
+            <a:noFill/>
+          </a:ln>
+          <a:effectLst/>
+        </p:spPr>
+        <p:style>
+          <a:lnRef idx="1">
+            <a:schemeClr val="accent1"/>
+          </a:lnRef>
+          <a:fillRef idx="3">
+            <a:schemeClr val="accent1"/>
+          </a:fillRef>
+          <a:effectRef idx="2">
+            <a:schemeClr val="accent1"/>
+          </a:effectRef>
+          <a:fontRef idx="minor">
+            <a:schemeClr val="lt1"/>
+          </a:fontRef>
+        </p:style>
+        <p:txBody>
+          <a:bodyPr rtlCol="0" anchor="ctr"/>
+          <a:lstStyle/>
+          <a:p>
+            <a:pPr algn="ctr"/>
+          </a:p>
+        </p:txBody>
+      </p:sp>
+      <p:sp>
+        <p:nvSpPr>
+          <p:cNvPr id="32" name="Rounded Rectangle 31"/>
+          <p:cNvSpPr/>
+          <p:nvPr/>
+        </p:nvSpPr>
+        <p:spPr>
+          <a:xfrm>
+            <a:off x="3474720" y="1371600"/>
+            <a:ext cx="457200" cy="457200"/>
+          </a:xfrm>
+          <a:prstGeom prst="roundRect">
+            <a:avLst>
+              <a:gd name="adj" fmla="val 12000"/>
+            </a:avLst>
+          </a:prstGeom>
+          <a:solidFill>
+            <a:srgbClr val="D97706"/>
+          </a:solidFill>
+          <a:ln>
+            <a:noFill/>
+          </a:ln>
+          <a:effectLst/>
+        </p:spPr>
+        <p:style>
+          <a:lnRef idx="1">
+            <a:schemeClr val="accent1"/>
+          </a:lnRef>
+          <a:fillRef idx="3">
+            <a:schemeClr val="accent1"/>
+          </a:fillRef>
+          <a:effectRef idx="2">
+            <a:schemeClr val="accent1"/>
+          </a:effectRef>
+          <a:fontRef idx="minor">
+            <a:schemeClr val="lt1"/>
+          </a:fontRef>
+        </p:style>
+        <p:txBody>
+          <a:bodyPr rtlCol="0" anchor="ctr"/>
+          <a:lstStyle/>
+          <a:p>
+            <a:pPr algn="ctr"/>
+          </a:p>
+        </p:txBody>
+      </p:sp>
+      <p:sp>
+        <p:nvSpPr>
+          <p:cNvPr id="33" name="TextBox 32"/>
+          <p:cNvSpPr txBox="1"/>
+          <p:nvPr/>
+        </p:nvSpPr>
+        <p:spPr>
+          <a:xfrm>
+            <a:off x="3474720" y="1371600"/>
+            <a:ext cx="457200" cy="457200"/>
+          </a:xfrm>
+          <a:prstGeom prst="rect">
+            <a:avLst/>
+          </a:prstGeom>
+          <a:noFill/>
+        </p:spPr>
+        <p:txBody>
+          <a:bodyPr wrap="square" lIns="0" rIns="0" tIns="0" bIns="0" anchor="ctr">
+            <a:spAutoFit/>
+          </a:bodyPr>
+          <a:lstStyle/>
+          <a:p>
+            <a:pPr algn="ctr"/>
+            <a:r>
+              <a:rPr sz="1600" b="1">
+                <a:solidFill>
+                  <a:srgbClr val="FFFFFF"/>
+                </a:solidFill>
+                <a:latin typeface="Cambria"/>
+              </a:rPr>
+              <a:t>2</a:t>
+            </a:r>
+          </a:p>
+        </p:txBody>
+      </p:sp>
+      <p:sp>
+        <p:nvSpPr>
+          <p:cNvPr id="34" name="TextBox 33"/>
+          <p:cNvSpPr txBox="1"/>
+          <p:nvPr/>
+        </p:nvSpPr>
+        <p:spPr>
+          <a:xfrm>
+            <a:off x="3474720" y="1965960"/>
+            <a:ext cx="2194560" cy="320040"/>
+          </a:xfrm>
+          <a:prstGeom prst="rect">
+            <a:avLst/>
+          </a:prstGeom>
+          <a:noFill/>
+        </p:spPr>
+        <p:txBody>
+          <a:bodyPr wrap="square" lIns="0" rIns="0" tIns="0" bIns="0" anchor="t">
+            <a:spAutoFit/>
+          </a:bodyPr>
+          <a:lstStyle/>
+          <a:p>
+            <a:pPr algn="l"/>
+            <a:r>
+              <a:rPr sz="1800" b="1">
+                <a:solidFill>
+                  <a:srgbClr val="0F172A"/>
+                </a:solidFill>
+                <a:latin typeface="Cambria"/>
+              </a:rPr>
+              <a:t>Explainable</a:t>
+            </a:r>
+          </a:p>
+        </p:txBody>
+      </p:sp>
+      <p:sp>
+        <p:nvSpPr>
+          <p:cNvPr id="35" name="TextBox 34"/>
+          <p:cNvSpPr txBox="1"/>
+          <p:nvPr/>
+        </p:nvSpPr>
+        <p:spPr>
+          <a:xfrm>
+            <a:off x="3474720" y="2331720"/>
+            <a:ext cx="2194560" cy="685800"/>
+          </a:xfrm>
+          <a:prstGeom prst="rect">
+            <a:avLst/>
+          </a:prstGeom>
+          <a:noFill/>
+        </p:spPr>
+        <p:txBody>
+          <a:bodyPr wrap="square" lIns="0" rIns="0" tIns="0" bIns="0" anchor="t">
+            <a:spAutoFit/>
+          </a:bodyPr>
+          <a:lstStyle/>
+          <a:p>
+            <a:pPr algn="l"/>
+            <a:r>
+              <a:rPr sz="1200" b="0">
+                <a:solidFill>
+                  <a:srgbClr val="334155"/>
+                </a:solidFill>
+              </a:rPr>
+              <a:t>Every hint traces back to a constraint rule, at the learner's level.</a:t>
+            </a:r>
+          </a:p>
+        </p:txBody>
+      </p:sp>
+      <p:sp>
+        <p:nvSpPr>
+          <p:cNvPr id="36" name="Rounded Rectangle 35"/>
+          <p:cNvSpPr/>
+          <p:nvPr/>
+        </p:nvSpPr>
+        <p:spPr>
+          <a:xfrm>
+            <a:off x="6035040" y="1143000"/>
+            <a:ext cx="2651760" cy="1965960"/>
+          </a:xfrm>
+          <a:prstGeom prst="roundRect">
+            <a:avLst>
+              <a:gd name="adj" fmla="val 3000"/>
+            </a:avLst>
+          </a:prstGeom>
+          <a:solidFill>
+            <a:srgbClr val="EEF2F7"/>
+          </a:solidFill>
+          <a:ln>
+            <a:noFill/>
+          </a:ln>
+          <a:effectLst/>
+        </p:spPr>
+        <p:style>
+          <a:lnRef idx="1">
+            <a:schemeClr val="accent1"/>
+          </a:lnRef>
+          <a:fillRef idx="3">
+            <a:schemeClr val="accent1"/>
+          </a:fillRef>
+          <a:effectRef idx="2">
+            <a:schemeClr val="accent1"/>
+          </a:effectRef>
+          <a:fontRef idx="minor">
+            <a:schemeClr val="lt1"/>
+          </a:fontRef>
+        </p:style>
+        <p:txBody>
+          <a:bodyPr rtlCol="0" anchor="ctr"/>
+          <a:lstStyle/>
+          <a:p>
+            <a:pPr algn="ctr"/>
+          </a:p>
+        </p:txBody>
+      </p:sp>
+      <p:sp>
+        <p:nvSpPr>
+          <p:cNvPr id="37" name="Rounded Rectangle 36"/>
+          <p:cNvSpPr/>
+          <p:nvPr/>
+        </p:nvSpPr>
+        <p:spPr>
+          <a:xfrm>
+            <a:off x="6263640" y="1371600"/>
+            <a:ext cx="457200" cy="457200"/>
+          </a:xfrm>
+          <a:prstGeom prst="roundRect">
+            <a:avLst>
+              <a:gd name="adj" fmla="val 12000"/>
+            </a:avLst>
+          </a:prstGeom>
+          <a:solidFill>
+            <a:srgbClr val="7C3AED"/>
+          </a:solidFill>
+          <a:ln>
+            <a:noFill/>
+          </a:ln>
+          <a:effectLst/>
+        </p:spPr>
+        <p:style>
+          <a:lnRef idx="1">
+            <a:schemeClr val="accent1"/>
+          </a:lnRef>
+          <a:fillRef idx="3">
+            <a:schemeClr val="accent1"/>
+          </a:fillRef>
+          <a:effectRef idx="2">
+            <a:schemeClr val="accent1"/>
+          </a:effectRef>
+          <a:fontRef idx="minor">
+            <a:schemeClr val="lt1"/>
+          </a:fontRef>
+        </p:style>
+        <p:txBody>
+          <a:bodyPr rtlCol="0" anchor="ctr"/>
+          <a:lstStyle/>
+          <a:p>
+            <a:pPr algn="ctr"/>
+          </a:p>
+        </p:txBody>
+      </p:sp>
+      <p:sp>
+        <p:nvSpPr>
+          <p:cNvPr id="38" name="TextBox 37"/>
+          <p:cNvSpPr txBox="1"/>
+          <p:nvPr/>
+        </p:nvSpPr>
+        <p:spPr>
+          <a:xfrm>
+            <a:off x="6263640" y="1371600"/>
+            <a:ext cx="457200" cy="457200"/>
+          </a:xfrm>
+          <a:prstGeom prst="rect">
+            <a:avLst/>
+          </a:prstGeom>
+          <a:noFill/>
+        </p:spPr>
+        <p:txBody>
+          <a:bodyPr wrap="square" lIns="0" rIns="0" tIns="0" bIns="0" anchor="ctr">
+            <a:spAutoFit/>
+          </a:bodyPr>
+          <a:lstStyle/>
+          <a:p>
+            <a:pPr algn="ctr"/>
+            <a:r>
+              <a:rPr sz="1600" b="1">
+                <a:solidFill>
+                  <a:srgbClr val="FFFFFF"/>
+                </a:solidFill>
+                <a:latin typeface="Cambria"/>
+              </a:rPr>
+              <a:t>3</a:t>
+            </a:r>
+          </a:p>
+        </p:txBody>
+      </p:sp>
+      <p:sp>
+        <p:nvSpPr>
+          <p:cNvPr id="39" name="TextBox 38"/>
+          <p:cNvSpPr txBox="1"/>
+          <p:nvPr/>
+        </p:nvSpPr>
+        <p:spPr>
+          <a:xfrm>
+            <a:off x="6263640" y="1965960"/>
+            <a:ext cx="2194560" cy="320040"/>
+          </a:xfrm>
+          <a:prstGeom prst="rect">
+            <a:avLst/>
+          </a:prstGeom>
+          <a:noFill/>
+        </p:spPr>
+        <p:txBody>
+          <a:bodyPr wrap="square" lIns="0" rIns="0" tIns="0" bIns="0" anchor="t">
+            <a:spAutoFit/>
+          </a:bodyPr>
+          <a:lstStyle/>
+          <a:p>
+            <a:pPr algn="l"/>
+            <a:r>
+              <a:rPr sz="1800" b="1">
+                <a:solidFill>
+                  <a:srgbClr val="0F172A"/>
+                </a:solidFill>
+                <a:latin typeface="Cambria"/>
+              </a:rPr>
+              <a:t>Safe with LLMs</a:t>
+            </a:r>
+          </a:p>
+        </p:txBody>
+      </p:sp>
+      <p:sp>
+        <p:nvSpPr>
+          <p:cNvPr id="40" name="TextBox 39"/>
+          <p:cNvSpPr txBox="1"/>
+          <p:nvPr/>
+        </p:nvSpPr>
+        <p:spPr>
+          <a:xfrm>
+            <a:off x="6263640" y="2331720"/>
+            <a:ext cx="2194560" cy="685800"/>
+          </a:xfrm>
+          <a:prstGeom prst="rect">
+            <a:avLst/>
+          </a:prstGeom>
+          <a:noFill/>
+        </p:spPr>
+        <p:txBody>
+          <a:bodyPr wrap="square" lIns="0" rIns="0" tIns="0" bIns="0" anchor="t">
+            <a:spAutoFit/>
+          </a:bodyPr>
+          <a:lstStyle/>
+          <a:p>
+            <a:pPr algn="l"/>
+            <a:r>
+              <a:rPr sz="1200" b="0">
+                <a:solidFill>
+                  <a:srgbClr val="334155"/>
+                </a:solidFill>
+              </a:rPr>
+              <a:t>The language model only phrases the answer; the solver checks every claim.</a:t>
+            </a:r>
+          </a:p>
+        </p:txBody>
+      </p:sp>
+      <p:sp>
+        <p:nvSpPr>
+          <p:cNvPr id="41" name="Rounded Rectangle 40"/>
+          <p:cNvSpPr/>
+          <p:nvPr/>
+        </p:nvSpPr>
+        <p:spPr>
+          <a:xfrm>
+            <a:off x="457200" y="3337560"/>
+            <a:ext cx="8229600" cy="777240"/>
+          </a:xfrm>
+          <a:prstGeom prst="roundRect">
+            <a:avLst>
+              <a:gd name="adj" fmla="val 8000"/>
+            </a:avLst>
+          </a:prstGeom>
+          <a:solidFill>
+            <a:srgbClr val="CCFBF1"/>
+          </a:solidFill>
+          <a:ln>
+            <a:noFill/>
+          </a:ln>
+          <a:effectLst/>
+        </p:spPr>
+        <p:style>
+          <a:lnRef idx="1">
+            <a:schemeClr val="accent1"/>
+          </a:lnRef>
+          <a:fillRef idx="3">
+            <a:schemeClr val="accent1"/>
+          </a:fillRef>
+          <a:effectRef idx="2">
+            <a:schemeClr val="accent1"/>
+          </a:effectRef>
+          <a:fontRef idx="minor">
+            <a:schemeClr val="lt1"/>
+          </a:fontRef>
+        </p:style>
+        <p:txBody>
+          <a:bodyPr rtlCol="0" anchor="ctr"/>
+          <a:lstStyle/>
+          <a:p>
+            <a:pPr algn="ctr"/>
+          </a:p>
+        </p:txBody>
+      </p:sp>
+      <p:sp>
+        <p:nvSpPr>
+          <p:cNvPr id="42" name="TextBox 41"/>
+          <p:cNvSpPr txBox="1"/>
+          <p:nvPr/>
+        </p:nvSpPr>
+        <p:spPr>
+          <a:xfrm>
+            <a:off x="731520" y="3337560"/>
+            <a:ext cx="7680960" cy="777240"/>
+          </a:xfrm>
+          <a:prstGeom prst="rect">
+            <a:avLst/>
+          </a:prstGeom>
+          <a:noFill/>
+        </p:spPr>
+        <p:txBody>
+          <a:bodyPr wrap="square" lIns="0" rIns="0" tIns="0" bIns="0" anchor="ctr">
+            <a:spAutoFit/>
+          </a:bodyPr>
+          <a:lstStyle/>
+          <a:p>
+            <a:pPr algn="l"/>
+            <a:r>
+              <a:rPr sz="1500" b="1">
+                <a:solidFill>
+                  <a:srgbClr val="0F766E"/>
+                </a:solidFill>
+              </a:rPr>
+              <a:t>In one line: </a:t>
+            </a:r>
+            <a:r>
+              <a:rPr sz="1500">
+                <a:solidFill>
+                  <a:srgbClr val="0F172A"/>
+                </a:solidFill>
+              </a:rPr>
+              <a:t>classical AI (a CSP) does the reasoning, and a language model only gives it a voice.</a:t>
+            </a:r>
+          </a:p>
+        </p:txBody>
+      </p:sp>
+      <p:sp>
+        <p:nvSpPr>
+          <p:cNvPr id="43" name="TextBox 42"/>
+          <p:cNvSpPr txBox="1"/>
+          <p:nvPr/>
+        </p:nvSpPr>
+        <p:spPr>
+          <a:xfrm>
+            <a:off x="4572000" y="4782312"/>
+            <a:ext cx="3474720" cy="228600"/>
+          </a:xfrm>
+          <a:prstGeom prst="rect">
+            <a:avLst/>
+          </a:prstGeom>
+          <a:noFill/>
+        </p:spPr>
+        <p:txBody>
+          <a:bodyPr wrap="square" lIns="0" rIns="0" tIns="0" bIns="0" anchor="ctr">
+            <a:spAutoFit/>
+          </a:bodyPr>
+          <a:lstStyle/>
+          <a:p>
+            <a:pPr algn="r"/>
+            <a:r>
+              <a:rPr sz="900" b="1">
+                <a:solidFill>
+                  <a:srgbClr val="7C3AED"/>
+                </a:solidFill>
+              </a:rPr>
+              <a:t>Presenter: Sathwik Teja</a:t>
+            </a:r>
+          </a:p>
+        </p:txBody>
+      </p:sp>
     </p:spTree>
   </p:cSld>
   <p:clrMapOvr>
@@ -8529,7 +10863,7 @@
                   <a:schemeClr val="tx1"/>
                 </a:solidFill>
               </a:rPr>
-              <a:t>Puzzle apps spoil, they don't teach</a:t>
+              <a:t>Introduction: the problem</a:t>
             </a:r>
             <a:endParaRPr lang="en-US" sz="3000" dirty="0"/>
           </a:p>
@@ -9186,853 +11520,37 @@
           </a:p>
         </p:txBody>
       </p:sp>
-    </p:spTree>
-  </p:cSld>
-  <p:clrMapOvr>
-    <a:masterClrMapping/>
-  </p:clrMapOvr>
-</p:sld>
-</file>
-
-<file path=ppt/slides/slide3.xml><?xml version="1.0" encoding="utf-8"?>
-<p:sld xmlns:a="http://schemas.openxmlformats.org/drawingml/2006/main" xmlns:r="http://schemas.openxmlformats.org/officeDocument/2006/relationships" xmlns:p="http://schemas.openxmlformats.org/presentationml/2006/main">
-  <p:cSld name="Slide 3">
-    <p:spTree>
-      <p:nvGrpSpPr>
-        <p:cNvPr id="1" name=""/>
-        <p:cNvGrpSpPr/>
-        <p:nvPr/>
-      </p:nvGrpSpPr>
-      <p:grpSpPr>
-        <a:xfrm>
-          <a:off x="0" y="0"/>
-          <a:ext cx="0" cy="0"/>
-          <a:chOff x="0" y="0"/>
-          <a:chExt cx="0" cy="0"/>
-        </a:xfrm>
-      </p:grpSpPr>
-      <p:sp>
-        <p:nvSpPr>
-          <p:cNvPr id="2" name="Text 0"/>
-          <p:cNvSpPr/>
-          <p:nvPr>
-            <p:ph idx="100" type="title" hasCustomPrompt="1"/>
-          </p:nvPr>
-        </p:nvSpPr>
-        <p:spPr>
-          <a:xfrm>
-            <a:off x="457200" y="274320"/>
-            <a:ext cx="8229600" cy="685800"/>
-          </a:xfrm>
-          <a:prstGeom prst="rect">
-            <a:avLst/>
-          </a:prstGeom>
-          <a:noFill/>
-          <a:ln/>
-        </p:spPr>
-        <p:txBody>
-          <a:bodyPr wrap="square" lIns="0" tIns="0" rIns="0" bIns="0" rtlCol="0" anchor="ctr"/>
-          <a:lstStyle/>
-          <a:p>
-            <a:pPr indent="0" marL="0">
-              <a:buNone/>
-            </a:pPr>
-            <a:r>
-              <a:rPr lang="en-US" sz="3000" b="1" dirty="0">
-                <a:solidFill>
-                  <a:schemeClr val="tx1"/>
-                </a:solidFill>
-              </a:rPr>
-              <a:t>Where is the AI? Three layers</a:t>
-            </a:r>
-            <a:endParaRPr lang="en-US" sz="3000" dirty="0"/>
-          </a:p>
-        </p:txBody>
-      </p:sp>
-      <p:sp>
-        <p:nvSpPr>
-          <p:cNvPr id="3" name="card"/>
-          <p:cNvSpPr/>
-          <p:nvPr/>
-        </p:nvSpPr>
-        <p:spPr>
-          <a:xfrm>
-            <a:off x="457200" y="1188720"/>
-            <a:ext cx="5577840" cy="1024128"/>
-          </a:xfrm>
-          <a:prstGeom prst="roundRect">
-            <a:avLst>
-              <a:gd name="adj" fmla="val 7143"/>
-            </a:avLst>
-          </a:prstGeom>
-          <a:solidFill>
-            <a:srgbClr val="EEF2F7"/>
-          </a:solidFill>
-          <a:ln w="12700">
-            <a:solidFill>
-              <a:srgbClr val="EEF2F7"/>
-            </a:solidFill>
-            <a:prstDash val="solid"/>
-          </a:ln>
-          <a:effectLst>
-            <a:outerShdw sx="100000" sy="100000" kx="0" ky="0" algn="bl" rotWithShape="0" blurRad="76200" dist="19050" dir="5400000">
-              <a:srgbClr val="0F172A">
-                <a:alpha val="12000"/>
-              </a:srgbClr>
-            </a:outerShdw>
-          </a:effectLst>
-        </p:spPr>
-      </p:sp>
-      <p:sp>
-        <p:nvSpPr>
-          <p:cNvPr id="4" name="cell-1"/>
-          <p:cNvSpPr/>
-          <p:nvPr/>
-        </p:nvSpPr>
-        <p:spPr>
-          <a:xfrm>
-            <a:off x="640080" y="1417320"/>
-            <a:ext cx="566928" cy="566928"/>
-          </a:xfrm>
-          <a:prstGeom prst="roundRect">
-            <a:avLst>
-              <a:gd name="adj" fmla="val 9677"/>
-            </a:avLst>
-          </a:prstGeom>
-          <a:solidFill>
-            <a:srgbClr val="0D9488"/>
-          </a:solidFill>
-          <a:ln w="12700">
-            <a:solidFill>
-              <a:srgbClr val="0D9488"/>
-            </a:solidFill>
-            <a:prstDash val="solid"/>
-          </a:ln>
-        </p:spPr>
-      </p:sp>
-      <p:sp>
-        <p:nvSpPr>
-          <p:cNvPr id="5" name="Text 3"/>
-          <p:cNvSpPr txBox="1"/>
-          <p:nvPr/>
-        </p:nvSpPr>
-        <p:spPr>
-          <a:xfrm>
-            <a:off x="640080" y="1417320"/>
-            <a:ext cx="566928" cy="566928"/>
-          </a:xfrm>
-          <a:prstGeom prst="rect">
-            <a:avLst/>
-          </a:prstGeom>
-          <a:noFill/>
-          <a:ln/>
-        </p:spPr>
-        <p:txBody>
-          <a:bodyPr wrap="square" lIns="0" tIns="0" rIns="0" bIns="0" rtlCol="0" anchor="ctr"/>
-          <a:lstStyle/>
-          <a:p>
-            <a:pPr algn="ctr" indent="0" marL="0">
-              <a:buNone/>
-            </a:pPr>
-            <a:r>
-              <a:rPr lang="en-US" sz="2000" b="1" dirty="0">
-                <a:solidFill>
-                  <a:srgbClr val="FFFFFF"/>
-                </a:solidFill>
-                <a:latin typeface="Cambria" pitchFamily="34" charset="0"/>
-                <a:ea typeface="Cambria" pitchFamily="34" charset="-122"/>
-                <a:cs typeface="Cambria" pitchFamily="34" charset="-120"/>
-              </a:rPr>
-              <a:t>1</a:t>
-            </a:r>
-            <a:endParaRPr lang="en-US" sz="2000" dirty="0"/>
-          </a:p>
-        </p:txBody>
-      </p:sp>
-      <p:sp>
-        <p:nvSpPr>
-          <p:cNvPr id="6" name="Text 4"/>
-          <p:cNvSpPr txBox="1"/>
-          <p:nvPr/>
-        </p:nvSpPr>
-        <p:spPr>
-          <a:xfrm>
-            <a:off x="1417320" y="1307592"/>
-            <a:ext cx="3108960" cy="347472"/>
-          </a:xfrm>
-          <a:prstGeom prst="rect">
-            <a:avLst/>
-          </a:prstGeom>
-          <a:noFill/>
-          <a:ln/>
-        </p:spPr>
-        <p:txBody>
-          <a:bodyPr wrap="square" lIns="0" tIns="0" rIns="0" bIns="0" rtlCol="0" anchor="t"/>
-          <a:lstStyle/>
-          <a:p>
-            <a:pPr indent="0" marL="0">
-              <a:buNone/>
-            </a:pPr>
-            <a:r>
-              <a:rPr lang="en-US" sz="1700" b="1" dirty="0">
-                <a:solidFill>
-                  <a:srgbClr val="0F172A"/>
-                </a:solidFill>
-                <a:latin typeface="Cambria" pitchFamily="34" charset="0"/>
-                <a:ea typeface="Cambria" pitchFamily="34" charset="-122"/>
-                <a:cs typeface="Cambria" pitchFamily="34" charset="-120"/>
-              </a:rPr>
-              <a:t>Search and inference (CSP)</a:t>
-            </a:r>
-            <a:endParaRPr lang="en-US" sz="1700" dirty="0"/>
-          </a:p>
-        </p:txBody>
-      </p:sp>
-      <p:sp>
-        <p:nvSpPr>
-          <p:cNvPr id="7" name="Text 5"/>
-          <p:cNvSpPr txBox="1"/>
-          <p:nvPr/>
-        </p:nvSpPr>
-        <p:spPr>
-          <a:xfrm>
-            <a:off x="4251960" y="1335024"/>
-            <a:ext cx="1645920" cy="292608"/>
-          </a:xfrm>
-          <a:prstGeom prst="rect">
-            <a:avLst/>
-          </a:prstGeom>
-          <a:noFill/>
-          <a:ln/>
-        </p:spPr>
-        <p:txBody>
-          <a:bodyPr wrap="square" lIns="0" tIns="0" rIns="0" bIns="0" rtlCol="0" anchor="t"/>
-          <a:lstStyle/>
-          <a:p>
-            <a:pPr algn="r" indent="0" marL="0">
-              <a:buNone/>
-            </a:pPr>
-            <a:r>
-              <a:rPr lang="en-US" sz="1100" b="1" dirty="0">
-                <a:solidFill>
-                  <a:srgbClr val="0D9488"/>
-                </a:solidFill>
-              </a:rPr>
-              <a:t>Russell &amp; Norvig ch. 6</a:t>
-            </a:r>
-            <a:endParaRPr lang="en-US" sz="1100" dirty="0"/>
-          </a:p>
-        </p:txBody>
-      </p:sp>
-      <p:sp>
-        <p:nvSpPr>
-          <p:cNvPr id="8" name="Text 6"/>
-          <p:cNvSpPr txBox="1"/>
-          <p:nvPr/>
-        </p:nvSpPr>
-        <p:spPr>
-          <a:xfrm>
-            <a:off x="1417320" y="1645920"/>
-            <a:ext cx="4480560" cy="548640"/>
-          </a:xfrm>
-          <a:prstGeom prst="rect">
-            <a:avLst/>
-          </a:prstGeom>
-          <a:noFill/>
-          <a:ln/>
-        </p:spPr>
-        <p:txBody>
-          <a:bodyPr wrap="square" lIns="0" tIns="0" rIns="0" bIns="0" rtlCol="0" anchor="t"/>
-          <a:lstStyle/>
-          <a:p>
-            <a:pPr indent="0" marL="0">
-              <a:buNone/>
-            </a:pPr>
-            <a:r>
-              <a:rPr lang="en-US" sz="1400" dirty="0">
-                <a:solidFill>
-                  <a:srgbClr val="334155"/>
-                </a:solidFill>
-              </a:rPr>
-              <a:t>Backtracking, Forward Checking, AC-3, MRV, LCV and Norvig propagation solve and prove every answer.</a:t>
-            </a:r>
-            <a:endParaRPr lang="en-US" sz="1400" dirty="0"/>
-          </a:p>
-        </p:txBody>
-      </p:sp>
-      <p:sp>
-        <p:nvSpPr>
-          <p:cNvPr id="9" name="card"/>
-          <p:cNvSpPr/>
-          <p:nvPr/>
-        </p:nvSpPr>
-        <p:spPr>
-          <a:xfrm>
-            <a:off x="457200" y="2350008"/>
-            <a:ext cx="5577840" cy="1024128"/>
-          </a:xfrm>
-          <a:prstGeom prst="roundRect">
-            <a:avLst>
-              <a:gd name="adj" fmla="val 7143"/>
-            </a:avLst>
-          </a:prstGeom>
-          <a:solidFill>
-            <a:srgbClr val="EEF2F7"/>
-          </a:solidFill>
-          <a:ln w="12700">
-            <a:solidFill>
-              <a:srgbClr val="EEF2F7"/>
-            </a:solidFill>
-            <a:prstDash val="solid"/>
-          </a:ln>
-          <a:effectLst>
-            <a:outerShdw sx="100000" sy="100000" kx="0" ky="0" algn="bl" rotWithShape="0" blurRad="76200" dist="19050" dir="5400000">
-              <a:srgbClr val="0F172A">
-                <a:alpha val="12000"/>
-              </a:srgbClr>
-            </a:outerShdw>
-          </a:effectLst>
-        </p:spPr>
-      </p:sp>
-      <p:sp>
-        <p:nvSpPr>
-          <p:cNvPr id="10" name="cell-2"/>
-          <p:cNvSpPr/>
-          <p:nvPr/>
-        </p:nvSpPr>
-        <p:spPr>
-          <a:xfrm>
-            <a:off x="640080" y="2578608"/>
-            <a:ext cx="566928" cy="566928"/>
-          </a:xfrm>
-          <a:prstGeom prst="roundRect">
-            <a:avLst>
-              <a:gd name="adj" fmla="val 9677"/>
-            </a:avLst>
-          </a:prstGeom>
-          <a:solidFill>
-            <a:srgbClr val="D97706"/>
-          </a:solidFill>
-          <a:ln w="12700">
-            <a:solidFill>
-              <a:srgbClr val="D97706"/>
-            </a:solidFill>
-            <a:prstDash val="solid"/>
-          </a:ln>
-        </p:spPr>
-      </p:sp>
-      <p:sp>
-        <p:nvSpPr>
-          <p:cNvPr id="11" name="Text 9"/>
-          <p:cNvSpPr txBox="1"/>
-          <p:nvPr/>
-        </p:nvSpPr>
-        <p:spPr>
-          <a:xfrm>
-            <a:off x="640080" y="2578608"/>
-            <a:ext cx="566928" cy="566928"/>
-          </a:xfrm>
-          <a:prstGeom prst="rect">
-            <a:avLst/>
-          </a:prstGeom>
-          <a:noFill/>
-          <a:ln/>
-        </p:spPr>
-        <p:txBody>
-          <a:bodyPr wrap="square" lIns="0" tIns="0" rIns="0" bIns="0" rtlCol="0" anchor="ctr"/>
-          <a:lstStyle/>
-          <a:p>
-            <a:pPr algn="ctr" indent="0" marL="0">
-              <a:buNone/>
-            </a:pPr>
-            <a:r>
-              <a:rPr lang="en-US" sz="2000" b="1" dirty="0">
-                <a:solidFill>
-                  <a:srgbClr val="FFFFFF"/>
-                </a:solidFill>
-                <a:latin typeface="Cambria" pitchFamily="34" charset="0"/>
-                <a:ea typeface="Cambria" pitchFamily="34" charset="-122"/>
-                <a:cs typeface="Cambria" pitchFamily="34" charset="-120"/>
-              </a:rPr>
-              <a:t>2</a:t>
-            </a:r>
-            <a:endParaRPr lang="en-US" sz="2000" dirty="0"/>
-          </a:p>
-        </p:txBody>
-      </p:sp>
-      <p:sp>
-        <p:nvSpPr>
-          <p:cNvPr id="12" name="Text 10"/>
-          <p:cNvSpPr txBox="1"/>
-          <p:nvPr/>
-        </p:nvSpPr>
-        <p:spPr>
-          <a:xfrm>
-            <a:off x="1417320" y="2468880"/>
-            <a:ext cx="3108960" cy="347472"/>
-          </a:xfrm>
-          <a:prstGeom prst="rect">
-            <a:avLst/>
-          </a:prstGeom>
-          <a:noFill/>
-          <a:ln/>
-        </p:spPr>
-        <p:txBody>
-          <a:bodyPr wrap="square" lIns="0" tIns="0" rIns="0" bIns="0" rtlCol="0" anchor="t"/>
-          <a:lstStyle/>
-          <a:p>
-            <a:pPr indent="0" marL="0">
-              <a:buNone/>
-            </a:pPr>
-            <a:r>
-              <a:rPr lang="en-US" sz="1700" b="1" dirty="0">
-                <a:solidFill>
-                  <a:srgbClr val="0F172A"/>
-                </a:solidFill>
-                <a:latin typeface="Cambria" pitchFamily="34" charset="0"/>
-                <a:ea typeface="Cambria" pitchFamily="34" charset="-122"/>
-                <a:cs typeface="Cambria" pitchFamily="34" charset="-120"/>
-              </a:rPr>
-              <a:t>Knowledge-based reasoning</a:t>
-            </a:r>
-            <a:endParaRPr lang="en-US" sz="1700" dirty="0"/>
-          </a:p>
-        </p:txBody>
-      </p:sp>
-      <p:sp>
-        <p:nvSpPr>
-          <p:cNvPr id="13" name="Text 11"/>
-          <p:cNvSpPr txBox="1"/>
-          <p:nvPr/>
-        </p:nvSpPr>
-        <p:spPr>
-          <a:xfrm>
-            <a:off x="4251960" y="2496312"/>
-            <a:ext cx="1645920" cy="292608"/>
-          </a:xfrm>
-          <a:prstGeom prst="rect">
-            <a:avLst/>
-          </a:prstGeom>
-          <a:noFill/>
-          <a:ln/>
-        </p:spPr>
-        <p:txBody>
-          <a:bodyPr wrap="square" lIns="0" tIns="0" rIns="0" bIns="0" rtlCol="0" anchor="t"/>
-          <a:lstStyle/>
-          <a:p>
-            <a:pPr algn="r" indent="0" marL="0">
-              <a:buNone/>
-            </a:pPr>
-            <a:r>
-              <a:rPr lang="en-US" sz="1100" b="1" dirty="0">
-                <a:solidFill>
-                  <a:srgbClr val="D97706"/>
-                </a:solidFill>
-              </a:rPr>
-              <a:t>Rule-based inference</a:t>
-            </a:r>
-            <a:endParaRPr lang="en-US" sz="1100" dirty="0"/>
-          </a:p>
-        </p:txBody>
-      </p:sp>
-      <p:sp>
-        <p:nvSpPr>
-          <p:cNvPr id="14" name="Text 12"/>
-          <p:cNvSpPr txBox="1"/>
-          <p:nvPr/>
-        </p:nvSpPr>
-        <p:spPr>
-          <a:xfrm>
-            <a:off x="1417320" y="2807208"/>
-            <a:ext cx="4480560" cy="548640"/>
-          </a:xfrm>
-          <a:prstGeom prst="rect">
-            <a:avLst/>
-          </a:prstGeom>
-          <a:noFill/>
-          <a:ln/>
-        </p:spPr>
-        <p:txBody>
-          <a:bodyPr wrap="square" lIns="0" tIns="0" rIns="0" bIns="0" rtlCol="0" anchor="t"/>
-          <a:lstStyle/>
-          <a:p>
-            <a:pPr indent="0" marL="0">
-              <a:buNone/>
-            </a:pPr>
-            <a:r>
-              <a:rPr lang="en-US" sz="1400" dirty="0">
-                <a:solidFill>
-                  <a:srgbClr val="334155"/>
-                </a:solidFill>
-              </a:rPr>
-              <a:t>A rule base of 9 human techniques, applied simplest-first, produces explainable deductions.</a:t>
-            </a:r>
-            <a:endParaRPr lang="en-US" sz="1400" dirty="0"/>
-          </a:p>
-        </p:txBody>
-      </p:sp>
-      <p:sp>
-        <p:nvSpPr>
-          <p:cNvPr id="15" name="card"/>
-          <p:cNvSpPr/>
-          <p:nvPr/>
-        </p:nvSpPr>
-        <p:spPr>
-          <a:xfrm>
-            <a:off x="457200" y="3511296"/>
-            <a:ext cx="5577840" cy="1024128"/>
-          </a:xfrm>
-          <a:prstGeom prst="roundRect">
-            <a:avLst>
-              <a:gd name="adj" fmla="val 7143"/>
-            </a:avLst>
-          </a:prstGeom>
-          <a:solidFill>
-            <a:srgbClr val="EEF2F7"/>
-          </a:solidFill>
-          <a:ln w="12700">
-            <a:solidFill>
-              <a:srgbClr val="EEF2F7"/>
-            </a:solidFill>
-            <a:prstDash val="solid"/>
-          </a:ln>
-          <a:effectLst>
-            <a:outerShdw sx="100000" sy="100000" kx="0" ky="0" algn="bl" rotWithShape="0" blurRad="76200" dist="19050" dir="5400000">
-              <a:srgbClr val="0F172A">
-                <a:alpha val="12000"/>
-              </a:srgbClr>
-            </a:outerShdw>
-          </a:effectLst>
-        </p:spPr>
-      </p:sp>
-      <p:sp>
-        <p:nvSpPr>
-          <p:cNvPr id="16" name="cell-3"/>
-          <p:cNvSpPr/>
-          <p:nvPr/>
-        </p:nvSpPr>
-        <p:spPr>
-          <a:xfrm>
-            <a:off x="640080" y="3739896"/>
-            <a:ext cx="566928" cy="566928"/>
-          </a:xfrm>
-          <a:prstGeom prst="roundRect">
-            <a:avLst>
-              <a:gd name="adj" fmla="val 9677"/>
-            </a:avLst>
-          </a:prstGeom>
-          <a:solidFill>
-            <a:srgbClr val="7C3AED"/>
-          </a:solidFill>
-          <a:ln w="12700">
-            <a:solidFill>
-              <a:srgbClr val="7C3AED"/>
-            </a:solidFill>
-            <a:prstDash val="solid"/>
-          </a:ln>
-        </p:spPr>
-      </p:sp>
-      <p:sp>
-        <p:nvSpPr>
-          <p:cNvPr id="17" name="Text 15"/>
-          <p:cNvSpPr txBox="1"/>
-          <p:nvPr/>
-        </p:nvSpPr>
-        <p:spPr>
-          <a:xfrm>
-            <a:off x="640080" y="3739896"/>
-            <a:ext cx="566928" cy="566928"/>
-          </a:xfrm>
-          <a:prstGeom prst="rect">
-            <a:avLst/>
-          </a:prstGeom>
-          <a:noFill/>
-          <a:ln/>
-        </p:spPr>
-        <p:txBody>
-          <a:bodyPr wrap="square" lIns="0" tIns="0" rIns="0" bIns="0" rtlCol="0" anchor="ctr"/>
-          <a:lstStyle/>
-          <a:p>
-            <a:pPr algn="ctr" indent="0" marL="0">
-              <a:buNone/>
-            </a:pPr>
-            <a:r>
-              <a:rPr lang="en-US" sz="2000" b="1" dirty="0">
-                <a:solidFill>
-                  <a:srgbClr val="FFFFFF"/>
-                </a:solidFill>
-                <a:latin typeface="Cambria" pitchFamily="34" charset="0"/>
-                <a:ea typeface="Cambria" pitchFamily="34" charset="-122"/>
-                <a:cs typeface="Cambria" pitchFamily="34" charset="-120"/>
-              </a:rPr>
-              <a:t>3</a:t>
-            </a:r>
-            <a:endParaRPr lang="en-US" sz="2000" dirty="0"/>
-          </a:p>
-        </p:txBody>
-      </p:sp>
-      <p:sp>
-        <p:nvSpPr>
-          <p:cNvPr id="18" name="Text 16"/>
-          <p:cNvSpPr txBox="1"/>
-          <p:nvPr/>
-        </p:nvSpPr>
-        <p:spPr>
-          <a:xfrm>
-            <a:off x="1417320" y="3630168"/>
-            <a:ext cx="3108960" cy="347472"/>
-          </a:xfrm>
-          <a:prstGeom prst="rect">
-            <a:avLst/>
-          </a:prstGeom>
-          <a:noFill/>
-          <a:ln/>
-        </p:spPr>
-        <p:txBody>
-          <a:bodyPr wrap="square" lIns="0" tIns="0" rIns="0" bIns="0" rtlCol="0" anchor="t"/>
-          <a:lstStyle/>
-          <a:p>
-            <a:pPr indent="0" marL="0">
-              <a:buNone/>
-            </a:pPr>
-            <a:r>
-              <a:rPr lang="en-US" sz="1700" b="1" dirty="0">
-                <a:solidFill>
-                  <a:srgbClr val="0F172A"/>
-                </a:solidFill>
-                <a:latin typeface="Cambria" pitchFamily="34" charset="0"/>
-                <a:ea typeface="Cambria" pitchFamily="34" charset="-122"/>
-                <a:cs typeface="Cambria" pitchFamily="34" charset="-120"/>
-              </a:rPr>
-              <a:t>Natural-language layer</a:t>
-            </a:r>
-            <a:endParaRPr lang="en-US" sz="1700" dirty="0"/>
-          </a:p>
-        </p:txBody>
-      </p:sp>
-      <p:sp>
-        <p:nvSpPr>
-          <p:cNvPr id="19" name="Text 17"/>
-          <p:cNvSpPr txBox="1"/>
-          <p:nvPr/>
-        </p:nvSpPr>
-        <p:spPr>
-          <a:xfrm>
-            <a:off x="4251960" y="3657600"/>
-            <a:ext cx="1645920" cy="292608"/>
-          </a:xfrm>
-          <a:prstGeom prst="rect">
-            <a:avLst/>
-          </a:prstGeom>
-          <a:noFill/>
-          <a:ln/>
-        </p:spPr>
-        <p:txBody>
-          <a:bodyPr wrap="square" lIns="0" tIns="0" rIns="0" bIns="0" rtlCol="0" anchor="t"/>
-          <a:lstStyle/>
-          <a:p>
-            <a:pPr algn="r" indent="0" marL="0">
-              <a:buNone/>
-            </a:pPr>
-            <a:r>
-              <a:rPr lang="en-US" sz="1100" b="1" dirty="0">
-                <a:solidFill>
-                  <a:srgbClr val="7C3AED"/>
-                </a:solidFill>
-              </a:rPr>
-              <a:t>Neuro-symbolic AI</a:t>
-            </a:r>
-            <a:endParaRPr lang="en-US" sz="1100" dirty="0"/>
-          </a:p>
-        </p:txBody>
-      </p:sp>
-      <p:sp>
-        <p:nvSpPr>
-          <p:cNvPr id="20" name="Text 18"/>
-          <p:cNvSpPr txBox="1"/>
-          <p:nvPr/>
-        </p:nvSpPr>
-        <p:spPr>
-          <a:xfrm>
-            <a:off x="1417320" y="3968496"/>
-            <a:ext cx="4480560" cy="548640"/>
-          </a:xfrm>
-          <a:prstGeom prst="rect">
-            <a:avLst/>
-          </a:prstGeom>
-          <a:noFill/>
-          <a:ln/>
-        </p:spPr>
-        <p:txBody>
-          <a:bodyPr wrap="square" lIns="0" tIns="0" rIns="0" bIns="0" rtlCol="0" anchor="t"/>
-          <a:lstStyle/>
-          <a:p>
-            <a:pPr indent="0" marL="0">
-              <a:buNone/>
-            </a:pPr>
-            <a:r>
-              <a:rPr lang="en-US" sz="1400" dirty="0">
-                <a:solidFill>
-                  <a:srgbClr val="334155"/>
-                </a:solidFill>
-              </a:rPr>
-              <a:t>An optional LLM turns verified facts into a friendly lesson. Layer 1 checks every claim it makes.</a:t>
-            </a:r>
-            <a:endParaRPr lang="en-US" sz="1400" dirty="0"/>
-          </a:p>
-        </p:txBody>
-      </p:sp>
-      <p:sp>
-        <p:nvSpPr>
-          <p:cNvPr id="21" name="quote"/>
-          <p:cNvSpPr/>
-          <p:nvPr/>
-        </p:nvSpPr>
-        <p:spPr>
-          <a:xfrm>
-            <a:off x="6309360" y="1188720"/>
-            <a:ext cx="2377440" cy="3346704"/>
-          </a:xfrm>
-          <a:prstGeom prst="roundRect">
-            <a:avLst>
-              <a:gd name="adj" fmla="val 3077"/>
-            </a:avLst>
-          </a:prstGeom>
-          <a:solidFill>
-            <a:srgbClr val="0F172A"/>
-          </a:solidFill>
-          <a:ln w="12700">
-            <a:solidFill>
-              <a:srgbClr val="0F172A"/>
-            </a:solidFill>
-            <a:prstDash val="solid"/>
-          </a:ln>
-          <a:effectLst>
-            <a:outerShdw sx="100000" sy="100000" kx="0" ky="0" algn="bl" rotWithShape="0" blurRad="76200" dist="19050" dir="5400000">
-              <a:srgbClr val="0F172A">
-                <a:alpha val="12000"/>
-              </a:srgbClr>
-            </a:outerShdw>
-          </a:effectLst>
-        </p:spPr>
-      </p:sp>
-      <p:sp>
-        <p:nvSpPr>
-          <p:cNvPr id="22" name="Text 20"/>
-          <p:cNvSpPr txBox="1"/>
-          <p:nvPr/>
-        </p:nvSpPr>
-        <p:spPr>
-          <a:xfrm>
-            <a:off x="6537960" y="1463040"/>
-            <a:ext cx="1920240" cy="1554480"/>
-          </a:xfrm>
-          <a:prstGeom prst="rect">
-            <a:avLst/>
-          </a:prstGeom>
-          <a:noFill/>
-          <a:ln/>
-        </p:spPr>
-        <p:txBody>
-          <a:bodyPr wrap="square" lIns="0" tIns="0" rIns="0" bIns="0" rtlCol="0" anchor="t"/>
-          <a:lstStyle/>
-          <a:p>
-            <a:pPr indent="0" marL="0">
-              <a:buNone/>
-            </a:pPr>
-            <a:r>
-              <a:rPr lang="en-US" sz="2100" b="1" i="1" dirty="0">
-                <a:solidFill>
-                  <a:srgbClr val="FFFFFF"/>
-                </a:solidFill>
-                <a:latin typeface="Cambria" pitchFamily="34" charset="0"/>
-                <a:ea typeface="Cambria" pitchFamily="34" charset="-122"/>
-                <a:cs typeface="Cambria" pitchFamily="34" charset="-120"/>
-              </a:rPr>
-              <a:t>“The LLM is only the voice. The reasoning is ours.”</a:t>
-            </a:r>
-            <a:endParaRPr lang="en-US" sz="2100" dirty="0"/>
-          </a:p>
-        </p:txBody>
-      </p:sp>
-      <p:sp>
-        <p:nvSpPr>
-          <p:cNvPr id="23" name="Text 21"/>
-          <p:cNvSpPr txBox="1"/>
-          <p:nvPr/>
-        </p:nvSpPr>
-        <p:spPr>
-          <a:xfrm>
-            <a:off x="6537960" y="3154680"/>
-            <a:ext cx="1920240" cy="1188720"/>
-          </a:xfrm>
-          <a:prstGeom prst="rect">
-            <a:avLst/>
-          </a:prstGeom>
-          <a:noFill/>
-          <a:ln/>
-        </p:spPr>
-        <p:txBody>
-          <a:bodyPr wrap="square" lIns="0" tIns="0" rIns="0" bIns="0" rtlCol="0" anchor="t"/>
-          <a:lstStyle/>
-          <a:p>
-            <a:pPr indent="0" marL="0">
-              <a:buNone/>
-            </a:pPr>
-            <a:r>
-              <a:rPr lang="en-US" sz="1400" dirty="0">
-                <a:solidFill>
-                  <a:srgbClr val="C7D2FE"/>
-                </a:solidFill>
-              </a:rPr>
-              <a:t>Unplug the API and the teacher still works: the CSP engine answers by itself.</a:t>
-            </a:r>
-            <a:endParaRPr lang="en-US" sz="1400" dirty="0"/>
-          </a:p>
-        </p:txBody>
-      </p:sp>
-      <p:sp>
-        <p:nvSpPr>
-          <p:cNvPr id="25" name="Slide Number Placeholder 0"/>
-          <p:cNvSpPr>
-            <a:spLocks noGrp="1"/>
-          </p:cNvSpPr>
-          <p:nvPr>
-            <p:ph type="sldNum" sz="quarter" idx="4294967295"/>
-          </p:nvPr>
-        </p:nvSpPr>
-        <p:spPr>
-          <a:xfrm>
-            <a:off x="8229600" y="4773168"/>
-            <a:ext cx="457200" cy="228600"/>
-          </a:xfrm>
-          <a:prstGeom prst="rect">
-            <a:avLst/>
-          </a:prstGeom>
-          <a:extLst>
-            <a:ext uri="{C572A759-6A51-4108-AA02-DFA0A04FC94B}">
-              <ma14:wrappingTextBoxFlag xmlns:ma14="http://schemas.microsoft.com/office/mac/drawingml/2011/main" val="0"/>
-            </a:ext>
-          </a:extLst>
-        </p:spPr>
-        <p:txBody>
-          <a:bodyPr/>
-          <a:lstStyle>
-            <a:lvl1pPr>
-              <a:defRPr sz="1000">
-                <a:solidFill>
-                  <a:srgbClr val="64748B"/>
-                </a:solidFill>
-              </a:defRPr>
-            </a:lvl1pPr>
-          </a:lstStyle>
+      <p:sp>
+        <p:nvSpPr>
+          <p:cNvPr id="26" name="TextBox 25"/>
+          <p:cNvSpPr txBox="1"/>
+          <p:nvPr/>
+        </p:nvSpPr>
+        <p:spPr>
+          <a:xfrm>
+            <a:off x="4572000" y="4782312"/>
+            <a:ext cx="3474720" cy="228600"/>
+          </a:xfrm>
+          <a:prstGeom prst="rect">
+            <a:avLst/>
+          </a:prstGeom>
+          <a:noFill/>
+        </p:spPr>
+        <p:txBody>
+          <a:bodyPr wrap="square" lIns="0" rIns="0" tIns="0" bIns="0" anchor="ctr">
+            <a:spAutoFit/>
+          </a:bodyPr>
+          <a:lstStyle/>
           <a:p>
             <a:pPr algn="r"/>
-            <a:fld id="{F7021451-1387-4CA6-816F-3879F97B5CBC}" type="slidenum">
-              <a:rPr b="0" lang="en-US"/>
-              <a:t>3</a:t>
-            </a:fld>
-            <a:endParaRPr lang="en-US"/>
+            <a:r>
+              <a:rPr sz="900" b="1">
+                <a:solidFill>
+                  <a:srgbClr val="2563EB"/>
+                </a:solidFill>
+              </a:rPr>
+              <a:t>Presenter: Rishikesh</a:t>
+            </a:r>
           </a:p>
         </p:txBody>
       </p:sp>
@@ -10829,7 +12347,7 @@
                   <a:srgbClr val="334155"/>
                 </a:solidFill>
               </a:rPr>
-              <a:t>X = 81 cells, D = {1..9}, C = 27 AllDifferent constraints (9 rows, 9 columns, 9 boxes). Generalised n²×n² Sudoku is NP-complete; propagation plus search solves 9×9 in milliseconds.</a:t>
+              <a:t>81 cells, digits 1–9, 27 AllDifferent constraints.</a:t>
             </a:r>
             <a:endParaRPr lang="en-US" sz="1400" dirty="0"/>
           </a:p>
@@ -10877,6 +12395,40 @@
               <a:t>4</a:t>
             </a:fld>
             <a:endParaRPr lang="en-US"/>
+          </a:p>
+        </p:txBody>
+      </p:sp>
+      <p:sp>
+        <p:nvSpPr>
+          <p:cNvPr id="26" name="TextBox 25"/>
+          <p:cNvSpPr txBox="1"/>
+          <p:nvPr/>
+        </p:nvSpPr>
+        <p:spPr>
+          <a:xfrm>
+            <a:off x="4572000" y="4782312"/>
+            <a:ext cx="3474720" cy="228600"/>
+          </a:xfrm>
+          <a:prstGeom prst="rect">
+            <a:avLst/>
+          </a:prstGeom>
+          <a:noFill/>
+        </p:spPr>
+        <p:txBody>
+          <a:bodyPr wrap="square" lIns="0" rIns="0" tIns="0" bIns="0" anchor="ctr">
+            <a:spAutoFit/>
+          </a:bodyPr>
+          <a:lstStyle/>
+          <a:p>
+            <a:pPr algn="r"/>
+            <a:r>
+              <a:rPr sz="900" b="1">
+                <a:solidFill>
+                  <a:srgbClr val="0D9488"/>
+                </a:solidFill>
+              </a:rPr>
+              <a:t>Presenter: Sawan Rana</a:t>
+            </a:r>
           </a:p>
         </p:txBody>
       </p:sp>
@@ -12299,7 +13851,7 @@
                   <a:srgbClr val="64748B"/>
                 </a:solidFill>
               </a:rPr>
-              <a:t>All in src/csp_solver.py and switchable: CSPSolver(propagation="fc" | "ac3" | "norvig", use_mrv, use_lcv). Norvig's solver is the ground truth for move checking and for the AI Teacher's verifier.</a:t>
+              <a:t>All in src/csp_solver.py. The solver's answer is the ground truth for move checking and the AI Teacher.</a:t>
             </a:r>
             <a:endParaRPr lang="en-US" sz="1300" dirty="0"/>
           </a:p>
@@ -12347,6 +13899,40 @@
               <a:t>5</a:t>
             </a:fld>
             <a:endParaRPr lang="en-US"/>
+          </a:p>
+        </p:txBody>
+      </p:sp>
+      <p:sp>
+        <p:nvSpPr>
+          <p:cNvPr id="26" name="TextBox 25"/>
+          <p:cNvSpPr txBox="1"/>
+          <p:nvPr/>
+        </p:nvSpPr>
+        <p:spPr>
+          <a:xfrm>
+            <a:off x="4572000" y="4782312"/>
+            <a:ext cx="3474720" cy="228600"/>
+          </a:xfrm>
+          <a:prstGeom prst="rect">
+            <a:avLst/>
+          </a:prstGeom>
+          <a:noFill/>
+        </p:spPr>
+        <p:txBody>
+          <a:bodyPr wrap="square" lIns="0" rIns="0" tIns="0" bIns="0" anchor="ctr">
+            <a:spAutoFit/>
+          </a:bodyPr>
+          <a:lstStyle/>
+          <a:p>
+            <a:pPr algn="r"/>
+            <a:r>
+              <a:rPr sz="900" b="1">
+                <a:solidFill>
+                  <a:srgbClr val="0D9488"/>
+                </a:solidFill>
+              </a:rPr>
+              <a:t>Presenter: Sawan Rana</a:t>
+            </a:r>
           </a:p>
         </p:txBody>
       </p:sp>
@@ -13099,7 +14685,7 @@
                   <a:srgbClr val="334155"/>
                 </a:solidFill>
               </a:rPr>
-              <a:t>the engine only uses a harder technique when the easier ones are stuck, so every hint matches the learner's level. Norvig's Rule 1 is the Naked Single and Rule 2 is the Hidden Single.</a:t>
+              <a:t>a harder technique is used only when the easier ones are stuck.</a:t>
             </a:r>
             <a:endParaRPr lang="en-US" sz="1400" dirty="0"/>
           </a:p>
@@ -13147,6 +14733,40 @@
               <a:t>6</a:t>
             </a:fld>
             <a:endParaRPr lang="en-US"/>
+          </a:p>
+        </p:txBody>
+      </p:sp>
+      <p:sp>
+        <p:nvSpPr>
+          <p:cNvPr id="26" name="TextBox 25"/>
+          <p:cNvSpPr txBox="1"/>
+          <p:nvPr/>
+        </p:nvSpPr>
+        <p:spPr>
+          <a:xfrm>
+            <a:off x="4572000" y="4782312"/>
+            <a:ext cx="3474720" cy="228600"/>
+          </a:xfrm>
+          <a:prstGeom prst="rect">
+            <a:avLst/>
+          </a:prstGeom>
+          <a:noFill/>
+        </p:spPr>
+        <p:txBody>
+          <a:bodyPr wrap="square" lIns="0" rIns="0" tIns="0" bIns="0" anchor="ctr">
+            <a:spAutoFit/>
+          </a:bodyPr>
+          <a:lstStyle/>
+          <a:p>
+            <a:pPr algn="r"/>
+            <a:r>
+              <a:rPr sz="900" b="1">
+                <a:solidFill>
+                  <a:srgbClr val="D97706"/>
+                </a:solidFill>
+              </a:rPr>
+              <a:t>Presenter: Sunil</a:t>
+            </a:r>
           </a:p>
         </p:txBody>
       </p:sp>
@@ -14141,6 +15761,40 @@
           </a:p>
         </p:txBody>
       </p:sp>
+      <p:sp>
+        <p:nvSpPr>
+          <p:cNvPr id="29" name="TextBox 28"/>
+          <p:cNvSpPr txBox="1"/>
+          <p:nvPr/>
+        </p:nvSpPr>
+        <p:spPr>
+          <a:xfrm>
+            <a:off x="4572000" y="4782312"/>
+            <a:ext cx="3474720" cy="228600"/>
+          </a:xfrm>
+          <a:prstGeom prst="rect">
+            <a:avLst/>
+          </a:prstGeom>
+          <a:noFill/>
+        </p:spPr>
+        <p:txBody>
+          <a:bodyPr wrap="square" lIns="0" rIns="0" tIns="0" bIns="0" anchor="ctr">
+            <a:spAutoFit/>
+          </a:bodyPr>
+          <a:lstStyle/>
+          <a:p>
+            <a:pPr algn="r"/>
+            <a:r>
+              <a:rPr sz="900" b="1">
+                <a:solidFill>
+                  <a:srgbClr val="7C3AED"/>
+                </a:solidFill>
+              </a:rPr>
+              <a:t>Presenter: Sathwik Teja</a:t>
+            </a:r>
+          </a:p>
+        </p:txBody>
+      </p:sp>
     </p:spTree>
   </p:cSld>
   <p:clrMapOvr>
@@ -14198,7 +15852,7 @@
                   <a:schemeClr val="tx1"/>
                 </a:solidFill>
               </a:rPr>
-              <a:t>How the AI Teacher answers a question</a:t>
+              <a:t>How the AI Teacher works</a:t>
             </a:r>
             <a:endParaRPr lang="en-US" sz="3000" dirty="0"/>
           </a:p>
@@ -15281,1655 +16935,37 @@
           </a:p>
         </p:txBody>
       </p:sp>
-    </p:spTree>
-  </p:cSld>
-  <p:clrMapOvr>
-    <a:masterClrMapping/>
-  </p:clrMapOvr>
-</p:sld>
-</file>
-
-<file path=ppt/slides/slide9.xml><?xml version="1.0" encoding="utf-8"?>
-<p:sld xmlns:a="http://schemas.openxmlformats.org/drawingml/2006/main" xmlns:r="http://schemas.openxmlformats.org/officeDocument/2006/relationships" xmlns:p="http://schemas.openxmlformats.org/presentationml/2006/main">
-  <p:cSld name="Slide 9">
-    <p:spTree>
-      <p:nvGrpSpPr>
-        <p:cNvPr id="1" name=""/>
-        <p:cNvGrpSpPr/>
-        <p:nvPr/>
-      </p:nvGrpSpPr>
-      <p:grpSpPr>
-        <a:xfrm>
-          <a:off x="0" y="0"/>
-          <a:ext cx="0" cy="0"/>
-          <a:chOff x="0" y="0"/>
-          <a:chExt cx="0" cy="0"/>
-        </a:xfrm>
-      </p:grpSpPr>
-      <p:sp>
-        <p:nvSpPr>
-          <p:cNvPr id="2" name="Text 0"/>
-          <p:cNvSpPr/>
-          <p:nvPr>
-            <p:ph idx="100" type="title" hasCustomPrompt="1"/>
-          </p:nvPr>
-        </p:nvSpPr>
-        <p:spPr>
-          <a:xfrm>
-            <a:off x="457200" y="274320"/>
-            <a:ext cx="8229600" cy="685800"/>
-          </a:xfrm>
-          <a:prstGeom prst="rect">
-            <a:avLst/>
-          </a:prstGeom>
-          <a:noFill/>
-          <a:ln/>
-        </p:spPr>
-        <p:txBody>
-          <a:bodyPr wrap="square" lIns="0" tIns="0" rIns="0" bIns="0" rtlCol="0" anchor="ctr"/>
-          <a:lstStyle/>
-          <a:p>
-            <a:pPr indent="0" marL="0">
-              <a:buNone/>
-            </a:pPr>
-            <a:r>
-              <a:rPr lang="en-US" sz="3000" b="1" dirty="0">
-                <a:solidFill>
-                  <a:schemeClr val="tx1"/>
-                </a:solidFill>
-              </a:rPr>
-              <a:t>Why neuro-symbolic beats either half</a:t>
-            </a:r>
-            <a:endParaRPr lang="en-US" sz="3000" dirty="0"/>
-          </a:p>
-        </p:txBody>
-      </p:sp>
-      <p:graphicFrame>
-        <p:nvGraphicFramePr>
-          <p:cNvPr id="10" name="comparison"/>
-          <p:cNvGraphicFramePr>
-            <a:graphicFrameLocks noGrp="1"/>
-          </p:cNvGraphicFramePr>
-          <p:nvPr>
-            <p:extLst>
-              <p:ext uri="{D42A27DB-BD31-4B8C-83A1-F6EECF244321}">
-                <p14:modId xmlns:p14="http://schemas.microsoft.com/office/powerpoint/2010/main" val="1579011935"/>
-              </p:ext>
-            </p:extLst>
-          </p:nvPr>
-        </p:nvGraphicFramePr>
-        <p:xfrm>
-          <a:off x="457200" y="1234440"/>
-          <a:ext cx="8229600" cy="914400"/>
-        </p:xfrm>
-        <a:graphic>
-          <a:graphicData uri="http://schemas.openxmlformats.org/drawingml/2006/table">
-            <a:tbl>
-              <a:tblPr/>
-              <a:tblGrid>
-                <a:gridCol w="3291840"/>
-                <a:gridCol w="1645920"/>
-                <a:gridCol w="1645920"/>
-                <a:gridCol w="1645920"/>
-              </a:tblGrid>
-              <a:tr h="457200">
-                <a:tc>
-                  <a:txBody>
-                    <a:bodyPr/>
-                    <a:lstStyle/>
-                    <a:p>
-                      <a:pPr algn="ctr" indent="0" marL="0">
-                        <a:buNone/>
-                      </a:pPr>
-                      <a:r>
-                        <a:rPr lang="en-US" sz="1400" b="1" dirty="0">
-                          <a:solidFill>
-                            <a:srgbClr val="FFFFFF"/>
-                          </a:solidFill>
-                        </a:rPr>
-                        <a:t>Criterion</a:t>
-                      </a:r>
-                      <a:endParaRPr lang="en-US" sz="1400" dirty="0"/>
-                    </a:p>
-                  </a:txBody>
-                  <a:tcPr marL="109728" marR="109728" marT="0" marB="0" anchor="ctr">
-                    <a:lnL w="6350" cap="flat" cmpd="sng" algn="ctr">
-                      <a:solidFill>
-                        <a:srgbClr val="CBD5E1"/>
-                      </a:solidFill>
-                      <a:prstDash val="solid"/>
-                      <a:round/>
-                      <a:headEnd type="none" w="med" len="med"/>
-                      <a:tailEnd type="none" w="med" len="med"/>
-                    </a:lnL>
-                    <a:lnR w="6350" cap="flat" cmpd="sng" algn="ctr">
-                      <a:solidFill>
-                        <a:srgbClr val="CBD5E1"/>
-                      </a:solidFill>
-                      <a:prstDash val="solid"/>
-                      <a:round/>
-                      <a:headEnd type="none" w="med" len="med"/>
-                      <a:tailEnd type="none" w="med" len="med"/>
-                    </a:lnR>
-                    <a:lnT w="6350" cap="flat" cmpd="sng" algn="ctr">
-                      <a:solidFill>
-                        <a:srgbClr val="CBD5E1"/>
-                      </a:solidFill>
-                      <a:prstDash val="solid"/>
-                      <a:round/>
-                      <a:headEnd type="none" w="med" len="med"/>
-                      <a:tailEnd type="none" w="med" len="med"/>
-                    </a:lnT>
-                    <a:lnB w="6350" cap="flat" cmpd="sng" algn="ctr">
-                      <a:solidFill>
-                        <a:srgbClr val="CBD5E1"/>
-                      </a:solidFill>
-                      <a:prstDash val="solid"/>
-                      <a:round/>
-                      <a:headEnd type="none" w="med" len="med"/>
-                      <a:tailEnd type="none" w="med" len="med"/>
-                    </a:lnB>
-                    <a:solidFill>
-                      <a:srgbClr val="0F172A"/>
-                    </a:solidFill>
-                  </a:tcPr>
-                </a:tc>
-                <a:tc>
-                  <a:txBody>
-                    <a:bodyPr/>
-                    <a:lstStyle/>
-                    <a:p>
-                      <a:pPr algn="ctr" indent="0" marL="0">
-                        <a:buNone/>
-                      </a:pPr>
-                      <a:r>
-                        <a:rPr lang="en-US" sz="1400" b="1" dirty="0">
-                          <a:solidFill>
-                            <a:srgbClr val="FFFFFF"/>
-                          </a:solidFill>
-                        </a:rPr>
-                        <a:t>Pure solver</a:t>
-                      </a:r>
-                      <a:endParaRPr lang="en-US" sz="1400" dirty="0"/>
-                    </a:p>
-                  </a:txBody>
-                  <a:tcPr marL="109728" marR="109728" marT="0" marB="0" anchor="ctr">
-                    <a:lnL w="6350" cap="flat" cmpd="sng" algn="ctr">
-                      <a:solidFill>
-                        <a:srgbClr val="CBD5E1"/>
-                      </a:solidFill>
-                      <a:prstDash val="solid"/>
-                      <a:round/>
-                      <a:headEnd type="none" w="med" len="med"/>
-                      <a:tailEnd type="none" w="med" len="med"/>
-                    </a:lnL>
-                    <a:lnR w="6350" cap="flat" cmpd="sng" algn="ctr">
-                      <a:solidFill>
-                        <a:srgbClr val="CBD5E1"/>
-                      </a:solidFill>
-                      <a:prstDash val="solid"/>
-                      <a:round/>
-                      <a:headEnd type="none" w="med" len="med"/>
-                      <a:tailEnd type="none" w="med" len="med"/>
-                    </a:lnR>
-                    <a:lnT w="6350" cap="flat" cmpd="sng" algn="ctr">
-                      <a:solidFill>
-                        <a:srgbClr val="CBD5E1"/>
-                      </a:solidFill>
-                      <a:prstDash val="solid"/>
-                      <a:round/>
-                      <a:headEnd type="none" w="med" len="med"/>
-                      <a:tailEnd type="none" w="med" len="med"/>
-                    </a:lnT>
-                    <a:lnB w="6350" cap="flat" cmpd="sng" algn="ctr">
-                      <a:solidFill>
-                        <a:srgbClr val="CBD5E1"/>
-                      </a:solidFill>
-                      <a:prstDash val="solid"/>
-                      <a:round/>
-                      <a:headEnd type="none" w="med" len="med"/>
-                      <a:tailEnd type="none" w="med" len="med"/>
-                    </a:lnB>
-                    <a:solidFill>
-                      <a:srgbClr val="0F172A"/>
-                    </a:solidFill>
-                  </a:tcPr>
-                </a:tc>
-                <a:tc>
-                  <a:txBody>
-                    <a:bodyPr/>
-                    <a:lstStyle/>
-                    <a:p>
-                      <a:pPr algn="ctr" indent="0" marL="0">
-                        <a:buNone/>
-                      </a:pPr>
-                      <a:r>
-                        <a:rPr lang="en-US" sz="1400" b="1" dirty="0">
-                          <a:solidFill>
-                            <a:srgbClr val="FFFFFF"/>
-                          </a:solidFill>
-                        </a:rPr>
-                        <a:t>Pure LLM chatbot</a:t>
-                      </a:r>
-                      <a:endParaRPr lang="en-US" sz="1400" dirty="0"/>
-                    </a:p>
-                  </a:txBody>
-                  <a:tcPr marL="109728" marR="109728" marT="0" marB="0" anchor="ctr">
-                    <a:lnL w="6350" cap="flat" cmpd="sng" algn="ctr">
-                      <a:solidFill>
-                        <a:srgbClr val="CBD5E1"/>
-                      </a:solidFill>
-                      <a:prstDash val="solid"/>
-                      <a:round/>
-                      <a:headEnd type="none" w="med" len="med"/>
-                      <a:tailEnd type="none" w="med" len="med"/>
-                    </a:lnL>
-                    <a:lnR w="6350" cap="flat" cmpd="sng" algn="ctr">
-                      <a:solidFill>
-                        <a:srgbClr val="CBD5E1"/>
-                      </a:solidFill>
-                      <a:prstDash val="solid"/>
-                      <a:round/>
-                      <a:headEnd type="none" w="med" len="med"/>
-                      <a:tailEnd type="none" w="med" len="med"/>
-                    </a:lnR>
-                    <a:lnT w="6350" cap="flat" cmpd="sng" algn="ctr">
-                      <a:solidFill>
-                        <a:srgbClr val="CBD5E1"/>
-                      </a:solidFill>
-                      <a:prstDash val="solid"/>
-                      <a:round/>
-                      <a:headEnd type="none" w="med" len="med"/>
-                      <a:tailEnd type="none" w="med" len="med"/>
-                    </a:lnT>
-                    <a:lnB w="6350" cap="flat" cmpd="sng" algn="ctr">
-                      <a:solidFill>
-                        <a:srgbClr val="CBD5E1"/>
-                      </a:solidFill>
-                      <a:prstDash val="solid"/>
-                      <a:round/>
-                      <a:headEnd type="none" w="med" len="med"/>
-                      <a:tailEnd type="none" w="med" len="med"/>
-                    </a:lnB>
-                    <a:solidFill>
-                      <a:srgbClr val="0F172A"/>
-                    </a:solidFill>
-                  </a:tcPr>
-                </a:tc>
-                <a:tc>
-                  <a:txBody>
-                    <a:bodyPr/>
-                    <a:lstStyle/>
-                    <a:p>
-                      <a:pPr algn="ctr" indent="0" marL="0">
-                        <a:buNone/>
-                      </a:pPr>
-                      <a:r>
-                        <a:rPr lang="en-US" sz="1400" b="1" dirty="0">
-                          <a:solidFill>
-                            <a:srgbClr val="FFFFFF"/>
-                          </a:solidFill>
-                        </a:rPr>
-                        <a:t>Our AI Teacher</a:t>
-                      </a:r>
-                      <a:endParaRPr lang="en-US" sz="1400" dirty="0"/>
-                    </a:p>
-                  </a:txBody>
-                  <a:tcPr marL="109728" marR="109728" marT="0" marB="0" anchor="ctr">
-                    <a:lnL w="6350" cap="flat" cmpd="sng" algn="ctr">
-                      <a:solidFill>
-                        <a:srgbClr val="CBD5E1"/>
-                      </a:solidFill>
-                      <a:prstDash val="solid"/>
-                      <a:round/>
-                      <a:headEnd type="none" w="med" len="med"/>
-                      <a:tailEnd type="none" w="med" len="med"/>
-                    </a:lnL>
-                    <a:lnR w="6350" cap="flat" cmpd="sng" algn="ctr">
-                      <a:solidFill>
-                        <a:srgbClr val="CBD5E1"/>
-                      </a:solidFill>
-                      <a:prstDash val="solid"/>
-                      <a:round/>
-                      <a:headEnd type="none" w="med" len="med"/>
-                      <a:tailEnd type="none" w="med" len="med"/>
-                    </a:lnR>
-                    <a:lnT w="6350" cap="flat" cmpd="sng" algn="ctr">
-                      <a:solidFill>
-                        <a:srgbClr val="CBD5E1"/>
-                      </a:solidFill>
-                      <a:prstDash val="solid"/>
-                      <a:round/>
-                      <a:headEnd type="none" w="med" len="med"/>
-                      <a:tailEnd type="none" w="med" len="med"/>
-                    </a:lnT>
-                    <a:lnB w="6350" cap="flat" cmpd="sng" algn="ctr">
-                      <a:solidFill>
-                        <a:srgbClr val="CBD5E1"/>
-                      </a:solidFill>
-                      <a:prstDash val="solid"/>
-                      <a:round/>
-                      <a:headEnd type="none" w="med" len="med"/>
-                      <a:tailEnd type="none" w="med" len="med"/>
-                    </a:lnB>
-                    <a:solidFill>
-                      <a:srgbClr val="0D9488"/>
-                    </a:solidFill>
-                  </a:tcPr>
-                </a:tc>
-              </a:tr>
-              <a:tr h="457200">
-                <a:tc>
-                  <a:txBody>
-                    <a:bodyPr/>
-                    <a:lstStyle/>
-                    <a:p>
-                      <a:pPr indent="0" marL="0">
-                        <a:buNone/>
-                      </a:pPr>
-                      <a:r>
-                        <a:rPr lang="en-US" sz="1500" b="1" dirty="0">
-                          <a:solidFill>
-                            <a:srgbClr val="0F172A"/>
-                          </a:solidFill>
-                        </a:rPr>
-                        <a:t>Logically correct moves</a:t>
-                      </a:r>
-                      <a:endParaRPr lang="en-US" sz="1500" dirty="0"/>
-                    </a:p>
-                  </a:txBody>
-                  <a:tcPr marL="109728" marR="109728" marT="0" marB="0" anchor="ctr">
-                    <a:lnL w="6350" cap="flat" cmpd="sng" algn="ctr">
-                      <a:solidFill>
-                        <a:srgbClr val="CBD5E1"/>
-                      </a:solidFill>
-                      <a:prstDash val="solid"/>
-                      <a:round/>
-                      <a:headEnd type="none" w="med" len="med"/>
-                      <a:tailEnd type="none" w="med" len="med"/>
-                    </a:lnL>
-                    <a:lnR w="6350" cap="flat" cmpd="sng" algn="ctr">
-                      <a:solidFill>
-                        <a:srgbClr val="CBD5E1"/>
-                      </a:solidFill>
-                      <a:prstDash val="solid"/>
-                      <a:round/>
-                      <a:headEnd type="none" w="med" len="med"/>
-                      <a:tailEnd type="none" w="med" len="med"/>
-                    </a:lnR>
-                    <a:lnT w="6350" cap="flat" cmpd="sng" algn="ctr">
-                      <a:solidFill>
-                        <a:srgbClr val="CBD5E1"/>
-                      </a:solidFill>
-                      <a:prstDash val="solid"/>
-                      <a:round/>
-                      <a:headEnd type="none" w="med" len="med"/>
-                      <a:tailEnd type="none" w="med" len="med"/>
-                    </a:lnT>
-                    <a:lnB w="6350" cap="flat" cmpd="sng" algn="ctr">
-                      <a:solidFill>
-                        <a:srgbClr val="CBD5E1"/>
-                      </a:solidFill>
-                      <a:prstDash val="solid"/>
-                      <a:round/>
-                      <a:headEnd type="none" w="med" len="med"/>
-                      <a:tailEnd type="none" w="med" len="med"/>
-                    </a:lnB>
-                    <a:solidFill>
-                      <a:srgbClr val="EEF2F7"/>
-                    </a:solidFill>
-                  </a:tcPr>
-                </a:tc>
-                <a:tc>
-                  <a:txBody>
-                    <a:bodyPr/>
-                    <a:lstStyle/>
-                    <a:p>
-                      <a:pPr algn="ctr" indent="0" marL="0">
-                        <a:buNone/>
-                      </a:pPr>
-                      <a:r>
-                        <a:rPr lang="en-US" sz="1500" dirty="0">
-                          <a:solidFill>
-                            <a:srgbClr val="334155"/>
-                          </a:solidFill>
-                        </a:rPr>
-                        <a:t>Yes</a:t>
-                      </a:r>
-                      <a:endParaRPr lang="en-US" sz="1500" dirty="0"/>
-                    </a:p>
-                  </a:txBody>
-                  <a:tcPr marL="109728" marR="109728" marT="0" marB="0" anchor="ctr">
-                    <a:lnL w="6350" cap="flat" cmpd="sng" algn="ctr">
-                      <a:solidFill>
-                        <a:srgbClr val="CBD5E1"/>
-                      </a:solidFill>
-                      <a:prstDash val="solid"/>
-                      <a:round/>
-                      <a:headEnd type="none" w="med" len="med"/>
-                      <a:tailEnd type="none" w="med" len="med"/>
-                    </a:lnL>
-                    <a:lnR w="6350" cap="flat" cmpd="sng" algn="ctr">
-                      <a:solidFill>
-                        <a:srgbClr val="CBD5E1"/>
-                      </a:solidFill>
-                      <a:prstDash val="solid"/>
-                      <a:round/>
-                      <a:headEnd type="none" w="med" len="med"/>
-                      <a:tailEnd type="none" w="med" len="med"/>
-                    </a:lnR>
-                    <a:lnT w="6350" cap="flat" cmpd="sng" algn="ctr">
-                      <a:solidFill>
-                        <a:srgbClr val="CBD5E1"/>
-                      </a:solidFill>
-                      <a:prstDash val="solid"/>
-                      <a:round/>
-                      <a:headEnd type="none" w="med" len="med"/>
-                      <a:tailEnd type="none" w="med" len="med"/>
-                    </a:lnT>
-                    <a:lnB w="6350" cap="flat" cmpd="sng" algn="ctr">
-                      <a:solidFill>
-                        <a:srgbClr val="CBD5E1"/>
-                      </a:solidFill>
-                      <a:prstDash val="solid"/>
-                      <a:round/>
-                      <a:headEnd type="none" w="med" len="med"/>
-                      <a:tailEnd type="none" w="med" len="med"/>
-                    </a:lnB>
-                    <a:solidFill>
-                      <a:srgbClr val="EEF2F7"/>
-                    </a:solidFill>
-                  </a:tcPr>
-                </a:tc>
-                <a:tc>
-                  <a:txBody>
-                    <a:bodyPr/>
-                    <a:lstStyle/>
-                    <a:p>
-                      <a:pPr algn="ctr" indent="0" marL="0">
-                        <a:buNone/>
-                      </a:pPr>
-                      <a:r>
-                        <a:rPr lang="en-US" sz="1500" dirty="0">
-                          <a:solidFill>
-                            <a:srgbClr val="E11D48"/>
-                          </a:solidFill>
-                        </a:rPr>
-                        <a:t>Often wrong</a:t>
-                      </a:r>
-                      <a:endParaRPr lang="en-US" sz="1500" dirty="0"/>
-                    </a:p>
-                  </a:txBody>
-                  <a:tcPr marL="109728" marR="109728" marT="0" marB="0" anchor="ctr">
-                    <a:lnL w="6350" cap="flat" cmpd="sng" algn="ctr">
-                      <a:solidFill>
-                        <a:srgbClr val="CBD5E1"/>
-                      </a:solidFill>
-                      <a:prstDash val="solid"/>
-                      <a:round/>
-                      <a:headEnd type="none" w="med" len="med"/>
-                      <a:tailEnd type="none" w="med" len="med"/>
-                    </a:lnL>
-                    <a:lnR w="6350" cap="flat" cmpd="sng" algn="ctr">
-                      <a:solidFill>
-                        <a:srgbClr val="CBD5E1"/>
-                      </a:solidFill>
-                      <a:prstDash val="solid"/>
-                      <a:round/>
-                      <a:headEnd type="none" w="med" len="med"/>
-                      <a:tailEnd type="none" w="med" len="med"/>
-                    </a:lnR>
-                    <a:lnT w="6350" cap="flat" cmpd="sng" algn="ctr">
-                      <a:solidFill>
-                        <a:srgbClr val="CBD5E1"/>
-                      </a:solidFill>
-                      <a:prstDash val="solid"/>
-                      <a:round/>
-                      <a:headEnd type="none" w="med" len="med"/>
-                      <a:tailEnd type="none" w="med" len="med"/>
-                    </a:lnT>
-                    <a:lnB w="6350" cap="flat" cmpd="sng" algn="ctr">
-                      <a:solidFill>
-                        <a:srgbClr val="CBD5E1"/>
-                      </a:solidFill>
-                      <a:prstDash val="solid"/>
-                      <a:round/>
-                      <a:headEnd type="none" w="med" len="med"/>
-                      <a:tailEnd type="none" w="med" len="med"/>
-                    </a:lnB>
-                    <a:solidFill>
-                      <a:srgbClr val="EEF2F7"/>
-                    </a:solidFill>
-                  </a:tcPr>
-                </a:tc>
-                <a:tc>
-                  <a:txBody>
-                    <a:bodyPr/>
-                    <a:lstStyle/>
-                    <a:p>
-                      <a:pPr algn="ctr" indent="0" marL="0">
-                        <a:buNone/>
-                      </a:pPr>
-                      <a:r>
-                        <a:rPr lang="en-US" sz="1500" b="1" dirty="0">
-                          <a:solidFill>
-                            <a:srgbClr val="0D9488"/>
-                          </a:solidFill>
-                        </a:rPr>
-                        <a:t>Yes</a:t>
-                      </a:r>
-                      <a:endParaRPr lang="en-US" sz="1500" dirty="0"/>
-                    </a:p>
-                  </a:txBody>
-                  <a:tcPr marL="109728" marR="109728" marT="0" marB="0" anchor="ctr">
-                    <a:lnL w="6350" cap="flat" cmpd="sng" algn="ctr">
-                      <a:solidFill>
-                        <a:srgbClr val="CBD5E1"/>
-                      </a:solidFill>
-                      <a:prstDash val="solid"/>
-                      <a:round/>
-                      <a:headEnd type="none" w="med" len="med"/>
-                      <a:tailEnd type="none" w="med" len="med"/>
-                    </a:lnL>
-                    <a:lnR w="6350" cap="flat" cmpd="sng" algn="ctr">
-                      <a:solidFill>
-                        <a:srgbClr val="CBD5E1"/>
-                      </a:solidFill>
-                      <a:prstDash val="solid"/>
-                      <a:round/>
-                      <a:headEnd type="none" w="med" len="med"/>
-                      <a:tailEnd type="none" w="med" len="med"/>
-                    </a:lnR>
-                    <a:lnT w="6350" cap="flat" cmpd="sng" algn="ctr">
-                      <a:solidFill>
-                        <a:srgbClr val="CBD5E1"/>
-                      </a:solidFill>
-                      <a:prstDash val="solid"/>
-                      <a:round/>
-                      <a:headEnd type="none" w="med" len="med"/>
-                      <a:tailEnd type="none" w="med" len="med"/>
-                    </a:lnT>
-                    <a:lnB w="6350" cap="flat" cmpd="sng" algn="ctr">
-                      <a:solidFill>
-                        <a:srgbClr val="CBD5E1"/>
-                      </a:solidFill>
-                      <a:prstDash val="solid"/>
-                      <a:round/>
-                      <a:headEnd type="none" w="med" len="med"/>
-                      <a:tailEnd type="none" w="med" len="med"/>
-                    </a:lnB>
-                    <a:solidFill>
-                      <a:srgbClr val="CCFBF1"/>
-                    </a:solidFill>
-                  </a:tcPr>
-                </a:tc>
-              </a:tr>
-              <a:tr h="457200">
-                <a:tc>
-                  <a:txBody>
-                    <a:bodyPr/>
-                    <a:lstStyle/>
-                    <a:p>
-                      <a:pPr indent="0" marL="0">
-                        <a:buNone/>
-                      </a:pPr>
-                      <a:r>
-                        <a:rPr lang="en-US" sz="1500" b="1" dirty="0">
-                          <a:solidFill>
-                            <a:srgbClr val="0F172A"/>
-                          </a:solidFill>
-                        </a:rPr>
-                        <a:t>Explains like a human teacher</a:t>
-                      </a:r>
-                      <a:endParaRPr lang="en-US" sz="1500" dirty="0"/>
-                    </a:p>
-                  </a:txBody>
-                  <a:tcPr marL="109728" marR="109728" marT="0" marB="0" anchor="ctr">
-                    <a:lnL w="6350" cap="flat" cmpd="sng" algn="ctr">
-                      <a:solidFill>
-                        <a:srgbClr val="CBD5E1"/>
-                      </a:solidFill>
-                      <a:prstDash val="solid"/>
-                      <a:round/>
-                      <a:headEnd type="none" w="med" len="med"/>
-                      <a:tailEnd type="none" w="med" len="med"/>
-                    </a:lnL>
-                    <a:lnR w="6350" cap="flat" cmpd="sng" algn="ctr">
-                      <a:solidFill>
-                        <a:srgbClr val="CBD5E1"/>
-                      </a:solidFill>
-                      <a:prstDash val="solid"/>
-                      <a:round/>
-                      <a:headEnd type="none" w="med" len="med"/>
-                      <a:tailEnd type="none" w="med" len="med"/>
-                    </a:lnR>
-                    <a:lnT w="6350" cap="flat" cmpd="sng" algn="ctr">
-                      <a:solidFill>
-                        <a:srgbClr val="CBD5E1"/>
-                      </a:solidFill>
-                      <a:prstDash val="solid"/>
-                      <a:round/>
-                      <a:headEnd type="none" w="med" len="med"/>
-                      <a:tailEnd type="none" w="med" len="med"/>
-                    </a:lnT>
-                    <a:lnB w="6350" cap="flat" cmpd="sng" algn="ctr">
-                      <a:solidFill>
-                        <a:srgbClr val="CBD5E1"/>
-                      </a:solidFill>
-                      <a:prstDash val="solid"/>
-                      <a:round/>
-                      <a:headEnd type="none" w="med" len="med"/>
-                      <a:tailEnd type="none" w="med" len="med"/>
-                    </a:lnB>
-                    <a:solidFill>
-                      <a:srgbClr val="FFFFFF"/>
-                    </a:solidFill>
-                  </a:tcPr>
-                </a:tc>
-                <a:tc>
-                  <a:txBody>
-                    <a:bodyPr/>
-                    <a:lstStyle/>
-                    <a:p>
-                      <a:pPr algn="ctr" indent="0" marL="0">
-                        <a:buNone/>
-                      </a:pPr>
-                      <a:r>
-                        <a:rPr lang="en-US" sz="1500" dirty="0">
-                          <a:solidFill>
-                            <a:srgbClr val="E11D48"/>
-                          </a:solidFill>
-                        </a:rPr>
-                        <a:t>No</a:t>
-                      </a:r>
-                      <a:endParaRPr lang="en-US" sz="1500" dirty="0"/>
-                    </a:p>
-                  </a:txBody>
-                  <a:tcPr marL="109728" marR="109728" marT="0" marB="0" anchor="ctr">
-                    <a:lnL w="6350" cap="flat" cmpd="sng" algn="ctr">
-                      <a:solidFill>
-                        <a:srgbClr val="CBD5E1"/>
-                      </a:solidFill>
-                      <a:prstDash val="solid"/>
-                      <a:round/>
-                      <a:headEnd type="none" w="med" len="med"/>
-                      <a:tailEnd type="none" w="med" len="med"/>
-                    </a:lnL>
-                    <a:lnR w="6350" cap="flat" cmpd="sng" algn="ctr">
-                      <a:solidFill>
-                        <a:srgbClr val="CBD5E1"/>
-                      </a:solidFill>
-                      <a:prstDash val="solid"/>
-                      <a:round/>
-                      <a:headEnd type="none" w="med" len="med"/>
-                      <a:tailEnd type="none" w="med" len="med"/>
-                    </a:lnR>
-                    <a:lnT w="6350" cap="flat" cmpd="sng" algn="ctr">
-                      <a:solidFill>
-                        <a:srgbClr val="CBD5E1"/>
-                      </a:solidFill>
-                      <a:prstDash val="solid"/>
-                      <a:round/>
-                      <a:headEnd type="none" w="med" len="med"/>
-                      <a:tailEnd type="none" w="med" len="med"/>
-                    </a:lnT>
-                    <a:lnB w="6350" cap="flat" cmpd="sng" algn="ctr">
-                      <a:solidFill>
-                        <a:srgbClr val="CBD5E1"/>
-                      </a:solidFill>
-                      <a:prstDash val="solid"/>
-                      <a:round/>
-                      <a:headEnd type="none" w="med" len="med"/>
-                      <a:tailEnd type="none" w="med" len="med"/>
-                    </a:lnB>
-                    <a:solidFill>
-                      <a:srgbClr val="FFFFFF"/>
-                    </a:solidFill>
-                  </a:tcPr>
-                </a:tc>
-                <a:tc>
-                  <a:txBody>
-                    <a:bodyPr/>
-                    <a:lstStyle/>
-                    <a:p>
-                      <a:pPr algn="ctr" indent="0" marL="0">
-                        <a:buNone/>
-                      </a:pPr>
-                      <a:r>
-                        <a:rPr lang="en-US" sz="1500" dirty="0">
-                          <a:solidFill>
-                            <a:srgbClr val="334155"/>
-                          </a:solidFill>
-                        </a:rPr>
-                        <a:t>Yes</a:t>
-                      </a:r>
-                      <a:endParaRPr lang="en-US" sz="1500" dirty="0"/>
-                    </a:p>
-                  </a:txBody>
-                  <a:tcPr marL="109728" marR="109728" marT="0" marB="0" anchor="ctr">
-                    <a:lnL w="6350" cap="flat" cmpd="sng" algn="ctr">
-                      <a:solidFill>
-                        <a:srgbClr val="CBD5E1"/>
-                      </a:solidFill>
-                      <a:prstDash val="solid"/>
-                      <a:round/>
-                      <a:headEnd type="none" w="med" len="med"/>
-                      <a:tailEnd type="none" w="med" len="med"/>
-                    </a:lnL>
-                    <a:lnR w="6350" cap="flat" cmpd="sng" algn="ctr">
-                      <a:solidFill>
-                        <a:srgbClr val="CBD5E1"/>
-                      </a:solidFill>
-                      <a:prstDash val="solid"/>
-                      <a:round/>
-                      <a:headEnd type="none" w="med" len="med"/>
-                      <a:tailEnd type="none" w="med" len="med"/>
-                    </a:lnR>
-                    <a:lnT w="6350" cap="flat" cmpd="sng" algn="ctr">
-                      <a:solidFill>
-                        <a:srgbClr val="CBD5E1"/>
-                      </a:solidFill>
-                      <a:prstDash val="solid"/>
-                      <a:round/>
-                      <a:headEnd type="none" w="med" len="med"/>
-                      <a:tailEnd type="none" w="med" len="med"/>
-                    </a:lnT>
-                    <a:lnB w="6350" cap="flat" cmpd="sng" algn="ctr">
-                      <a:solidFill>
-                        <a:srgbClr val="CBD5E1"/>
-                      </a:solidFill>
-                      <a:prstDash val="solid"/>
-                      <a:round/>
-                      <a:headEnd type="none" w="med" len="med"/>
-                      <a:tailEnd type="none" w="med" len="med"/>
-                    </a:lnB>
-                    <a:solidFill>
-                      <a:srgbClr val="FFFFFF"/>
-                    </a:solidFill>
-                  </a:tcPr>
-                </a:tc>
-                <a:tc>
-                  <a:txBody>
-                    <a:bodyPr/>
-                    <a:lstStyle/>
-                    <a:p>
-                      <a:pPr algn="ctr" indent="0" marL="0">
-                        <a:buNone/>
-                      </a:pPr>
-                      <a:r>
-                        <a:rPr lang="en-US" sz="1500" b="1" dirty="0">
-                          <a:solidFill>
-                            <a:srgbClr val="0D9488"/>
-                          </a:solidFill>
-                        </a:rPr>
-                        <a:t>Yes</a:t>
-                      </a:r>
-                      <a:endParaRPr lang="en-US" sz="1500" dirty="0"/>
-                    </a:p>
-                  </a:txBody>
-                  <a:tcPr marL="109728" marR="109728" marT="0" marB="0" anchor="ctr">
-                    <a:lnL w="6350" cap="flat" cmpd="sng" algn="ctr">
-                      <a:solidFill>
-                        <a:srgbClr val="CBD5E1"/>
-                      </a:solidFill>
-                      <a:prstDash val="solid"/>
-                      <a:round/>
-                      <a:headEnd type="none" w="med" len="med"/>
-                      <a:tailEnd type="none" w="med" len="med"/>
-                    </a:lnL>
-                    <a:lnR w="6350" cap="flat" cmpd="sng" algn="ctr">
-                      <a:solidFill>
-                        <a:srgbClr val="CBD5E1"/>
-                      </a:solidFill>
-                      <a:prstDash val="solid"/>
-                      <a:round/>
-                      <a:headEnd type="none" w="med" len="med"/>
-                      <a:tailEnd type="none" w="med" len="med"/>
-                    </a:lnR>
-                    <a:lnT w="6350" cap="flat" cmpd="sng" algn="ctr">
-                      <a:solidFill>
-                        <a:srgbClr val="CBD5E1"/>
-                      </a:solidFill>
-                      <a:prstDash val="solid"/>
-                      <a:round/>
-                      <a:headEnd type="none" w="med" len="med"/>
-                      <a:tailEnd type="none" w="med" len="med"/>
-                    </a:lnT>
-                    <a:lnB w="6350" cap="flat" cmpd="sng" algn="ctr">
-                      <a:solidFill>
-                        <a:srgbClr val="CBD5E1"/>
-                      </a:solidFill>
-                      <a:prstDash val="solid"/>
-                      <a:round/>
-                      <a:headEnd type="none" w="med" len="med"/>
-                      <a:tailEnd type="none" w="med" len="med"/>
-                    </a:lnB>
-                    <a:solidFill>
-                      <a:srgbClr val="CCFBF1"/>
-                    </a:solidFill>
-                  </a:tcPr>
-                </a:tc>
-              </a:tr>
-              <a:tr h="457200">
-                <a:tc>
-                  <a:txBody>
-                    <a:bodyPr/>
-                    <a:lstStyle/>
-                    <a:p>
-                      <a:pPr indent="0" marL="0">
-                        <a:buNone/>
-                      </a:pPr>
-                      <a:r>
-                        <a:rPr lang="en-US" sz="1500" b="1" dirty="0">
-                          <a:solidFill>
-                            <a:srgbClr val="0F172A"/>
-                          </a:solidFill>
-                        </a:rPr>
-                        <a:t>Answers free-form questions</a:t>
-                      </a:r>
-                      <a:endParaRPr lang="en-US" sz="1500" dirty="0"/>
-                    </a:p>
-                  </a:txBody>
-                  <a:tcPr marL="109728" marR="109728" marT="0" marB="0" anchor="ctr">
-                    <a:lnL w="6350" cap="flat" cmpd="sng" algn="ctr">
-                      <a:solidFill>
-                        <a:srgbClr val="CBD5E1"/>
-                      </a:solidFill>
-                      <a:prstDash val="solid"/>
-                      <a:round/>
-                      <a:headEnd type="none" w="med" len="med"/>
-                      <a:tailEnd type="none" w="med" len="med"/>
-                    </a:lnL>
-                    <a:lnR w="6350" cap="flat" cmpd="sng" algn="ctr">
-                      <a:solidFill>
-                        <a:srgbClr val="CBD5E1"/>
-                      </a:solidFill>
-                      <a:prstDash val="solid"/>
-                      <a:round/>
-                      <a:headEnd type="none" w="med" len="med"/>
-                      <a:tailEnd type="none" w="med" len="med"/>
-                    </a:lnR>
-                    <a:lnT w="6350" cap="flat" cmpd="sng" algn="ctr">
-                      <a:solidFill>
-                        <a:srgbClr val="CBD5E1"/>
-                      </a:solidFill>
-                      <a:prstDash val="solid"/>
-                      <a:round/>
-                      <a:headEnd type="none" w="med" len="med"/>
-                      <a:tailEnd type="none" w="med" len="med"/>
-                    </a:lnT>
-                    <a:lnB w="6350" cap="flat" cmpd="sng" algn="ctr">
-                      <a:solidFill>
-                        <a:srgbClr val="CBD5E1"/>
-                      </a:solidFill>
-                      <a:prstDash val="solid"/>
-                      <a:round/>
-                      <a:headEnd type="none" w="med" len="med"/>
-                      <a:tailEnd type="none" w="med" len="med"/>
-                    </a:lnB>
-                    <a:solidFill>
-                      <a:srgbClr val="EEF2F7"/>
-                    </a:solidFill>
-                  </a:tcPr>
-                </a:tc>
-                <a:tc>
-                  <a:txBody>
-                    <a:bodyPr/>
-                    <a:lstStyle/>
-                    <a:p>
-                      <a:pPr algn="ctr" indent="0" marL="0">
-                        <a:buNone/>
-                      </a:pPr>
-                      <a:r>
-                        <a:rPr lang="en-US" sz="1500" dirty="0">
-                          <a:solidFill>
-                            <a:srgbClr val="E11D48"/>
-                          </a:solidFill>
-                        </a:rPr>
-                        <a:t>No</a:t>
-                      </a:r>
-                      <a:endParaRPr lang="en-US" sz="1500" dirty="0"/>
-                    </a:p>
-                  </a:txBody>
-                  <a:tcPr marL="109728" marR="109728" marT="0" marB="0" anchor="ctr">
-                    <a:lnL w="6350" cap="flat" cmpd="sng" algn="ctr">
-                      <a:solidFill>
-                        <a:srgbClr val="CBD5E1"/>
-                      </a:solidFill>
-                      <a:prstDash val="solid"/>
-                      <a:round/>
-                      <a:headEnd type="none" w="med" len="med"/>
-                      <a:tailEnd type="none" w="med" len="med"/>
-                    </a:lnL>
-                    <a:lnR w="6350" cap="flat" cmpd="sng" algn="ctr">
-                      <a:solidFill>
-                        <a:srgbClr val="CBD5E1"/>
-                      </a:solidFill>
-                      <a:prstDash val="solid"/>
-                      <a:round/>
-                      <a:headEnd type="none" w="med" len="med"/>
-                      <a:tailEnd type="none" w="med" len="med"/>
-                    </a:lnR>
-                    <a:lnT w="6350" cap="flat" cmpd="sng" algn="ctr">
-                      <a:solidFill>
-                        <a:srgbClr val="CBD5E1"/>
-                      </a:solidFill>
-                      <a:prstDash val="solid"/>
-                      <a:round/>
-                      <a:headEnd type="none" w="med" len="med"/>
-                      <a:tailEnd type="none" w="med" len="med"/>
-                    </a:lnT>
-                    <a:lnB w="6350" cap="flat" cmpd="sng" algn="ctr">
-                      <a:solidFill>
-                        <a:srgbClr val="CBD5E1"/>
-                      </a:solidFill>
-                      <a:prstDash val="solid"/>
-                      <a:round/>
-                      <a:headEnd type="none" w="med" len="med"/>
-                      <a:tailEnd type="none" w="med" len="med"/>
-                    </a:lnB>
-                    <a:solidFill>
-                      <a:srgbClr val="EEF2F7"/>
-                    </a:solidFill>
-                  </a:tcPr>
-                </a:tc>
-                <a:tc>
-                  <a:txBody>
-                    <a:bodyPr/>
-                    <a:lstStyle/>
-                    <a:p>
-                      <a:pPr algn="ctr" indent="0" marL="0">
-                        <a:buNone/>
-                      </a:pPr>
-                      <a:r>
-                        <a:rPr lang="en-US" sz="1500" dirty="0">
-                          <a:solidFill>
-                            <a:srgbClr val="334155"/>
-                          </a:solidFill>
-                        </a:rPr>
-                        <a:t>Yes</a:t>
-                      </a:r>
-                      <a:endParaRPr lang="en-US" sz="1500" dirty="0"/>
-                    </a:p>
-                  </a:txBody>
-                  <a:tcPr marL="109728" marR="109728" marT="0" marB="0" anchor="ctr">
-                    <a:lnL w="6350" cap="flat" cmpd="sng" algn="ctr">
-                      <a:solidFill>
-                        <a:srgbClr val="CBD5E1"/>
-                      </a:solidFill>
-                      <a:prstDash val="solid"/>
-                      <a:round/>
-                      <a:headEnd type="none" w="med" len="med"/>
-                      <a:tailEnd type="none" w="med" len="med"/>
-                    </a:lnL>
-                    <a:lnR w="6350" cap="flat" cmpd="sng" algn="ctr">
-                      <a:solidFill>
-                        <a:srgbClr val="CBD5E1"/>
-                      </a:solidFill>
-                      <a:prstDash val="solid"/>
-                      <a:round/>
-                      <a:headEnd type="none" w="med" len="med"/>
-                      <a:tailEnd type="none" w="med" len="med"/>
-                    </a:lnR>
-                    <a:lnT w="6350" cap="flat" cmpd="sng" algn="ctr">
-                      <a:solidFill>
-                        <a:srgbClr val="CBD5E1"/>
-                      </a:solidFill>
-                      <a:prstDash val="solid"/>
-                      <a:round/>
-                      <a:headEnd type="none" w="med" len="med"/>
-                      <a:tailEnd type="none" w="med" len="med"/>
-                    </a:lnT>
-                    <a:lnB w="6350" cap="flat" cmpd="sng" algn="ctr">
-                      <a:solidFill>
-                        <a:srgbClr val="CBD5E1"/>
-                      </a:solidFill>
-                      <a:prstDash val="solid"/>
-                      <a:round/>
-                      <a:headEnd type="none" w="med" len="med"/>
-                      <a:tailEnd type="none" w="med" len="med"/>
-                    </a:lnB>
-                    <a:solidFill>
-                      <a:srgbClr val="EEF2F7"/>
-                    </a:solidFill>
-                  </a:tcPr>
-                </a:tc>
-                <a:tc>
-                  <a:txBody>
-                    <a:bodyPr/>
-                    <a:lstStyle/>
-                    <a:p>
-                      <a:pPr algn="ctr" indent="0" marL="0">
-                        <a:buNone/>
-                      </a:pPr>
-                      <a:r>
-                        <a:rPr lang="en-US" sz="1500" b="1" dirty="0">
-                          <a:solidFill>
-                            <a:srgbClr val="0D9488"/>
-                          </a:solidFill>
-                        </a:rPr>
-                        <a:t>Yes</a:t>
-                      </a:r>
-                      <a:endParaRPr lang="en-US" sz="1500" dirty="0"/>
-                    </a:p>
-                  </a:txBody>
-                  <a:tcPr marL="109728" marR="109728" marT="0" marB="0" anchor="ctr">
-                    <a:lnL w="6350" cap="flat" cmpd="sng" algn="ctr">
-                      <a:solidFill>
-                        <a:srgbClr val="CBD5E1"/>
-                      </a:solidFill>
-                      <a:prstDash val="solid"/>
-                      <a:round/>
-                      <a:headEnd type="none" w="med" len="med"/>
-                      <a:tailEnd type="none" w="med" len="med"/>
-                    </a:lnL>
-                    <a:lnR w="6350" cap="flat" cmpd="sng" algn="ctr">
-                      <a:solidFill>
-                        <a:srgbClr val="CBD5E1"/>
-                      </a:solidFill>
-                      <a:prstDash val="solid"/>
-                      <a:round/>
-                      <a:headEnd type="none" w="med" len="med"/>
-                      <a:tailEnd type="none" w="med" len="med"/>
-                    </a:lnR>
-                    <a:lnT w="6350" cap="flat" cmpd="sng" algn="ctr">
-                      <a:solidFill>
-                        <a:srgbClr val="CBD5E1"/>
-                      </a:solidFill>
-                      <a:prstDash val="solid"/>
-                      <a:round/>
-                      <a:headEnd type="none" w="med" len="med"/>
-                      <a:tailEnd type="none" w="med" len="med"/>
-                    </a:lnT>
-                    <a:lnB w="6350" cap="flat" cmpd="sng" algn="ctr">
-                      <a:solidFill>
-                        <a:srgbClr val="CBD5E1"/>
-                      </a:solidFill>
-                      <a:prstDash val="solid"/>
-                      <a:round/>
-                      <a:headEnd type="none" w="med" len="med"/>
-                      <a:tailEnd type="none" w="med" len="med"/>
-                    </a:lnB>
-                    <a:solidFill>
-                      <a:srgbClr val="CCFBF1"/>
-                    </a:solidFill>
-                  </a:tcPr>
-                </a:tc>
-              </a:tr>
-              <a:tr h="457200">
-                <a:tc>
-                  <a:txBody>
-                    <a:bodyPr/>
-                    <a:lstStyle/>
-                    <a:p>
-                      <a:pPr indent="0" marL="0">
-                        <a:buNone/>
-                      </a:pPr>
-                      <a:r>
-                        <a:rPr lang="en-US" sz="1500" b="1" dirty="0">
-                          <a:solidFill>
-                            <a:srgbClr val="0F172A"/>
-                          </a:solidFill>
-                        </a:rPr>
-                        <a:t>Never spoils unless asked</a:t>
-                      </a:r>
-                      <a:endParaRPr lang="en-US" sz="1500" dirty="0"/>
-                    </a:p>
-                  </a:txBody>
-                  <a:tcPr marL="109728" marR="109728" marT="0" marB="0" anchor="ctr">
-                    <a:lnL w="6350" cap="flat" cmpd="sng" algn="ctr">
-                      <a:solidFill>
-                        <a:srgbClr val="CBD5E1"/>
-                      </a:solidFill>
-                      <a:prstDash val="solid"/>
-                      <a:round/>
-                      <a:headEnd type="none" w="med" len="med"/>
-                      <a:tailEnd type="none" w="med" len="med"/>
-                    </a:lnL>
-                    <a:lnR w="6350" cap="flat" cmpd="sng" algn="ctr">
-                      <a:solidFill>
-                        <a:srgbClr val="CBD5E1"/>
-                      </a:solidFill>
-                      <a:prstDash val="solid"/>
-                      <a:round/>
-                      <a:headEnd type="none" w="med" len="med"/>
-                      <a:tailEnd type="none" w="med" len="med"/>
-                    </a:lnR>
-                    <a:lnT w="6350" cap="flat" cmpd="sng" algn="ctr">
-                      <a:solidFill>
-                        <a:srgbClr val="CBD5E1"/>
-                      </a:solidFill>
-                      <a:prstDash val="solid"/>
-                      <a:round/>
-                      <a:headEnd type="none" w="med" len="med"/>
-                      <a:tailEnd type="none" w="med" len="med"/>
-                    </a:lnT>
-                    <a:lnB w="6350" cap="flat" cmpd="sng" algn="ctr">
-                      <a:solidFill>
-                        <a:srgbClr val="CBD5E1"/>
-                      </a:solidFill>
-                      <a:prstDash val="solid"/>
-                      <a:round/>
-                      <a:headEnd type="none" w="med" len="med"/>
-                      <a:tailEnd type="none" w="med" len="med"/>
-                    </a:lnB>
-                    <a:solidFill>
-                      <a:srgbClr val="FFFFFF"/>
-                    </a:solidFill>
-                  </a:tcPr>
-                </a:tc>
-                <a:tc>
-                  <a:txBody>
-                    <a:bodyPr/>
-                    <a:lstStyle/>
-                    <a:p>
-                      <a:pPr algn="ctr" indent="0" marL="0">
-                        <a:buNone/>
-                      </a:pPr>
-                      <a:r>
-                        <a:rPr lang="en-US" sz="1500" dirty="0">
-                          <a:solidFill>
-                            <a:srgbClr val="E11D48"/>
-                          </a:solidFill>
-                        </a:rPr>
-                        <a:t>n/a</a:t>
-                      </a:r>
-                      <a:endParaRPr lang="en-US" sz="1500" dirty="0"/>
-                    </a:p>
-                  </a:txBody>
-                  <a:tcPr marL="109728" marR="109728" marT="0" marB="0" anchor="ctr">
-                    <a:lnL w="6350" cap="flat" cmpd="sng" algn="ctr">
-                      <a:solidFill>
-                        <a:srgbClr val="CBD5E1"/>
-                      </a:solidFill>
-                      <a:prstDash val="solid"/>
-                      <a:round/>
-                      <a:headEnd type="none" w="med" len="med"/>
-                      <a:tailEnd type="none" w="med" len="med"/>
-                    </a:lnL>
-                    <a:lnR w="6350" cap="flat" cmpd="sng" algn="ctr">
-                      <a:solidFill>
-                        <a:srgbClr val="CBD5E1"/>
-                      </a:solidFill>
-                      <a:prstDash val="solid"/>
-                      <a:round/>
-                      <a:headEnd type="none" w="med" len="med"/>
-                      <a:tailEnd type="none" w="med" len="med"/>
-                    </a:lnR>
-                    <a:lnT w="6350" cap="flat" cmpd="sng" algn="ctr">
-                      <a:solidFill>
-                        <a:srgbClr val="CBD5E1"/>
-                      </a:solidFill>
-                      <a:prstDash val="solid"/>
-                      <a:round/>
-                      <a:headEnd type="none" w="med" len="med"/>
-                      <a:tailEnd type="none" w="med" len="med"/>
-                    </a:lnT>
-                    <a:lnB w="6350" cap="flat" cmpd="sng" algn="ctr">
-                      <a:solidFill>
-                        <a:srgbClr val="CBD5E1"/>
-                      </a:solidFill>
-                      <a:prstDash val="solid"/>
-                      <a:round/>
-                      <a:headEnd type="none" w="med" len="med"/>
-                      <a:tailEnd type="none" w="med" len="med"/>
-                    </a:lnB>
-                    <a:solidFill>
-                      <a:srgbClr val="FFFFFF"/>
-                    </a:solidFill>
-                  </a:tcPr>
-                </a:tc>
-                <a:tc>
-                  <a:txBody>
-                    <a:bodyPr/>
-                    <a:lstStyle/>
-                    <a:p>
-                      <a:pPr algn="ctr" indent="0" marL="0">
-                        <a:buNone/>
-                      </a:pPr>
-                      <a:r>
-                        <a:rPr lang="en-US" sz="1500" dirty="0">
-                          <a:solidFill>
-                            <a:srgbClr val="E11D48"/>
-                          </a:solidFill>
-                        </a:rPr>
-                        <a:t>No</a:t>
-                      </a:r>
-                      <a:endParaRPr lang="en-US" sz="1500" dirty="0"/>
-                    </a:p>
-                  </a:txBody>
-                  <a:tcPr marL="109728" marR="109728" marT="0" marB="0" anchor="ctr">
-                    <a:lnL w="6350" cap="flat" cmpd="sng" algn="ctr">
-                      <a:solidFill>
-                        <a:srgbClr val="CBD5E1"/>
-                      </a:solidFill>
-                      <a:prstDash val="solid"/>
-                      <a:round/>
-                      <a:headEnd type="none" w="med" len="med"/>
-                      <a:tailEnd type="none" w="med" len="med"/>
-                    </a:lnL>
-                    <a:lnR w="6350" cap="flat" cmpd="sng" algn="ctr">
-                      <a:solidFill>
-                        <a:srgbClr val="CBD5E1"/>
-                      </a:solidFill>
-                      <a:prstDash val="solid"/>
-                      <a:round/>
-                      <a:headEnd type="none" w="med" len="med"/>
-                      <a:tailEnd type="none" w="med" len="med"/>
-                    </a:lnR>
-                    <a:lnT w="6350" cap="flat" cmpd="sng" algn="ctr">
-                      <a:solidFill>
-                        <a:srgbClr val="CBD5E1"/>
-                      </a:solidFill>
-                      <a:prstDash val="solid"/>
-                      <a:round/>
-                      <a:headEnd type="none" w="med" len="med"/>
-                      <a:tailEnd type="none" w="med" len="med"/>
-                    </a:lnT>
-                    <a:lnB w="6350" cap="flat" cmpd="sng" algn="ctr">
-                      <a:solidFill>
-                        <a:srgbClr val="CBD5E1"/>
-                      </a:solidFill>
-                      <a:prstDash val="solid"/>
-                      <a:round/>
-                      <a:headEnd type="none" w="med" len="med"/>
-                      <a:tailEnd type="none" w="med" len="med"/>
-                    </a:lnB>
-                    <a:solidFill>
-                      <a:srgbClr val="FFFFFF"/>
-                    </a:solidFill>
-                  </a:tcPr>
-                </a:tc>
-                <a:tc>
-                  <a:txBody>
-                    <a:bodyPr/>
-                    <a:lstStyle/>
-                    <a:p>
-                      <a:pPr algn="ctr" indent="0" marL="0">
-                        <a:buNone/>
-                      </a:pPr>
-                      <a:r>
-                        <a:rPr lang="en-US" sz="1500" b="1" dirty="0">
-                          <a:solidFill>
-                            <a:srgbClr val="0D9488"/>
-                          </a:solidFill>
-                        </a:rPr>
-                        <a:t>Yes</a:t>
-                      </a:r>
-                      <a:endParaRPr lang="en-US" sz="1500" dirty="0"/>
-                    </a:p>
-                  </a:txBody>
-                  <a:tcPr marL="109728" marR="109728" marT="0" marB="0" anchor="ctr">
-                    <a:lnL w="6350" cap="flat" cmpd="sng" algn="ctr">
-                      <a:solidFill>
-                        <a:srgbClr val="CBD5E1"/>
-                      </a:solidFill>
-                      <a:prstDash val="solid"/>
-                      <a:round/>
-                      <a:headEnd type="none" w="med" len="med"/>
-                      <a:tailEnd type="none" w="med" len="med"/>
-                    </a:lnL>
-                    <a:lnR w="6350" cap="flat" cmpd="sng" algn="ctr">
-                      <a:solidFill>
-                        <a:srgbClr val="CBD5E1"/>
-                      </a:solidFill>
-                      <a:prstDash val="solid"/>
-                      <a:round/>
-                      <a:headEnd type="none" w="med" len="med"/>
-                      <a:tailEnd type="none" w="med" len="med"/>
-                    </a:lnR>
-                    <a:lnT w="6350" cap="flat" cmpd="sng" algn="ctr">
-                      <a:solidFill>
-                        <a:srgbClr val="CBD5E1"/>
-                      </a:solidFill>
-                      <a:prstDash val="solid"/>
-                      <a:round/>
-                      <a:headEnd type="none" w="med" len="med"/>
-                      <a:tailEnd type="none" w="med" len="med"/>
-                    </a:lnT>
-                    <a:lnB w="6350" cap="flat" cmpd="sng" algn="ctr">
-                      <a:solidFill>
-                        <a:srgbClr val="CBD5E1"/>
-                      </a:solidFill>
-                      <a:prstDash val="solid"/>
-                      <a:round/>
-                      <a:headEnd type="none" w="med" len="med"/>
-                      <a:tailEnd type="none" w="med" len="med"/>
-                    </a:lnB>
-                    <a:solidFill>
-                      <a:srgbClr val="CCFBF1"/>
-                    </a:solidFill>
-                  </a:tcPr>
-                </a:tc>
-              </a:tr>
-              <a:tr h="457200">
-                <a:tc>
-                  <a:txBody>
-                    <a:bodyPr/>
-                    <a:lstStyle/>
-                    <a:p>
-                      <a:pPr indent="0" marL="0">
-                        <a:buNone/>
-                      </a:pPr>
-                      <a:r>
-                        <a:rPr lang="en-US" sz="1500" b="1" dirty="0">
-                          <a:solidFill>
-                            <a:srgbClr val="0F172A"/>
-                          </a:solidFill>
-                        </a:rPr>
-                        <a:t>Works offline, no API needed</a:t>
-                      </a:r>
-                      <a:endParaRPr lang="en-US" sz="1500" dirty="0"/>
-                    </a:p>
-                  </a:txBody>
-                  <a:tcPr marL="109728" marR="109728" marT="0" marB="0" anchor="ctr">
-                    <a:lnL w="6350" cap="flat" cmpd="sng" algn="ctr">
-                      <a:solidFill>
-                        <a:srgbClr val="CBD5E1"/>
-                      </a:solidFill>
-                      <a:prstDash val="solid"/>
-                      <a:round/>
-                      <a:headEnd type="none" w="med" len="med"/>
-                      <a:tailEnd type="none" w="med" len="med"/>
-                    </a:lnL>
-                    <a:lnR w="6350" cap="flat" cmpd="sng" algn="ctr">
-                      <a:solidFill>
-                        <a:srgbClr val="CBD5E1"/>
-                      </a:solidFill>
-                      <a:prstDash val="solid"/>
-                      <a:round/>
-                      <a:headEnd type="none" w="med" len="med"/>
-                      <a:tailEnd type="none" w="med" len="med"/>
-                    </a:lnR>
-                    <a:lnT w="6350" cap="flat" cmpd="sng" algn="ctr">
-                      <a:solidFill>
-                        <a:srgbClr val="CBD5E1"/>
-                      </a:solidFill>
-                      <a:prstDash val="solid"/>
-                      <a:round/>
-                      <a:headEnd type="none" w="med" len="med"/>
-                      <a:tailEnd type="none" w="med" len="med"/>
-                    </a:lnT>
-                    <a:lnB w="6350" cap="flat" cmpd="sng" algn="ctr">
-                      <a:solidFill>
-                        <a:srgbClr val="CBD5E1"/>
-                      </a:solidFill>
-                      <a:prstDash val="solid"/>
-                      <a:round/>
-                      <a:headEnd type="none" w="med" len="med"/>
-                      <a:tailEnd type="none" w="med" len="med"/>
-                    </a:lnB>
-                    <a:solidFill>
-                      <a:srgbClr val="EEF2F7"/>
-                    </a:solidFill>
-                  </a:tcPr>
-                </a:tc>
-                <a:tc>
-                  <a:txBody>
-                    <a:bodyPr/>
-                    <a:lstStyle/>
-                    <a:p>
-                      <a:pPr algn="ctr" indent="0" marL="0">
-                        <a:buNone/>
-                      </a:pPr>
-                      <a:r>
-                        <a:rPr lang="en-US" sz="1500" dirty="0">
-                          <a:solidFill>
-                            <a:srgbClr val="334155"/>
-                          </a:solidFill>
-                        </a:rPr>
-                        <a:t>Yes</a:t>
-                      </a:r>
-                      <a:endParaRPr lang="en-US" sz="1500" dirty="0"/>
-                    </a:p>
-                  </a:txBody>
-                  <a:tcPr marL="109728" marR="109728" marT="0" marB="0" anchor="ctr">
-                    <a:lnL w="6350" cap="flat" cmpd="sng" algn="ctr">
-                      <a:solidFill>
-                        <a:srgbClr val="CBD5E1"/>
-                      </a:solidFill>
-                      <a:prstDash val="solid"/>
-                      <a:round/>
-                      <a:headEnd type="none" w="med" len="med"/>
-                      <a:tailEnd type="none" w="med" len="med"/>
-                    </a:lnL>
-                    <a:lnR w="6350" cap="flat" cmpd="sng" algn="ctr">
-                      <a:solidFill>
-                        <a:srgbClr val="CBD5E1"/>
-                      </a:solidFill>
-                      <a:prstDash val="solid"/>
-                      <a:round/>
-                      <a:headEnd type="none" w="med" len="med"/>
-                      <a:tailEnd type="none" w="med" len="med"/>
-                    </a:lnR>
-                    <a:lnT w="6350" cap="flat" cmpd="sng" algn="ctr">
-                      <a:solidFill>
-                        <a:srgbClr val="CBD5E1"/>
-                      </a:solidFill>
-                      <a:prstDash val="solid"/>
-                      <a:round/>
-                      <a:headEnd type="none" w="med" len="med"/>
-                      <a:tailEnd type="none" w="med" len="med"/>
-                    </a:lnT>
-                    <a:lnB w="6350" cap="flat" cmpd="sng" algn="ctr">
-                      <a:solidFill>
-                        <a:srgbClr val="CBD5E1"/>
-                      </a:solidFill>
-                      <a:prstDash val="solid"/>
-                      <a:round/>
-                      <a:headEnd type="none" w="med" len="med"/>
-                      <a:tailEnd type="none" w="med" len="med"/>
-                    </a:lnB>
-                    <a:solidFill>
-                      <a:srgbClr val="EEF2F7"/>
-                    </a:solidFill>
-                  </a:tcPr>
-                </a:tc>
-                <a:tc>
-                  <a:txBody>
-                    <a:bodyPr/>
-                    <a:lstStyle/>
-                    <a:p>
-                      <a:pPr algn="ctr" indent="0" marL="0">
-                        <a:buNone/>
-                      </a:pPr>
-                      <a:r>
-                        <a:rPr lang="en-US" sz="1500" dirty="0">
-                          <a:solidFill>
-                            <a:srgbClr val="E11D48"/>
-                          </a:solidFill>
-                        </a:rPr>
-                        <a:t>No</a:t>
-                      </a:r>
-                      <a:endParaRPr lang="en-US" sz="1500" dirty="0"/>
-                    </a:p>
-                  </a:txBody>
-                  <a:tcPr marL="109728" marR="109728" marT="0" marB="0" anchor="ctr">
-                    <a:lnL w="6350" cap="flat" cmpd="sng" algn="ctr">
-                      <a:solidFill>
-                        <a:srgbClr val="CBD5E1"/>
-                      </a:solidFill>
-                      <a:prstDash val="solid"/>
-                      <a:round/>
-                      <a:headEnd type="none" w="med" len="med"/>
-                      <a:tailEnd type="none" w="med" len="med"/>
-                    </a:lnL>
-                    <a:lnR w="6350" cap="flat" cmpd="sng" algn="ctr">
-                      <a:solidFill>
-                        <a:srgbClr val="CBD5E1"/>
-                      </a:solidFill>
-                      <a:prstDash val="solid"/>
-                      <a:round/>
-                      <a:headEnd type="none" w="med" len="med"/>
-                      <a:tailEnd type="none" w="med" len="med"/>
-                    </a:lnR>
-                    <a:lnT w="6350" cap="flat" cmpd="sng" algn="ctr">
-                      <a:solidFill>
-                        <a:srgbClr val="CBD5E1"/>
-                      </a:solidFill>
-                      <a:prstDash val="solid"/>
-                      <a:round/>
-                      <a:headEnd type="none" w="med" len="med"/>
-                      <a:tailEnd type="none" w="med" len="med"/>
-                    </a:lnT>
-                    <a:lnB w="6350" cap="flat" cmpd="sng" algn="ctr">
-                      <a:solidFill>
-                        <a:srgbClr val="CBD5E1"/>
-                      </a:solidFill>
-                      <a:prstDash val="solid"/>
-                      <a:round/>
-                      <a:headEnd type="none" w="med" len="med"/>
-                      <a:tailEnd type="none" w="med" len="med"/>
-                    </a:lnB>
-                    <a:solidFill>
-                      <a:srgbClr val="EEF2F7"/>
-                    </a:solidFill>
-                  </a:tcPr>
-                </a:tc>
-                <a:tc>
-                  <a:txBody>
-                    <a:bodyPr/>
-                    <a:lstStyle/>
-                    <a:p>
-                      <a:pPr algn="ctr" indent="0" marL="0">
-                        <a:buNone/>
-                      </a:pPr>
-                      <a:r>
-                        <a:rPr lang="en-US" sz="1500" b="1" dirty="0">
-                          <a:solidFill>
-                            <a:srgbClr val="0D9488"/>
-                          </a:solidFill>
-                        </a:rPr>
-                        <a:t>Yes</a:t>
-                      </a:r>
-                      <a:endParaRPr lang="en-US" sz="1500" dirty="0"/>
-                    </a:p>
-                  </a:txBody>
-                  <a:tcPr marL="109728" marR="109728" marT="0" marB="0" anchor="ctr">
-                    <a:lnL w="6350" cap="flat" cmpd="sng" algn="ctr">
-                      <a:solidFill>
-                        <a:srgbClr val="CBD5E1"/>
-                      </a:solidFill>
-                      <a:prstDash val="solid"/>
-                      <a:round/>
-                      <a:headEnd type="none" w="med" len="med"/>
-                      <a:tailEnd type="none" w="med" len="med"/>
-                    </a:lnL>
-                    <a:lnR w="6350" cap="flat" cmpd="sng" algn="ctr">
-                      <a:solidFill>
-                        <a:srgbClr val="CBD5E1"/>
-                      </a:solidFill>
-                      <a:prstDash val="solid"/>
-                      <a:round/>
-                      <a:headEnd type="none" w="med" len="med"/>
-                      <a:tailEnd type="none" w="med" len="med"/>
-                    </a:lnR>
-                    <a:lnT w="6350" cap="flat" cmpd="sng" algn="ctr">
-                      <a:solidFill>
-                        <a:srgbClr val="CBD5E1"/>
-                      </a:solidFill>
-                      <a:prstDash val="solid"/>
-                      <a:round/>
-                      <a:headEnd type="none" w="med" len="med"/>
-                      <a:tailEnd type="none" w="med" len="med"/>
-                    </a:lnT>
-                    <a:lnB w="6350" cap="flat" cmpd="sng" algn="ctr">
-                      <a:solidFill>
-                        <a:srgbClr val="CBD5E1"/>
-                      </a:solidFill>
-                      <a:prstDash val="solid"/>
-                      <a:round/>
-                      <a:headEnd type="none" w="med" len="med"/>
-                      <a:tailEnd type="none" w="med" len="med"/>
-                    </a:lnB>
-                    <a:solidFill>
-                      <a:srgbClr val="CCFBF1"/>
-                    </a:solidFill>
-                  </a:tcPr>
-                </a:tc>
-              </a:tr>
-            </a:tbl>
-          </a:graphicData>
-        </a:graphic>
-      </p:graphicFrame>
-      <p:sp>
-        <p:nvSpPr>
-          <p:cNvPr id="4" name="Text 1"/>
-          <p:cNvSpPr txBox="1"/>
-          <p:nvPr/>
-        </p:nvSpPr>
-        <p:spPr>
-          <a:xfrm>
-            <a:off x="457200" y="4206240"/>
-            <a:ext cx="8229600" cy="457200"/>
-          </a:xfrm>
-          <a:prstGeom prst="rect">
-            <a:avLst/>
-          </a:prstGeom>
-          <a:noFill/>
-          <a:ln/>
-        </p:spPr>
-        <p:txBody>
-          <a:bodyPr wrap="square" lIns="0" tIns="0" rIns="0" bIns="0" rtlCol="0" anchor="t"/>
-          <a:lstStyle/>
-          <a:p>
-            <a:pPr indent="0" marL="0">
-              <a:buNone/>
-            </a:pPr>
-            <a:r>
-              <a:rPr lang="en-US" sz="1400" i="1" dirty="0">
-                <a:solidFill>
-                  <a:srgbClr val="64748B"/>
-                </a:solidFill>
-              </a:rPr>
-              <a:t>Symbolic AI gives correctness and explainability; the language model adds conversation.</a:t>
-            </a:r>
-            <a:endParaRPr lang="en-US" sz="1400" dirty="0"/>
-          </a:p>
-        </p:txBody>
-      </p:sp>
-      <p:sp>
-        <p:nvSpPr>
-          <p:cNvPr id="25" name="Slide Number Placeholder 0"/>
-          <p:cNvSpPr>
-            <a:spLocks noGrp="1"/>
-          </p:cNvSpPr>
-          <p:nvPr>
-            <p:ph type="sldNum" sz="quarter" idx="4294967295"/>
-          </p:nvPr>
-        </p:nvSpPr>
-        <p:spPr>
-          <a:xfrm>
-            <a:off x="8229600" y="4773168"/>
-            <a:ext cx="457200" cy="228600"/>
-          </a:xfrm>
-          <a:prstGeom prst="rect">
-            <a:avLst/>
-          </a:prstGeom>
-          <a:extLst>
-            <a:ext uri="{C572A759-6A51-4108-AA02-DFA0A04FC94B}">
-              <ma14:wrappingTextBoxFlag xmlns:ma14="http://schemas.microsoft.com/office/mac/drawingml/2011/main" val="0"/>
-            </a:ext>
-          </a:extLst>
-        </p:spPr>
-        <p:txBody>
-          <a:bodyPr/>
-          <a:lstStyle>
-            <a:lvl1pPr>
-              <a:defRPr sz="1000">
-                <a:solidFill>
-                  <a:srgbClr val="64748B"/>
-                </a:solidFill>
-              </a:defRPr>
-            </a:lvl1pPr>
-          </a:lstStyle>
+      <p:sp>
+        <p:nvSpPr>
+          <p:cNvPr id="33" name="TextBox 32"/>
+          <p:cNvSpPr txBox="1"/>
+          <p:nvPr/>
+        </p:nvSpPr>
+        <p:spPr>
+          <a:xfrm>
+            <a:off x="4572000" y="4782312"/>
+            <a:ext cx="3474720" cy="228600"/>
+          </a:xfrm>
+          <a:prstGeom prst="rect">
+            <a:avLst/>
+          </a:prstGeom>
+          <a:noFill/>
+        </p:spPr>
+        <p:txBody>
+          <a:bodyPr wrap="square" lIns="0" rIns="0" tIns="0" bIns="0" anchor="ctr">
+            <a:spAutoFit/>
+          </a:bodyPr>
+          <a:lstStyle/>
           <a:p>
             <a:pPr algn="r"/>
-            <a:fld id="{F7021451-1387-4CA6-816F-3879F97B5CBC}" type="slidenum">
-              <a:rPr b="0" lang="en-US"/>
-              <a:t>9</a:t>
-            </a:fld>
-            <a:endParaRPr lang="en-US"/>
+            <a:r>
+              <a:rPr sz="900" b="1">
+                <a:solidFill>
+                  <a:srgbClr val="7C3AED"/>
+                </a:solidFill>
+              </a:rPr>
+              <a:t>Presenter: Sathwik Teja</a:t>
+            </a:r>
           </a:p>
         </p:txBody>
       </p:sp>

--- a/Sudoku_AI_Coach_Presentation.pptx
+++ b/Sudoku_AI_Coach_Presentation.pptx
@@ -9113,7 +9113,7 @@
                   <a:srgbClr val="64748B"/>
                 </a:solidFill>
               </a:rPr>
-              <a:t>2024BCD0040</a:t>
+              <a:t>2024BEC0040</a:t>
             </a:r>
           </a:p>
         </p:txBody>
